--- a/Aula2_Notas_N+1_e_interface.pptx
+++ b/Aula2_Notas_N+1_e_interface.pptx
@@ -23,6 +23,7 @@
     <p:sldId id="271" r:id="rId17"/>
     <p:sldId id="272" r:id="rId18"/>
     <p:sldId id="273" r:id="rId19"/>
+    <p:sldId id="277" r:id="rId28"/>
     <p:sldId id="274" r:id="rId20"/>
     <p:sldId id="275" r:id="rId21"/>
     <p:sldId id="276" r:id="rId22"/>
@@ -3862,7 +3863,7 @@
           <a:ln/>
         </p:spPr>
         <p:txBody>
-          <a:bodyPr wrap="square" lIns="0" tIns="0" rIns="0" bIns="0" rtlCol="0" anchor="ctr"/>
+          <a:bodyPr wrap="none" lIns="0" tIns="0" rIns="0" bIns="0" rtlCol="0" anchor="ctr"/>
           <a:lstStyle/>
           <a:p>
             <a:pPr indent="0" marL="0">
@@ -3873,9 +3874,9 @@
                 <a:solidFill>
                   <a:srgbClr val="8B949E"/>
                 </a:solidFill>
-                <a:latin typeface="Consolas" pitchFamily="34" charset="0"/>
-                <a:ea typeface="Consolas" pitchFamily="34" charset="-122"/>
-                <a:cs typeface="Consolas" pitchFamily="34" charset="-120"/>
+                <a:latin typeface="Courier New" pitchFamily="49" charset="0"/>
+                <a:ea typeface="Courier New" pitchFamily="49" charset="-122"/>
+                <a:cs typeface="Courier New" pitchFamily="49" charset="-120"/>
               </a:rPr>
               <a:t>academico/views.py · TODO 12a</a:t>
             </a:r>
@@ -3901,7 +3902,7 @@
           <a:ln/>
         </p:spPr>
         <p:txBody>
-          <a:bodyPr wrap="square" lIns="0" tIns="0" rIns="0" bIns="0" rtlCol="0" anchor="t"/>
+          <a:bodyPr wrap="none" lIns="0" tIns="0" rIns="0" bIns="0" rtlCol="0" anchor="t"/>
           <a:lstStyle/>
           <a:p>
             <a:pPr indent="0" marL="0">
@@ -3912,9 +3913,9 @@
                 <a:solidFill>
                   <a:srgbClr val="E6EDF3"/>
                 </a:solidFill>
-                <a:latin typeface="Consolas" pitchFamily="34" charset="0"/>
-                <a:ea typeface="Consolas" pitchFamily="34" charset="-122"/>
-                <a:cs typeface="Consolas" pitchFamily="34" charset="-120"/>
+                <a:latin typeface="Courier New" pitchFamily="49" charset="0"/>
+                <a:ea typeface="Courier New" pitchFamily="49" charset="-122"/>
+                <a:cs typeface="Courier New" pitchFamily="49" charset="-120"/>
               </a:rPr>
               <a:t>inscricoes = (</a:t>
             </a:r>
@@ -3929,9 +3930,9 @@
                 <a:solidFill>
                   <a:srgbClr val="E6EDF3"/>
                 </a:solidFill>
-                <a:latin typeface="Consolas" pitchFamily="34" charset="0"/>
-                <a:ea typeface="Consolas" pitchFamily="34" charset="-122"/>
-                <a:cs typeface="Consolas" pitchFamily="34" charset="-120"/>
+                <a:latin typeface="Courier New" pitchFamily="49" charset="0"/>
+                <a:ea typeface="Courier New" pitchFamily="49" charset="-122"/>
+                <a:cs typeface="Courier New" pitchFamily="49" charset="-120"/>
               </a:rPr>
               <a:t>    Inscricao.objects</a:t>
             </a:r>
@@ -3946,9 +3947,9 @@
                 <a:solidFill>
                   <a:srgbClr val="E6EDF3"/>
                 </a:solidFill>
-                <a:latin typeface="Consolas" pitchFamily="34" charset="0"/>
-                <a:ea typeface="Consolas" pitchFamily="34" charset="-122"/>
-                <a:cs typeface="Consolas" pitchFamily="34" charset="-120"/>
+                <a:latin typeface="Courier New" pitchFamily="49" charset="0"/>
+                <a:ea typeface="Courier New" pitchFamily="49" charset="-122"/>
+                <a:cs typeface="Courier New" pitchFamily="49" charset="-120"/>
               </a:rPr>
               <a:t>    .select_related(</a:t>
             </a:r>
@@ -3963,9 +3964,9 @@
                 <a:solidFill>
                   <a:srgbClr val="E6EDF3"/>
                 </a:solidFill>
-                <a:latin typeface="Consolas" pitchFamily="34" charset="0"/>
-                <a:ea typeface="Consolas" pitchFamily="34" charset="-122"/>
-                <a:cs typeface="Consolas" pitchFamily="34" charset="-120"/>
+                <a:latin typeface="Courier New" pitchFamily="49" charset="0"/>
+                <a:ea typeface="Courier New" pitchFamily="49" charset="-122"/>
+                <a:cs typeface="Courier New" pitchFamily="49" charset="-120"/>
               </a:rPr>
               <a:t>        </a:t>
             </a:r>
@@ -3977,9 +3978,9 @@
                 <a:solidFill>
                   <a:srgbClr val="F0C674"/>
                 </a:solidFill>
-                <a:latin typeface="Consolas" pitchFamily="34" charset="0"/>
-                <a:ea typeface="Consolas" pitchFamily="34" charset="-122"/>
-                <a:cs typeface="Consolas" pitchFamily="34" charset="-120"/>
+                <a:latin typeface="Courier New" pitchFamily="49" charset="0"/>
+                <a:ea typeface="Courier New" pitchFamily="49" charset="-122"/>
+                <a:cs typeface="Courier New" pitchFamily="49" charset="-120"/>
               </a:rPr>
               <a:t>"aluno"</a:t>
             </a:r>
@@ -3991,9 +3992,9 @@
                 <a:solidFill>
                   <a:srgbClr val="E6EDF3"/>
                 </a:solidFill>
-                <a:latin typeface="Consolas" pitchFamily="34" charset="0"/>
-                <a:ea typeface="Consolas" pitchFamily="34" charset="-122"/>
-                <a:cs typeface="Consolas" pitchFamily="34" charset="-120"/>
+                <a:latin typeface="Courier New" pitchFamily="49" charset="0"/>
+                <a:ea typeface="Courier New" pitchFamily="49" charset="-122"/>
+                <a:cs typeface="Courier New" pitchFamily="49" charset="-120"/>
               </a:rPr>
               <a:t>, </a:t>
             </a:r>
@@ -4005,9 +4006,9 @@
                 <a:solidFill>
                   <a:srgbClr val="F0C674"/>
                 </a:solidFill>
-                <a:latin typeface="Consolas" pitchFamily="34" charset="0"/>
-                <a:ea typeface="Consolas" pitchFamily="34" charset="-122"/>
-                <a:cs typeface="Consolas" pitchFamily="34" charset="-120"/>
+                <a:latin typeface="Courier New" pitchFamily="49" charset="0"/>
+                <a:ea typeface="Courier New" pitchFamily="49" charset="-122"/>
+                <a:cs typeface="Courier New" pitchFamily="49" charset="-120"/>
               </a:rPr>
               <a:t>"disciplina"</a:t>
             </a:r>
@@ -4019,9 +4020,9 @@
                 <a:solidFill>
                   <a:srgbClr val="E6EDF3"/>
                 </a:solidFill>
-                <a:latin typeface="Consolas" pitchFamily="34" charset="0"/>
-                <a:ea typeface="Consolas" pitchFamily="34" charset="-122"/>
-                <a:cs typeface="Consolas" pitchFamily="34" charset="-120"/>
+                <a:latin typeface="Courier New" pitchFamily="49" charset="0"/>
+                <a:ea typeface="Courier New" pitchFamily="49" charset="-122"/>
+                <a:cs typeface="Courier New" pitchFamily="49" charset="-120"/>
               </a:rPr>
               <a:t>))</a:t>
             </a:r>
@@ -4036,9 +4037,9 @@
                 <a:solidFill>
                   <a:srgbClr val="8B949E"/>
                 </a:solidFill>
-                <a:latin typeface="Consolas" pitchFamily="34" charset="0"/>
-                <a:ea typeface="Consolas" pitchFamily="34" charset="-122"/>
-                <a:cs typeface="Consolas" pitchFamily="34" charset="-120"/>
+                <a:latin typeface="Courier New" pitchFamily="49" charset="0"/>
+                <a:ea typeface="Courier New" pitchFamily="49" charset="-122"/>
+                <a:cs typeface="Courier New" pitchFamily="49" charset="-120"/>
               </a:rPr>
               <a:t># 1 consulta, não 1 + 2N</a:t>
             </a:r>
@@ -4229,7 +4230,7 @@
           <a:ln/>
         </p:spPr>
         <p:txBody>
-          <a:bodyPr wrap="square" lIns="0" tIns="0" rIns="0" bIns="0" rtlCol="0" anchor="ctr"/>
+          <a:bodyPr wrap="none" lIns="0" tIns="0" rIns="0" bIns="0" rtlCol="0" anchor="ctr"/>
           <a:lstStyle/>
           <a:p>
             <a:pPr indent="0" marL="0">
@@ -4240,9 +4241,9 @@
                 <a:solidFill>
                   <a:srgbClr val="8B949E"/>
                 </a:solidFill>
-                <a:latin typeface="Consolas" pitchFamily="34" charset="0"/>
-                <a:ea typeface="Consolas" pitchFamily="34" charset="-122"/>
-                <a:cs typeface="Consolas" pitchFamily="34" charset="-120"/>
+                <a:latin typeface="Courier New" pitchFamily="49" charset="0"/>
+                <a:ea typeface="Courier New" pitchFamily="49" charset="-122"/>
+                <a:cs typeface="Courier New" pitchFamily="49" charset="-120"/>
               </a:rPr>
               <a:t>academico/forms.py · TODO 6</a:t>
             </a:r>
@@ -4268,20 +4269,20 @@
           <a:ln/>
         </p:spPr>
         <p:txBody>
-          <a:bodyPr wrap="square" lIns="0" tIns="0" rIns="0" bIns="0" rtlCol="0" anchor="t"/>
-          <a:lstStyle/>
-          <a:p>
-            <a:pPr indent="0" marL="0">
-              <a:buNone/>
-            </a:pPr>
-            <a:r>
-              <a:rPr lang="en-US" sz="1050" dirty="0">
+          <a:bodyPr wrap="none" lIns="0" tIns="0" rIns="0" bIns="0" rtlCol="0" anchor="t"/>
+          <a:lstStyle/>
+          <a:p>
+            <a:pPr indent="0" marL="0">
+              <a:buNone/>
+            </a:pPr>
+            <a:r>
+              <a:rPr lang="en-US" sz="1000" dirty="0">
                 <a:solidFill>
                   <a:srgbClr val="7DCFFF"/>
                 </a:solidFill>
-                <a:latin typeface="Consolas" pitchFamily="34" charset="0"/>
-                <a:ea typeface="Consolas" pitchFamily="34" charset="-122"/>
-                <a:cs typeface="Consolas" pitchFamily="34" charset="-120"/>
+                <a:latin typeface="Courier New" pitchFamily="49" charset="0"/>
+                <a:ea typeface="Courier New" pitchFamily="49" charset="-122"/>
+                <a:cs typeface="Courier New" pitchFamily="49" charset="-120"/>
               </a:rPr>
               <a:t>class</a:t>
             </a:r>
@@ -4289,30 +4290,30 @@
               <a:buNone/>
             </a:pPr>
             <a:r>
-              <a:rPr lang="en-US" sz="1050" dirty="0">
+              <a:rPr lang="en-US" sz="1000" dirty="0">
                 <a:solidFill>
                   <a:srgbClr val="E6EDF3"/>
                 </a:solidFill>
-                <a:latin typeface="Consolas" pitchFamily="34" charset="0"/>
-                <a:ea typeface="Consolas" pitchFamily="34" charset="-122"/>
-                <a:cs typeface="Consolas" pitchFamily="34" charset="-120"/>
+                <a:latin typeface="Courier New" pitchFamily="49" charset="0"/>
+                <a:ea typeface="Courier New" pitchFamily="49" charset="-122"/>
+                <a:cs typeface="Courier New" pitchFamily="49" charset="-120"/>
               </a:rPr>
               <a:t> InscricaoForm(BootstrapMixin, forms.ModelForm):</a:t>
             </a:r>
-            <a:endParaRPr lang="en-US" sz="1050" dirty="0"/>
-          </a:p>
-          <a:p>
-            <a:pPr indent="0" marL="0">
-              <a:buNone/>
-            </a:pPr>
-            <a:r>
-              <a:rPr lang="en-US" sz="1050" dirty="0">
+            <a:endParaRPr lang="en-US" sz="1000" dirty="0"/>
+          </a:p>
+          <a:p>
+            <a:pPr indent="0" marL="0">
+              <a:buNone/>
+            </a:pPr>
+            <a:r>
+              <a:rPr lang="en-US" sz="1000" dirty="0">
                 <a:solidFill>
                   <a:srgbClr val="E6EDF3"/>
                 </a:solidFill>
-                <a:latin typeface="Consolas" pitchFamily="34" charset="0"/>
-                <a:ea typeface="Consolas" pitchFamily="34" charset="-122"/>
-                <a:cs typeface="Consolas" pitchFamily="34" charset="-120"/>
+                <a:latin typeface="Courier New" pitchFamily="49" charset="0"/>
+                <a:ea typeface="Courier New" pitchFamily="49" charset="-122"/>
+                <a:cs typeface="Courier New" pitchFamily="49" charset="-120"/>
               </a:rPr>
               <a:t>    </a:t>
             </a:r>
@@ -4320,13 +4321,13 @@
               <a:buNone/>
             </a:pPr>
             <a:r>
-              <a:rPr lang="en-US" sz="1050" dirty="0">
+              <a:rPr lang="en-US" sz="1000" dirty="0">
                 <a:solidFill>
                   <a:srgbClr val="7DCFFF"/>
                 </a:solidFill>
-                <a:latin typeface="Consolas" pitchFamily="34" charset="0"/>
-                <a:ea typeface="Consolas" pitchFamily="34" charset="-122"/>
-                <a:cs typeface="Consolas" pitchFamily="34" charset="-120"/>
+                <a:latin typeface="Courier New" pitchFamily="49" charset="0"/>
+                <a:ea typeface="Courier New" pitchFamily="49" charset="-122"/>
+                <a:cs typeface="Courier New" pitchFamily="49" charset="-120"/>
               </a:rPr>
               <a:t>class</a:t>
             </a:r>
@@ -4334,47 +4335,47 @@
               <a:buNone/>
             </a:pPr>
             <a:r>
-              <a:rPr lang="en-US" sz="1050" dirty="0">
+              <a:rPr lang="en-US" sz="1000" dirty="0">
                 <a:solidFill>
                   <a:srgbClr val="E6EDF3"/>
                 </a:solidFill>
-                <a:latin typeface="Consolas" pitchFamily="34" charset="0"/>
-                <a:ea typeface="Consolas" pitchFamily="34" charset="-122"/>
-                <a:cs typeface="Consolas" pitchFamily="34" charset="-120"/>
+                <a:latin typeface="Courier New" pitchFamily="49" charset="0"/>
+                <a:ea typeface="Courier New" pitchFamily="49" charset="-122"/>
+                <a:cs typeface="Courier New" pitchFamily="49" charset="-120"/>
               </a:rPr>
               <a:t> Meta:</a:t>
             </a:r>
-            <a:endParaRPr lang="en-US" sz="1050" dirty="0"/>
-          </a:p>
-          <a:p>
-            <a:pPr indent="0" marL="0">
-              <a:buNone/>
-            </a:pPr>
-            <a:r>
-              <a:rPr lang="en-US" sz="1050" dirty="0">
+            <a:endParaRPr lang="en-US" sz="1000" dirty="0"/>
+          </a:p>
+          <a:p>
+            <a:pPr indent="0" marL="0">
+              <a:buNone/>
+            </a:pPr>
+            <a:r>
+              <a:rPr lang="en-US" sz="1000" dirty="0">
                 <a:solidFill>
                   <a:srgbClr val="E6EDF3"/>
                 </a:solidFill>
-                <a:latin typeface="Consolas" pitchFamily="34" charset="0"/>
-                <a:ea typeface="Consolas" pitchFamily="34" charset="-122"/>
-                <a:cs typeface="Consolas" pitchFamily="34" charset="-120"/>
+                <a:latin typeface="Courier New" pitchFamily="49" charset="0"/>
+                <a:ea typeface="Courier New" pitchFamily="49" charset="-122"/>
+                <a:cs typeface="Courier New" pitchFamily="49" charset="-120"/>
               </a:rPr>
               <a:t>        model = Inscricao</a:t>
             </a:r>
-            <a:endParaRPr lang="en-US" sz="1050" dirty="0"/>
-          </a:p>
-          <a:p>
-            <a:pPr indent="0" marL="0">
-              <a:buNone/>
-            </a:pPr>
-            <a:r>
-              <a:rPr lang="en-US" sz="1050" dirty="0">
+            <a:endParaRPr lang="en-US" sz="1000" dirty="0"/>
+          </a:p>
+          <a:p>
+            <a:pPr indent="0" marL="0">
+              <a:buNone/>
+            </a:pPr>
+            <a:r>
+              <a:rPr lang="en-US" sz="1000" dirty="0">
                 <a:solidFill>
                   <a:srgbClr val="E6EDF3"/>
                 </a:solidFill>
-                <a:latin typeface="Consolas" pitchFamily="34" charset="0"/>
-                <a:ea typeface="Consolas" pitchFamily="34" charset="-122"/>
-                <a:cs typeface="Consolas" pitchFamily="34" charset="-120"/>
+                <a:latin typeface="Courier New" pitchFamily="49" charset="0"/>
+                <a:ea typeface="Courier New" pitchFamily="49" charset="-122"/>
+                <a:cs typeface="Courier New" pitchFamily="49" charset="-120"/>
               </a:rPr>
               <a:t>        fields = [</a:t>
             </a:r>
@@ -4382,13 +4383,13 @@
               <a:buNone/>
             </a:pPr>
             <a:r>
-              <a:rPr lang="en-US" sz="1050" dirty="0">
+              <a:rPr lang="en-US" sz="1000" dirty="0">
                 <a:solidFill>
                   <a:srgbClr val="F0C674"/>
                 </a:solidFill>
-                <a:latin typeface="Consolas" pitchFamily="34" charset="0"/>
-                <a:ea typeface="Consolas" pitchFamily="34" charset="-122"/>
-                <a:cs typeface="Consolas" pitchFamily="34" charset="-120"/>
+                <a:latin typeface="Courier New" pitchFamily="49" charset="0"/>
+                <a:ea typeface="Courier New" pitchFamily="49" charset="-122"/>
+                <a:cs typeface="Courier New" pitchFamily="49" charset="-120"/>
               </a:rPr>
               <a:t>"aluno"</a:t>
             </a:r>
@@ -4396,13 +4397,13 @@
               <a:buNone/>
             </a:pPr>
             <a:r>
-              <a:rPr lang="en-US" sz="1050" dirty="0">
+              <a:rPr lang="en-US" sz="1000" dirty="0">
                 <a:solidFill>
                   <a:srgbClr val="E6EDF3"/>
                 </a:solidFill>
-                <a:latin typeface="Consolas" pitchFamily="34" charset="0"/>
-                <a:ea typeface="Consolas" pitchFamily="34" charset="-122"/>
-                <a:cs typeface="Consolas" pitchFamily="34" charset="-120"/>
+                <a:latin typeface="Courier New" pitchFamily="49" charset="0"/>
+                <a:ea typeface="Courier New" pitchFamily="49" charset="-122"/>
+                <a:cs typeface="Courier New" pitchFamily="49" charset="-120"/>
               </a:rPr>
               <a:t>, </a:t>
             </a:r>
@@ -4410,13 +4411,13 @@
               <a:buNone/>
             </a:pPr>
             <a:r>
-              <a:rPr lang="en-US" sz="1050" dirty="0">
+              <a:rPr lang="en-US" sz="1000" dirty="0">
                 <a:solidFill>
                   <a:srgbClr val="F0C674"/>
                 </a:solidFill>
-                <a:latin typeface="Consolas" pitchFamily="34" charset="0"/>
-                <a:ea typeface="Consolas" pitchFamily="34" charset="-122"/>
-                <a:cs typeface="Consolas" pitchFamily="34" charset="-120"/>
+                <a:latin typeface="Courier New" pitchFamily="49" charset="0"/>
+                <a:ea typeface="Courier New" pitchFamily="49" charset="-122"/>
+                <a:cs typeface="Courier New" pitchFamily="49" charset="-120"/>
               </a:rPr>
               <a:t>"disciplina"</a:t>
             </a:r>
@@ -4424,13 +4425,13 @@
               <a:buNone/>
             </a:pPr>
             <a:r>
-              <a:rPr lang="en-US" sz="1050" dirty="0">
+              <a:rPr lang="en-US" sz="1000" dirty="0">
                 <a:solidFill>
                   <a:srgbClr val="E6EDF3"/>
                 </a:solidFill>
-                <a:latin typeface="Consolas" pitchFamily="34" charset="0"/>
-                <a:ea typeface="Consolas" pitchFamily="34" charset="-122"/>
-                <a:cs typeface="Consolas" pitchFamily="34" charset="-120"/>
+                <a:latin typeface="Courier New" pitchFamily="49" charset="0"/>
+                <a:ea typeface="Courier New" pitchFamily="49" charset="-122"/>
+                <a:cs typeface="Courier New" pitchFamily="49" charset="-120"/>
               </a:rPr>
               <a:t>, </a:t>
             </a:r>
@@ -4438,13 +4439,13 @@
               <a:buNone/>
             </a:pPr>
             <a:r>
-              <a:rPr lang="en-US" sz="1050" dirty="0">
+              <a:rPr lang="en-US" sz="1000" dirty="0">
                 <a:solidFill>
                   <a:srgbClr val="F0C674"/>
                 </a:solidFill>
-                <a:latin typeface="Consolas" pitchFamily="34" charset="0"/>
-                <a:ea typeface="Consolas" pitchFamily="34" charset="-122"/>
-                <a:cs typeface="Consolas" pitchFamily="34" charset="-120"/>
+                <a:latin typeface="Courier New" pitchFamily="49" charset="0"/>
+                <a:ea typeface="Courier New" pitchFamily="49" charset="-122"/>
+                <a:cs typeface="Courier New" pitchFamily="49" charset="-120"/>
               </a:rPr>
               <a:t>"nota1"</a:t>
             </a:r>
@@ -4452,13 +4453,13 @@
               <a:buNone/>
             </a:pPr>
             <a:r>
-              <a:rPr lang="en-US" sz="1050" dirty="0">
+              <a:rPr lang="en-US" sz="1000" dirty="0">
                 <a:solidFill>
                   <a:srgbClr val="E6EDF3"/>
                 </a:solidFill>
-                <a:latin typeface="Consolas" pitchFamily="34" charset="0"/>
-                <a:ea typeface="Consolas" pitchFamily="34" charset="-122"/>
-                <a:cs typeface="Consolas" pitchFamily="34" charset="-120"/>
+                <a:latin typeface="Courier New" pitchFamily="49" charset="0"/>
+                <a:ea typeface="Courier New" pitchFamily="49" charset="-122"/>
+                <a:cs typeface="Courier New" pitchFamily="49" charset="-120"/>
               </a:rPr>
               <a:t>, </a:t>
             </a:r>
@@ -4466,13 +4467,13 @@
               <a:buNone/>
             </a:pPr>
             <a:r>
-              <a:rPr lang="en-US" sz="1050" dirty="0">
+              <a:rPr lang="en-US" sz="1000" dirty="0">
                 <a:solidFill>
                   <a:srgbClr val="F0C674"/>
                 </a:solidFill>
-                <a:latin typeface="Consolas" pitchFamily="34" charset="0"/>
-                <a:ea typeface="Consolas" pitchFamily="34" charset="-122"/>
-                <a:cs typeface="Consolas" pitchFamily="34" charset="-120"/>
+                <a:latin typeface="Courier New" pitchFamily="49" charset="0"/>
+                <a:ea typeface="Courier New" pitchFamily="49" charset="-122"/>
+                <a:cs typeface="Courier New" pitchFamily="49" charset="-120"/>
               </a:rPr>
               <a:t>"nota2"</a:t>
             </a:r>
@@ -4480,64 +4481,64 @@
               <a:buNone/>
             </a:pPr>
             <a:r>
-              <a:rPr lang="en-US" sz="1050" dirty="0">
+              <a:rPr lang="en-US" sz="1000" dirty="0">
                 <a:solidFill>
                   <a:srgbClr val="E6EDF3"/>
                 </a:solidFill>
-                <a:latin typeface="Consolas" pitchFamily="34" charset="0"/>
-                <a:ea typeface="Consolas" pitchFamily="34" charset="-122"/>
-                <a:cs typeface="Consolas" pitchFamily="34" charset="-120"/>
+                <a:latin typeface="Courier New" pitchFamily="49" charset="0"/>
+                <a:ea typeface="Courier New" pitchFamily="49" charset="-122"/>
+                <a:cs typeface="Courier New" pitchFamily="49" charset="-120"/>
               </a:rPr>
               <a:t>]</a:t>
             </a:r>
-            <a:endParaRPr lang="en-US" sz="1050" dirty="0"/>
-          </a:p>
-          <a:p>
-            <a:pPr indent="0" marL="0">
-              <a:buNone/>
-            </a:pPr>
-            <a:r>
-              <a:rPr lang="en-US" sz="1050" dirty="0">
+            <a:endParaRPr lang="en-US" sz="1000" dirty="0"/>
+          </a:p>
+          <a:p>
+            <a:pPr indent="0" marL="0">
+              <a:buNone/>
+            </a:pPr>
+            <a:r>
+              <a:rPr lang="en-US" sz="1000" dirty="0">
                 <a:solidFill>
                   <a:srgbClr val="E6EDF3"/>
                 </a:solidFill>
-                <a:latin typeface="Consolas" pitchFamily="34" charset="0"/>
-                <a:ea typeface="Consolas" pitchFamily="34" charset="-122"/>
-                <a:cs typeface="Consolas" pitchFamily="34" charset="-120"/>
+                <a:latin typeface="Courier New" pitchFamily="49" charset="0"/>
+                <a:ea typeface="Courier New" pitchFamily="49" charset="-122"/>
+                <a:cs typeface="Courier New" pitchFamily="49" charset="-120"/>
               </a:rPr>
               <a:t>        error_messages = {</a:t>
             </a:r>
-            <a:endParaRPr lang="en-US" sz="1050" dirty="0"/>
-          </a:p>
-          <a:p>
-            <a:pPr indent="0" marL="0">
-              <a:buNone/>
-            </a:pPr>
-            <a:r>
-              <a:rPr lang="en-US" sz="1050" dirty="0">
+            <a:endParaRPr lang="en-US" sz="1000" dirty="0"/>
+          </a:p>
+          <a:p>
+            <a:pPr indent="0" marL="0">
+              <a:buNone/>
+            </a:pPr>
+            <a:r>
+              <a:rPr lang="en-US" sz="1000" dirty="0">
                 <a:solidFill>
                   <a:srgbClr val="E6EDF3"/>
                 </a:solidFill>
-                <a:latin typeface="Consolas" pitchFamily="34" charset="0"/>
-                <a:ea typeface="Consolas" pitchFamily="34" charset="-122"/>
-                <a:cs typeface="Consolas" pitchFamily="34" charset="-120"/>
+                <a:latin typeface="Courier New" pitchFamily="49" charset="0"/>
+                <a:ea typeface="Courier New" pitchFamily="49" charset="-122"/>
+                <a:cs typeface="Courier New" pitchFamily="49" charset="-120"/>
               </a:rPr>
               <a:t>            forms.models.NON_FIELD_ERRORS: {</a:t>
             </a:r>
-            <a:endParaRPr lang="en-US" sz="1050" dirty="0"/>
-          </a:p>
-          <a:p>
-            <a:pPr indent="0" marL="0">
-              <a:buNone/>
-            </a:pPr>
-            <a:r>
-              <a:rPr lang="en-US" sz="1050" dirty="0">
+            <a:endParaRPr lang="en-US" sz="1000" dirty="0"/>
+          </a:p>
+          <a:p>
+            <a:pPr indent="0" marL="0">
+              <a:buNone/>
+            </a:pPr>
+            <a:r>
+              <a:rPr lang="en-US" sz="1000" dirty="0">
                 <a:solidFill>
                   <a:srgbClr val="E6EDF3"/>
                 </a:solidFill>
-                <a:latin typeface="Consolas" pitchFamily="34" charset="0"/>
-                <a:ea typeface="Consolas" pitchFamily="34" charset="-122"/>
-                <a:cs typeface="Consolas" pitchFamily="34" charset="-120"/>
+                <a:latin typeface="Courier New" pitchFamily="49" charset="0"/>
+                <a:ea typeface="Courier New" pitchFamily="49" charset="-122"/>
+                <a:cs typeface="Courier New" pitchFamily="49" charset="-120"/>
               </a:rPr>
               <a:t>                </a:t>
             </a:r>
@@ -4545,13 +4546,13 @@
               <a:buNone/>
             </a:pPr>
             <a:r>
-              <a:rPr lang="en-US" sz="1050" dirty="0">
+              <a:rPr lang="en-US" sz="1000" dirty="0">
                 <a:solidFill>
                   <a:srgbClr val="F0C674"/>
                 </a:solidFill>
-                <a:latin typeface="Consolas" pitchFamily="34" charset="0"/>
-                <a:ea typeface="Consolas" pitchFamily="34" charset="-122"/>
-                <a:cs typeface="Consolas" pitchFamily="34" charset="-120"/>
+                <a:latin typeface="Courier New" pitchFamily="49" charset="0"/>
+                <a:ea typeface="Courier New" pitchFamily="49" charset="-122"/>
+                <a:cs typeface="Courier New" pitchFamily="49" charset="-120"/>
               </a:rPr>
               <a:t>"unique_together"</a:t>
             </a:r>
@@ -4559,30 +4560,30 @@
               <a:buNone/>
             </a:pPr>
             <a:r>
-              <a:rPr lang="en-US" sz="1050" dirty="0">
+              <a:rPr lang="en-US" sz="1000" dirty="0">
                 <a:solidFill>
                   <a:srgbClr val="E6EDF3"/>
                 </a:solidFill>
-                <a:latin typeface="Consolas" pitchFamily="34" charset="0"/>
-                <a:ea typeface="Consolas" pitchFamily="34" charset="-122"/>
-                <a:cs typeface="Consolas" pitchFamily="34" charset="-120"/>
+                <a:latin typeface="Courier New" pitchFamily="49" charset="0"/>
+                <a:ea typeface="Courier New" pitchFamily="49" charset="-122"/>
+                <a:cs typeface="Courier New" pitchFamily="49" charset="-120"/>
               </a:rPr>
               <a:t>:</a:t>
             </a:r>
-            <a:endParaRPr lang="en-US" sz="1050" dirty="0"/>
-          </a:p>
-          <a:p>
-            <a:pPr indent="0" marL="0">
-              <a:buNone/>
-            </a:pPr>
-            <a:r>
-              <a:rPr lang="en-US" sz="1050" dirty="0">
+            <a:endParaRPr lang="en-US" sz="1000" dirty="0"/>
+          </a:p>
+          <a:p>
+            <a:pPr indent="0" marL="0">
+              <a:buNone/>
+            </a:pPr>
+            <a:r>
+              <a:rPr lang="en-US" sz="1000" dirty="0">
                 <a:solidFill>
                   <a:srgbClr val="E6EDF3"/>
                 </a:solidFill>
-                <a:latin typeface="Consolas" pitchFamily="34" charset="0"/>
-                <a:ea typeface="Consolas" pitchFamily="34" charset="-122"/>
-                <a:cs typeface="Consolas" pitchFamily="34" charset="-120"/>
+                <a:latin typeface="Courier New" pitchFamily="49" charset="0"/>
+                <a:ea typeface="Courier New" pitchFamily="49" charset="-122"/>
+                <a:cs typeface="Courier New" pitchFamily="49" charset="-120"/>
               </a:rPr>
               <a:t>                    </a:t>
             </a:r>
@@ -4590,13 +4591,13 @@
               <a:buNone/>
             </a:pPr>
             <a:r>
-              <a:rPr lang="en-US" sz="1050" dirty="0">
+              <a:rPr lang="en-US" sz="1000" dirty="0">
                 <a:solidFill>
                   <a:srgbClr val="F0C674"/>
                 </a:solidFill>
-                <a:latin typeface="Consolas" pitchFamily="34" charset="0"/>
-                <a:ea typeface="Consolas" pitchFamily="34" charset="-122"/>
-                <a:cs typeface="Consolas" pitchFamily="34" charset="-120"/>
+                <a:latin typeface="Courier New" pitchFamily="49" charset="0"/>
+                <a:ea typeface="Courier New" pitchFamily="49" charset="-122"/>
+                <a:cs typeface="Courier New" pitchFamily="49" charset="-120"/>
               </a:rPr>
               <a:t>"Este aluno já está nesta disciplina."</a:t>
             </a:r>
@@ -4604,81 +4605,81 @@
               <a:buNone/>
             </a:pPr>
             <a:r>
-              <a:rPr lang="en-US" sz="1050" dirty="0">
+              <a:rPr lang="en-US" sz="1000" dirty="0">
                 <a:solidFill>
                   <a:srgbClr val="E6EDF3"/>
                 </a:solidFill>
-                <a:latin typeface="Consolas" pitchFamily="34" charset="0"/>
-                <a:ea typeface="Consolas" pitchFamily="34" charset="-122"/>
-                <a:cs typeface="Consolas" pitchFamily="34" charset="-120"/>
+                <a:latin typeface="Courier New" pitchFamily="49" charset="0"/>
+                <a:ea typeface="Courier New" pitchFamily="49" charset="-122"/>
+                <a:cs typeface="Courier New" pitchFamily="49" charset="-120"/>
               </a:rPr>
               <a:t>,</a:t>
             </a:r>
-            <a:endParaRPr lang="en-US" sz="1050" dirty="0"/>
-          </a:p>
-          <a:p>
-            <a:pPr indent="0" marL="0">
-              <a:buNone/>
-            </a:pPr>
-            <a:r>
-              <a:rPr lang="en-US" sz="1050" dirty="0">
+            <a:endParaRPr lang="en-US" sz="1000" dirty="0"/>
+          </a:p>
+          <a:p>
+            <a:pPr indent="0" marL="0">
+              <a:buNone/>
+            </a:pPr>
+            <a:r>
+              <a:rPr lang="en-US" sz="1000" dirty="0">
                 <a:solidFill>
                   <a:srgbClr val="E6EDF3"/>
                 </a:solidFill>
-                <a:latin typeface="Consolas" pitchFamily="34" charset="0"/>
-                <a:ea typeface="Consolas" pitchFamily="34" charset="-122"/>
-                <a:cs typeface="Consolas" pitchFamily="34" charset="-120"/>
+                <a:latin typeface="Courier New" pitchFamily="49" charset="0"/>
+                <a:ea typeface="Courier New" pitchFamily="49" charset="-122"/>
+                <a:cs typeface="Courier New" pitchFamily="49" charset="-120"/>
               </a:rPr>
               <a:t>            }</a:t>
             </a:r>
-            <a:endParaRPr lang="en-US" sz="1050" dirty="0"/>
-          </a:p>
-          <a:p>
-            <a:pPr indent="0" marL="0">
-              <a:buNone/>
-            </a:pPr>
-            <a:r>
-              <a:rPr lang="en-US" sz="1050" dirty="0">
+            <a:endParaRPr lang="en-US" sz="1000" dirty="0"/>
+          </a:p>
+          <a:p>
+            <a:pPr indent="0" marL="0">
+              <a:buNone/>
+            </a:pPr>
+            <a:r>
+              <a:rPr lang="en-US" sz="1000" dirty="0">
                 <a:solidFill>
                   <a:srgbClr val="E6EDF3"/>
                 </a:solidFill>
-                <a:latin typeface="Consolas" pitchFamily="34" charset="0"/>
-                <a:ea typeface="Consolas" pitchFamily="34" charset="-122"/>
-                <a:cs typeface="Consolas" pitchFamily="34" charset="-120"/>
+                <a:latin typeface="Courier New" pitchFamily="49" charset="0"/>
+                <a:ea typeface="Courier New" pitchFamily="49" charset="-122"/>
+                <a:cs typeface="Courier New" pitchFamily="49" charset="-120"/>
               </a:rPr>
               <a:t>        }</a:t>
             </a:r>
-            <a:endParaRPr lang="en-US" sz="1050" dirty="0"/>
-          </a:p>
-          <a:p>
-            <a:pPr indent="0" marL="0">
-              <a:buNone/>
-            </a:pPr>
-            <a:r>
-              <a:rPr lang="en-US" sz="1050" dirty="0">
+            <a:endParaRPr lang="en-US" sz="1000" dirty="0"/>
+          </a:p>
+          <a:p>
+            <a:pPr indent="0" marL="0">
+              <a:buNone/>
+            </a:pPr>
+            <a:r>
+              <a:rPr lang="en-US" sz="1000" dirty="0">
                 <a:solidFill>
                   <a:srgbClr val="E6EDF3"/>
                 </a:solidFill>
-                <a:latin typeface="Consolas" pitchFamily="34" charset="0"/>
-                <a:ea typeface="Consolas" pitchFamily="34" charset="-122"/>
-                <a:cs typeface="Consolas" pitchFamily="34" charset="-120"/>
+                <a:latin typeface="Courier New" pitchFamily="49" charset="0"/>
+                <a:ea typeface="Courier New" pitchFamily="49" charset="-122"/>
+                <a:cs typeface="Courier New" pitchFamily="49" charset="-120"/>
               </a:rPr>
               <a:t> </a:t>
             </a:r>
-            <a:endParaRPr lang="en-US" sz="1050" dirty="0"/>
-          </a:p>
-          <a:p>
-            <a:pPr indent="0" marL="0">
-              <a:buNone/>
-            </a:pPr>
-            <a:r>
-              <a:rPr lang="en-US" sz="1050" dirty="0">
+            <a:endParaRPr lang="en-US" sz="1000" dirty="0"/>
+          </a:p>
+          <a:p>
+            <a:pPr indent="0" marL="0">
+              <a:buNone/>
+            </a:pPr>
+            <a:r>
+              <a:rPr lang="en-US" sz="1000" dirty="0">
                 <a:solidFill>
                   <a:srgbClr val="E6EDF3"/>
                 </a:solidFill>
-                <a:latin typeface="Consolas" pitchFamily="34" charset="0"/>
-                <a:ea typeface="Consolas" pitchFamily="34" charset="-122"/>
-                <a:cs typeface="Consolas" pitchFamily="34" charset="-120"/>
+                <a:latin typeface="Courier New" pitchFamily="49" charset="0"/>
+                <a:ea typeface="Courier New" pitchFamily="49" charset="-122"/>
+                <a:cs typeface="Courier New" pitchFamily="49" charset="-120"/>
               </a:rPr>
               <a:t>    </a:t>
             </a:r>
@@ -4686,13 +4687,13 @@
               <a:buNone/>
             </a:pPr>
             <a:r>
-              <a:rPr lang="en-US" sz="1050" dirty="0">
+              <a:rPr lang="en-US" sz="1000" dirty="0">
                 <a:solidFill>
                   <a:srgbClr val="7DCFFF"/>
                 </a:solidFill>
-                <a:latin typeface="Consolas" pitchFamily="34" charset="0"/>
-                <a:ea typeface="Consolas" pitchFamily="34" charset="-122"/>
-                <a:cs typeface="Consolas" pitchFamily="34" charset="-120"/>
+                <a:latin typeface="Courier New" pitchFamily="49" charset="0"/>
+                <a:ea typeface="Courier New" pitchFamily="49" charset="-122"/>
+                <a:cs typeface="Courier New" pitchFamily="49" charset="-120"/>
               </a:rPr>
               <a:t>def</a:t>
             </a:r>
@@ -4700,47 +4701,47 @@
               <a:buNone/>
             </a:pPr>
             <a:r>
-              <a:rPr lang="en-US" sz="1050" dirty="0">
+              <a:rPr lang="en-US" sz="1000" dirty="0">
                 <a:solidFill>
                   <a:srgbClr val="E6EDF3"/>
                 </a:solidFill>
-                <a:latin typeface="Consolas" pitchFamily="34" charset="0"/>
-                <a:ea typeface="Consolas" pitchFamily="34" charset="-122"/>
-                <a:cs typeface="Consolas" pitchFamily="34" charset="-120"/>
+                <a:latin typeface="Courier New" pitchFamily="49" charset="0"/>
+                <a:ea typeface="Courier New" pitchFamily="49" charset="-122"/>
+                <a:cs typeface="Courier New" pitchFamily="49" charset="-120"/>
               </a:rPr>
               <a:t> __init__(self, *args, **kwargs):</a:t>
             </a:r>
-            <a:endParaRPr lang="en-US" sz="1050" dirty="0"/>
-          </a:p>
-          <a:p>
-            <a:pPr indent="0" marL="0">
-              <a:buNone/>
-            </a:pPr>
-            <a:r>
-              <a:rPr lang="en-US" sz="1050" dirty="0">
+            <a:endParaRPr lang="en-US" sz="1000" dirty="0"/>
+          </a:p>
+          <a:p>
+            <a:pPr indent="0" marL="0">
+              <a:buNone/>
+            </a:pPr>
+            <a:r>
+              <a:rPr lang="en-US" sz="1000" dirty="0">
                 <a:solidFill>
                   <a:srgbClr val="E6EDF3"/>
                 </a:solidFill>
-                <a:latin typeface="Consolas" pitchFamily="34" charset="0"/>
-                <a:ea typeface="Consolas" pitchFamily="34" charset="-122"/>
-                <a:cs typeface="Consolas" pitchFamily="34" charset="-120"/>
+                <a:latin typeface="Courier New" pitchFamily="49" charset="0"/>
+                <a:ea typeface="Courier New" pitchFamily="49" charset="-122"/>
+                <a:cs typeface="Courier New" pitchFamily="49" charset="-120"/>
               </a:rPr>
               <a:t>        super().__init__(*args, **kwargs)</a:t>
             </a:r>
-            <a:endParaRPr lang="en-US" sz="1050" dirty="0"/>
-          </a:p>
-          <a:p>
-            <a:pPr indent="0" marL="0">
-              <a:buNone/>
-            </a:pPr>
-            <a:r>
-              <a:rPr lang="en-US" sz="1050" dirty="0">
+            <a:endParaRPr lang="en-US" sz="1000" dirty="0"/>
+          </a:p>
+          <a:p>
+            <a:pPr indent="0" marL="0">
+              <a:buNone/>
+            </a:pPr>
+            <a:r>
+              <a:rPr lang="en-US" sz="1000" dirty="0">
                 <a:solidFill>
                   <a:srgbClr val="E6EDF3"/>
                 </a:solidFill>
-                <a:latin typeface="Consolas" pitchFamily="34" charset="0"/>
-                <a:ea typeface="Consolas" pitchFamily="34" charset="-122"/>
-                <a:cs typeface="Consolas" pitchFamily="34" charset="-120"/>
+                <a:latin typeface="Courier New" pitchFamily="49" charset="0"/>
+                <a:ea typeface="Courier New" pitchFamily="49" charset="-122"/>
+                <a:cs typeface="Courier New" pitchFamily="49" charset="-120"/>
               </a:rPr>
               <a:t>        self.fields[</a:t>
             </a:r>
@@ -4748,13 +4749,13 @@
               <a:buNone/>
             </a:pPr>
             <a:r>
-              <a:rPr lang="en-US" sz="1050" dirty="0">
+              <a:rPr lang="en-US" sz="1000" dirty="0">
                 <a:solidFill>
                   <a:srgbClr val="F0C674"/>
                 </a:solidFill>
-                <a:latin typeface="Consolas" pitchFamily="34" charset="0"/>
-                <a:ea typeface="Consolas" pitchFamily="34" charset="-122"/>
-                <a:cs typeface="Consolas" pitchFamily="34" charset="-120"/>
+                <a:latin typeface="Courier New" pitchFamily="49" charset="0"/>
+                <a:ea typeface="Courier New" pitchFamily="49" charset="-122"/>
+                <a:cs typeface="Courier New" pitchFamily="49" charset="-120"/>
               </a:rPr>
               <a:t>"aluno"</a:t>
             </a:r>
@@ -4762,30 +4763,30 @@
               <a:buNone/>
             </a:pPr>
             <a:r>
-              <a:rPr lang="en-US" sz="1050" dirty="0">
+              <a:rPr lang="en-US" sz="1000" dirty="0">
                 <a:solidFill>
                   <a:srgbClr val="E6EDF3"/>
                 </a:solidFill>
-                <a:latin typeface="Consolas" pitchFamily="34" charset="0"/>
-                <a:ea typeface="Consolas" pitchFamily="34" charset="-122"/>
-                <a:cs typeface="Consolas" pitchFamily="34" charset="-120"/>
+                <a:latin typeface="Courier New" pitchFamily="49" charset="0"/>
+                <a:ea typeface="Courier New" pitchFamily="49" charset="-122"/>
+                <a:cs typeface="Courier New" pitchFamily="49" charset="-120"/>
               </a:rPr>
               <a:t>].queryset = (</a:t>
             </a:r>
-            <a:endParaRPr lang="en-US" sz="1050" dirty="0"/>
-          </a:p>
-          <a:p>
-            <a:pPr indent="0" marL="0">
-              <a:buNone/>
-            </a:pPr>
-            <a:r>
-              <a:rPr lang="en-US" sz="1050" dirty="0">
+            <a:endParaRPr lang="en-US" sz="1000" dirty="0"/>
+          </a:p>
+          <a:p>
+            <a:pPr indent="0" marL="0">
+              <a:buNone/>
+            </a:pPr>
+            <a:r>
+              <a:rPr lang="en-US" sz="1000" dirty="0">
                 <a:solidFill>
                   <a:srgbClr val="E6EDF3"/>
                 </a:solidFill>
-                <a:latin typeface="Consolas" pitchFamily="34" charset="0"/>
-                <a:ea typeface="Consolas" pitchFamily="34" charset="-122"/>
-                <a:cs typeface="Consolas" pitchFamily="34" charset="-120"/>
+                <a:latin typeface="Courier New" pitchFamily="49" charset="0"/>
+                <a:ea typeface="Courier New" pitchFamily="49" charset="-122"/>
+                <a:cs typeface="Courier New" pitchFamily="49" charset="-120"/>
               </a:rPr>
               <a:t>            Aluno.objects.filter(ativo=</a:t>
             </a:r>
@@ -4793,13 +4794,13 @@
               <a:buNone/>
             </a:pPr>
             <a:r>
-              <a:rPr lang="en-US" sz="1050" dirty="0">
+              <a:rPr lang="en-US" sz="1000" dirty="0">
                 <a:solidFill>
                   <a:srgbClr val="7DCFFF"/>
                 </a:solidFill>
-                <a:latin typeface="Consolas" pitchFamily="34" charset="0"/>
-                <a:ea typeface="Consolas" pitchFamily="34" charset="-122"/>
-                <a:cs typeface="Consolas" pitchFamily="34" charset="-120"/>
+                <a:latin typeface="Courier New" pitchFamily="49" charset="0"/>
+                <a:ea typeface="Courier New" pitchFamily="49" charset="-122"/>
+                <a:cs typeface="Courier New" pitchFamily="49" charset="-120"/>
               </a:rPr>
               <a:t>True</a:t>
             </a:r>
@@ -4807,17 +4808,17 @@
               <a:buNone/>
             </a:pPr>
             <a:r>
-              <a:rPr lang="en-US" sz="1050" dirty="0">
+              <a:rPr lang="en-US" sz="1000" dirty="0">
                 <a:solidFill>
                   <a:srgbClr val="E6EDF3"/>
                 </a:solidFill>
-                <a:latin typeface="Consolas" pitchFamily="34" charset="0"/>
-                <a:ea typeface="Consolas" pitchFamily="34" charset="-122"/>
-                <a:cs typeface="Consolas" pitchFamily="34" charset="-120"/>
+                <a:latin typeface="Courier New" pitchFamily="49" charset="0"/>
+                <a:ea typeface="Courier New" pitchFamily="49" charset="-122"/>
+                <a:cs typeface="Courier New" pitchFamily="49" charset="-120"/>
               </a:rPr>
               <a:t>))</a:t>
             </a:r>
-            <a:endParaRPr lang="en-US" sz="1050" dirty="0"/>
+            <a:endParaRPr lang="en-US" sz="1000" dirty="0"/>
           </a:p>
         </p:txBody>
       </p:sp>
@@ -4975,13 +4976,13 @@
               <a:buNone/>
             </a:pPr>
             <a:r>
-              <a:rPr lang="en-US" sz="1300" dirty="0">
+              <a:rPr lang="en-US" sz="1150" dirty="0">
                 <a:solidFill>
                   <a:srgbClr val="00397B"/>
                 </a:solidFill>
-                <a:latin typeface="Consolas" pitchFamily="34" charset="0"/>
-                <a:ea typeface="Consolas" pitchFamily="34" charset="-122"/>
-                <a:cs typeface="Consolas" pitchFamily="34" charset="-120"/>
+                <a:latin typeface="Courier New" pitchFamily="49" charset="0"/>
+                <a:ea typeface="Courier New" pitchFamily="49" charset="-122"/>
+                <a:cs typeface="Courier New" pitchFamily="49" charset="-120"/>
               </a:rPr>
               <a:t>&lt;select&gt;</a:t>
             </a:r>
@@ -5157,13 +5158,13 @@
               <a:buNone/>
             </a:pPr>
             <a:r>
-              <a:rPr lang="en-US" sz="1300" dirty="0">
+              <a:rPr lang="en-US" sz="1150" dirty="0">
                 <a:solidFill>
                   <a:srgbClr val="00397B"/>
                 </a:solidFill>
-                <a:latin typeface="Consolas" pitchFamily="34" charset="0"/>
-                <a:ea typeface="Consolas" pitchFamily="34" charset="-122"/>
-                <a:cs typeface="Consolas" pitchFamily="34" charset="-120"/>
+                <a:latin typeface="Courier New" pitchFamily="49" charset="0"/>
+                <a:ea typeface="Courier New" pitchFamily="49" charset="-122"/>
+                <a:cs typeface="Courier New" pitchFamily="49" charset="-120"/>
               </a:rPr>
               <a:t>UniqueConstraint</a:t>
             </a:r>
@@ -5704,13 +5705,13 @@
               <a:buNone/>
             </a:pPr>
             <a:r>
-              <a:rPr lang="en-US" sz="1300" dirty="0">
+              <a:rPr lang="en-US" sz="1150" dirty="0">
                 <a:solidFill>
                   <a:srgbClr val="00397B"/>
                 </a:solidFill>
-                <a:latin typeface="Consolas" pitchFamily="34" charset="0"/>
-                <a:ea typeface="Consolas" pitchFamily="34" charset="-122"/>
-                <a:cs typeface="Consolas" pitchFamily="34" charset="-120"/>
+                <a:latin typeface="Courier New" pitchFamily="49" charset="0"/>
+                <a:ea typeface="Courier New" pitchFamily="49" charset="-122"/>
+                <a:cs typeface="Courier New" pitchFamily="49" charset="-120"/>
               </a:rPr>
               <a:t>base.html</a:t>
             </a:r>
@@ -6027,7 +6028,7 @@
           <a:ln/>
         </p:spPr>
         <p:txBody>
-          <a:bodyPr wrap="square" lIns="0" tIns="0" rIns="0" bIns="0" rtlCol="0" anchor="ctr"/>
+          <a:bodyPr wrap="none" lIns="0" tIns="0" rIns="0" bIns="0" rtlCol="0" anchor="ctr"/>
           <a:lstStyle/>
           <a:p>
             <a:pPr indent="0" marL="0">
@@ -6038,9 +6039,9 @@
                 <a:solidFill>
                   <a:srgbClr val="FFFFFF"/>
                 </a:solidFill>
-                <a:latin typeface="Consolas" pitchFamily="34" charset="0"/>
-                <a:ea typeface="Consolas" pitchFamily="34" charset="-122"/>
-                <a:cs typeface="Consolas" pitchFamily="34" charset="-120"/>
+                <a:latin typeface="Courier New" pitchFamily="49" charset="0"/>
+                <a:ea typeface="Courier New" pitchFamily="49" charset="-122"/>
+                <a:cs typeface="Courier New" pitchFamily="49" charset="-120"/>
               </a:rPr>
               <a:t>base.html</a:t>
             </a:r>
@@ -6174,13 +6175,13 @@
               <a:buNone/>
             </a:pPr>
             <a:r>
-              <a:rPr lang="en-US" sz="1300" dirty="0">
+              <a:rPr lang="en-US" sz="1150" dirty="0">
                 <a:solidFill>
                   <a:srgbClr val="FFFFFF"/>
                 </a:solidFill>
-                <a:latin typeface="Consolas" pitchFamily="34" charset="0"/>
-                <a:ea typeface="Consolas" pitchFamily="34" charset="-122"/>
-                <a:cs typeface="Consolas" pitchFamily="34" charset="-120"/>
+                <a:latin typeface="Courier New" pitchFamily="49" charset="0"/>
+                <a:ea typeface="Courier New" pitchFamily="49" charset="-122"/>
+                <a:cs typeface="Courier New" pitchFamily="49" charset="-120"/>
               </a:rPr>
               <a:t>messages</a:t>
             </a:r>
@@ -6233,7 +6234,7 @@
           <a:ln/>
         </p:spPr>
         <p:txBody>
-          <a:bodyPr wrap="square" lIns="0" tIns="0" rIns="0" bIns="0" rtlCol="0" anchor="ctr"/>
+          <a:bodyPr wrap="none" lIns="0" tIns="0" rIns="0" bIns="0" rtlCol="0" anchor="ctr"/>
           <a:lstStyle/>
           <a:p>
             <a:pPr algn="ctr" indent="0" marL="0">
@@ -6244,9 +6245,9 @@
                 <a:solidFill>
                   <a:srgbClr val="FFFFFF"/>
                 </a:solidFill>
-                <a:latin typeface="Consolas" pitchFamily="34" charset="0"/>
-                <a:ea typeface="Consolas" pitchFamily="34" charset="-122"/>
-                <a:cs typeface="Consolas" pitchFamily="34" charset="-120"/>
+                <a:latin typeface="Courier New" pitchFamily="49" charset="0"/>
+                <a:ea typeface="Courier New" pitchFamily="49" charset="-122"/>
+                <a:cs typeface="Courier New" pitchFamily="49" charset="-120"/>
               </a:rPr>
               <a:t>{% block conteudo %}</a:t>
             </a:r>
@@ -6386,7 +6387,7 @@
           <a:ln/>
         </p:spPr>
         <p:txBody>
-          <a:bodyPr wrap="square" lIns="0" tIns="0" rIns="0" bIns="0" rtlCol="0" anchor="ctr"/>
+          <a:bodyPr wrap="none" lIns="0" tIns="0" rIns="0" bIns="0" rtlCol="0" anchor="ctr"/>
           <a:lstStyle/>
           <a:p>
             <a:pPr indent="0" marL="0">
@@ -6397,9 +6398,9 @@
                 <a:solidFill>
                   <a:srgbClr val="00397B"/>
                 </a:solidFill>
-                <a:latin typeface="Consolas" pitchFamily="34" charset="0"/>
-                <a:ea typeface="Consolas" pitchFamily="34" charset="-122"/>
-                <a:cs typeface="Consolas" pitchFamily="34" charset="-120"/>
+                <a:latin typeface="Courier New" pitchFamily="49" charset="0"/>
+                <a:ea typeface="Courier New" pitchFamily="49" charset="-122"/>
+                <a:cs typeface="Courier New" pitchFamily="49" charset="-120"/>
               </a:rPr>
               <a:t>aluno_lista.html</a:t>
             </a:r>
@@ -6432,13 +6433,13 @@
               <a:buNone/>
             </a:pPr>
             <a:r>
-              <a:rPr lang="en-US" sz="1200" dirty="0">
+              <a:rPr lang="en-US" sz="1100" dirty="0">
                 <a:solidFill>
                   <a:srgbClr val="00397B"/>
                 </a:solidFill>
-                <a:latin typeface="Consolas" pitchFamily="34" charset="0"/>
-                <a:ea typeface="Consolas" pitchFamily="34" charset="-122"/>
-                <a:cs typeface="Consolas" pitchFamily="34" charset="-120"/>
+                <a:latin typeface="Courier New" pitchFamily="49" charset="0"/>
+                <a:ea typeface="Courier New" pitchFamily="49" charset="-122"/>
+                <a:cs typeface="Courier New" pitchFamily="49" charset="-120"/>
               </a:rPr>
               <a:t>{% extends "base.html" %}</a:t>
             </a:r>
@@ -6526,7 +6527,7 @@
           <a:ln/>
         </p:spPr>
         <p:txBody>
-          <a:bodyPr wrap="square" lIns="0" tIns="0" rIns="0" bIns="0" rtlCol="0" anchor="ctr"/>
+          <a:bodyPr wrap="none" lIns="0" tIns="0" rIns="0" bIns="0" rtlCol="0" anchor="ctr"/>
           <a:lstStyle/>
           <a:p>
             <a:pPr indent="0" marL="0">
@@ -6537,9 +6538,9 @@
                 <a:solidFill>
                   <a:srgbClr val="00397B"/>
                 </a:solidFill>
-                <a:latin typeface="Consolas" pitchFamily="34" charset="0"/>
-                <a:ea typeface="Consolas" pitchFamily="34" charset="-122"/>
-                <a:cs typeface="Consolas" pitchFamily="34" charset="-120"/>
+                <a:latin typeface="Courier New" pitchFamily="49" charset="0"/>
+                <a:ea typeface="Courier New" pitchFamily="49" charset="-122"/>
+                <a:cs typeface="Courier New" pitchFamily="49" charset="-120"/>
               </a:rPr>
               <a:t>aluno_form.html</a:t>
             </a:r>
@@ -6572,13 +6573,13 @@
               <a:buNone/>
             </a:pPr>
             <a:r>
-              <a:rPr lang="en-US" sz="1200" dirty="0">
+              <a:rPr lang="en-US" sz="1100" dirty="0">
                 <a:solidFill>
                   <a:srgbClr val="00397B"/>
                 </a:solidFill>
-                <a:latin typeface="Consolas" pitchFamily="34" charset="0"/>
-                <a:ea typeface="Consolas" pitchFamily="34" charset="-122"/>
-                <a:cs typeface="Consolas" pitchFamily="34" charset="-120"/>
+                <a:latin typeface="Courier New" pitchFamily="49" charset="0"/>
+                <a:ea typeface="Courier New" pitchFamily="49" charset="-122"/>
+                <a:cs typeface="Courier New" pitchFamily="49" charset="-120"/>
               </a:rPr>
               <a:t>{% extends "base.html" %}</a:t>
             </a:r>
@@ -6666,7 +6667,7 @@
           <a:ln/>
         </p:spPr>
         <p:txBody>
-          <a:bodyPr wrap="square" lIns="0" tIns="0" rIns="0" bIns="0" rtlCol="0" anchor="ctr"/>
+          <a:bodyPr wrap="none" lIns="0" tIns="0" rIns="0" bIns="0" rtlCol="0" anchor="ctr"/>
           <a:lstStyle/>
           <a:p>
             <a:pPr indent="0" marL="0">
@@ -6677,9 +6678,9 @@
                 <a:solidFill>
                   <a:srgbClr val="00397B"/>
                 </a:solidFill>
-                <a:latin typeface="Consolas" pitchFamily="34" charset="0"/>
-                <a:ea typeface="Consolas" pitchFamily="34" charset="-122"/>
-                <a:cs typeface="Consolas" pitchFamily="34" charset="-120"/>
+                <a:latin typeface="Courier New" pitchFamily="49" charset="0"/>
+                <a:ea typeface="Courier New" pitchFamily="49" charset="-122"/>
+                <a:cs typeface="Courier New" pitchFamily="49" charset="-120"/>
               </a:rPr>
               <a:t>inscricao_lista.html</a:t>
             </a:r>
@@ -6712,13 +6713,13 @@
               <a:buNone/>
             </a:pPr>
             <a:r>
-              <a:rPr lang="en-US" sz="1200" dirty="0">
+              <a:rPr lang="en-US" sz="1100" dirty="0">
                 <a:solidFill>
                   <a:srgbClr val="00397B"/>
                 </a:solidFill>
-                <a:latin typeface="Consolas" pitchFamily="34" charset="0"/>
-                <a:ea typeface="Consolas" pitchFamily="34" charset="-122"/>
-                <a:cs typeface="Consolas" pitchFamily="34" charset="-120"/>
+                <a:latin typeface="Courier New" pitchFamily="49" charset="0"/>
+                <a:ea typeface="Courier New" pitchFamily="49" charset="-122"/>
+                <a:cs typeface="Courier New" pitchFamily="49" charset="-120"/>
               </a:rPr>
               <a:t>{% extends "base.html" %}</a:t>
             </a:r>
@@ -7084,13 +7085,13 @@
                         <a:buNone/>
                       </a:pPr>
                       <a:r>
-                        <a:rPr lang="en-US" sz="1300" dirty="0">
+                        <a:rPr lang="en-US" sz="1150" dirty="0">
                           <a:solidFill>
                             <a:srgbClr val="00397B"/>
                           </a:solidFill>
-                          <a:latin typeface="Consolas" pitchFamily="34" charset="0"/>
-                          <a:ea typeface="Consolas" pitchFamily="34" charset="-122"/>
-                          <a:cs typeface="Consolas" pitchFamily="34" charset="-120"/>
+                          <a:latin typeface="Courier New" pitchFamily="49" charset="0"/>
+                          <a:ea typeface="Courier New" pitchFamily="49" charset="-122"/>
+                          <a:cs typeface="Courier New" pitchFamily="49" charset="-120"/>
                         </a:rPr>
                         <a:t>messages.success</a:t>
                       </a:r>
@@ -7109,13 +7110,13 @@
                         <a:buNone/>
                       </a:pPr>
                       <a:r>
-                        <a:rPr lang="en-US" sz="1300" dirty="0">
+                        <a:rPr lang="en-US" sz="1150" dirty="0">
                           <a:solidFill>
                             <a:srgbClr val="00397B"/>
                           </a:solidFill>
-                          <a:latin typeface="Consolas" pitchFamily="34" charset="0"/>
-                          <a:ea typeface="Consolas" pitchFamily="34" charset="-122"/>
-                          <a:cs typeface="Consolas" pitchFamily="34" charset="-120"/>
+                          <a:latin typeface="Courier New" pitchFamily="49" charset="0"/>
+                          <a:ea typeface="Courier New" pitchFamily="49" charset="-122"/>
+                          <a:cs typeface="Courier New" pitchFamily="49" charset="-120"/>
                         </a:rPr>
                         <a:t>base.html</a:t>
                       </a:r>
@@ -7261,13 +7262,13 @@
                         <a:buNone/>
                       </a:pPr>
                       <a:r>
-                        <a:rPr lang="en-US" sz="1300" dirty="0">
+                        <a:rPr lang="en-US" sz="1150" dirty="0">
                           <a:solidFill>
                             <a:srgbClr val="00397B"/>
                           </a:solidFill>
-                          <a:latin typeface="Consolas" pitchFamily="34" charset="0"/>
-                          <a:ea typeface="Consolas" pitchFamily="34" charset="-122"/>
-                          <a:cs typeface="Consolas" pitchFamily="34" charset="-120"/>
+                          <a:latin typeface="Courier New" pitchFamily="49" charset="0"/>
+                          <a:ea typeface="Courier New" pitchFamily="49" charset="-122"/>
+                          <a:cs typeface="Courier New" pitchFamily="49" charset="-120"/>
                         </a:rPr>
                         <a:t>ValidationError</a:t>
                       </a:r>
@@ -7722,13 +7723,13 @@
                         <a:buNone/>
                       </a:pPr>
                       <a:r>
-                        <a:rPr lang="en-US" sz="1300" dirty="0">
+                        <a:rPr lang="en-US" sz="1150" dirty="0">
                           <a:solidFill>
                             <a:srgbClr val="00397B"/>
                           </a:solidFill>
-                          <a:latin typeface="Consolas" pitchFamily="34" charset="0"/>
-                          <a:ea typeface="Consolas" pitchFamily="34" charset="-122"/>
-                          <a:cs typeface="Consolas" pitchFamily="34" charset="-120"/>
+                          <a:latin typeface="Courier New" pitchFamily="49" charset="0"/>
+                          <a:ea typeface="Courier New" pitchFamily="49" charset="-122"/>
+                          <a:cs typeface="Courier New" pitchFamily="49" charset="-120"/>
                         </a:rPr>
                         <a:t>get_object_or_404</a:t>
                       </a:r>
@@ -7874,13 +7875,13 @@
                         <a:buNone/>
                       </a:pPr>
                       <a:r>
-                        <a:rPr lang="en-US" sz="1300" dirty="0">
+                        <a:rPr lang="en-US" sz="1150" dirty="0">
                           <a:solidFill>
                             <a:srgbClr val="00397B"/>
                           </a:solidFill>
-                          <a:latin typeface="Consolas" pitchFamily="34" charset="0"/>
-                          <a:ea typeface="Consolas" pitchFamily="34" charset="-122"/>
-                          <a:cs typeface="Consolas" pitchFamily="34" charset="-120"/>
+                          <a:latin typeface="Courier New" pitchFamily="49" charset="0"/>
+                          <a:ea typeface="Courier New" pitchFamily="49" charset="-122"/>
+                          <a:cs typeface="Courier New" pitchFamily="49" charset="-120"/>
                         </a:rPr>
                         <a:t>@login_required</a:t>
                       </a:r>
@@ -8105,7 +8106,7 @@
           <a:ln/>
         </p:spPr>
         <p:txBody>
-          <a:bodyPr wrap="square" lIns="0" tIns="0" rIns="0" bIns="0" rtlCol="0" anchor="ctr"/>
+          <a:bodyPr wrap="none" lIns="0" tIns="0" rIns="0" bIns="0" rtlCol="0" anchor="ctr"/>
           <a:lstStyle/>
           <a:p>
             <a:pPr indent="0" marL="0">
@@ -8116,9 +8117,9 @@
                 <a:solidFill>
                   <a:srgbClr val="8B949E"/>
                 </a:solidFill>
-                <a:latin typeface="Consolas" pitchFamily="34" charset="0"/>
-                <a:ea typeface="Consolas" pitchFamily="34" charset="-122"/>
-                <a:cs typeface="Consolas" pitchFamily="34" charset="-120"/>
+                <a:latin typeface="Courier New" pitchFamily="49" charset="0"/>
+                <a:ea typeface="Courier New" pitchFamily="49" charset="-122"/>
+                <a:cs typeface="Courier New" pitchFamily="49" charset="-120"/>
               </a:rPr>
               <a:t>academico/admin.py · TODO 13</a:t>
             </a:r>
@@ -8144,20 +8145,20 @@
           <a:ln/>
         </p:spPr>
         <p:txBody>
-          <a:bodyPr wrap="square" lIns="0" tIns="0" rIns="0" bIns="0" rtlCol="0" anchor="t"/>
-          <a:lstStyle/>
-          <a:p>
-            <a:pPr indent="0" marL="0">
-              <a:buNone/>
-            </a:pPr>
-            <a:r>
-              <a:rPr lang="en-US" sz="1050" dirty="0">
+          <a:bodyPr wrap="none" lIns="0" tIns="0" rIns="0" bIns="0" rtlCol="0" anchor="t"/>
+          <a:lstStyle/>
+          <a:p>
+            <a:pPr indent="0" marL="0">
+              <a:buNone/>
+            </a:pPr>
+            <a:r>
+              <a:rPr lang="en-US" sz="1000" dirty="0">
                 <a:solidFill>
                   <a:srgbClr val="C3A6FF"/>
                 </a:solidFill>
-                <a:latin typeface="Consolas" pitchFamily="34" charset="0"/>
-                <a:ea typeface="Consolas" pitchFamily="34" charset="-122"/>
-                <a:cs typeface="Consolas" pitchFamily="34" charset="-120"/>
+                <a:latin typeface="Courier New" pitchFamily="49" charset="0"/>
+                <a:ea typeface="Courier New" pitchFamily="49" charset="-122"/>
+                <a:cs typeface="Courier New" pitchFamily="49" charset="-120"/>
               </a:rPr>
               <a:t>@admin.register</a:t>
             </a:r>
@@ -8165,30 +8166,30 @@
               <a:buNone/>
             </a:pPr>
             <a:r>
-              <a:rPr lang="en-US" sz="1050" dirty="0">
+              <a:rPr lang="en-US" sz="1000" dirty="0">
                 <a:solidFill>
                   <a:srgbClr val="E6EDF3"/>
                 </a:solidFill>
-                <a:latin typeface="Consolas" pitchFamily="34" charset="0"/>
-                <a:ea typeface="Consolas" pitchFamily="34" charset="-122"/>
-                <a:cs typeface="Consolas" pitchFamily="34" charset="-120"/>
+                <a:latin typeface="Courier New" pitchFamily="49" charset="0"/>
+                <a:ea typeface="Courier New" pitchFamily="49" charset="-122"/>
+                <a:cs typeface="Courier New" pitchFamily="49" charset="-120"/>
               </a:rPr>
               <a:t>(Aluno)</a:t>
             </a:r>
-            <a:endParaRPr lang="en-US" sz="1050" dirty="0"/>
-          </a:p>
-          <a:p>
-            <a:pPr indent="0" marL="0">
-              <a:buNone/>
-            </a:pPr>
-            <a:r>
-              <a:rPr lang="en-US" sz="1050" dirty="0">
+            <a:endParaRPr lang="en-US" sz="1000" dirty="0"/>
+          </a:p>
+          <a:p>
+            <a:pPr indent="0" marL="0">
+              <a:buNone/>
+            </a:pPr>
+            <a:r>
+              <a:rPr lang="en-US" sz="1000" dirty="0">
                 <a:solidFill>
                   <a:srgbClr val="7DCFFF"/>
                 </a:solidFill>
-                <a:latin typeface="Consolas" pitchFamily="34" charset="0"/>
-                <a:ea typeface="Consolas" pitchFamily="34" charset="-122"/>
-                <a:cs typeface="Consolas" pitchFamily="34" charset="-120"/>
+                <a:latin typeface="Courier New" pitchFamily="49" charset="0"/>
+                <a:ea typeface="Courier New" pitchFamily="49" charset="-122"/>
+                <a:cs typeface="Courier New" pitchFamily="49" charset="-120"/>
               </a:rPr>
               <a:t>class</a:t>
             </a:r>
@@ -8196,30 +8197,30 @@
               <a:buNone/>
             </a:pPr>
             <a:r>
-              <a:rPr lang="en-US" sz="1050" dirty="0">
+              <a:rPr lang="en-US" sz="1000" dirty="0">
                 <a:solidFill>
                   <a:srgbClr val="E6EDF3"/>
                 </a:solidFill>
-                <a:latin typeface="Consolas" pitchFamily="34" charset="0"/>
-                <a:ea typeface="Consolas" pitchFamily="34" charset="-122"/>
-                <a:cs typeface="Consolas" pitchFamily="34" charset="-120"/>
+                <a:latin typeface="Courier New" pitchFamily="49" charset="0"/>
+                <a:ea typeface="Courier New" pitchFamily="49" charset="-122"/>
+                <a:cs typeface="Courier New" pitchFamily="49" charset="-120"/>
               </a:rPr>
               <a:t> AlunoAdmin(admin.ModelAdmin):</a:t>
             </a:r>
-            <a:endParaRPr lang="en-US" sz="1050" dirty="0"/>
-          </a:p>
-          <a:p>
-            <a:pPr indent="0" marL="0">
-              <a:buNone/>
-            </a:pPr>
-            <a:r>
-              <a:rPr lang="en-US" sz="1050" dirty="0">
+            <a:endParaRPr lang="en-US" sz="1000" dirty="0"/>
+          </a:p>
+          <a:p>
+            <a:pPr indent="0" marL="0">
+              <a:buNone/>
+            </a:pPr>
+            <a:r>
+              <a:rPr lang="en-US" sz="1000" dirty="0">
                 <a:solidFill>
                   <a:srgbClr val="E6EDF3"/>
                 </a:solidFill>
-                <a:latin typeface="Consolas" pitchFamily="34" charset="0"/>
-                <a:ea typeface="Consolas" pitchFamily="34" charset="-122"/>
-                <a:cs typeface="Consolas" pitchFamily="34" charset="-120"/>
+                <a:latin typeface="Courier New" pitchFamily="49" charset="0"/>
+                <a:ea typeface="Courier New" pitchFamily="49" charset="-122"/>
+                <a:cs typeface="Courier New" pitchFamily="49" charset="-120"/>
               </a:rPr>
               <a:t>    list_display = (</a:t>
             </a:r>
@@ -8227,13 +8228,13 @@
               <a:buNone/>
             </a:pPr>
             <a:r>
-              <a:rPr lang="en-US" sz="1050" dirty="0">
+              <a:rPr lang="en-US" sz="1000" dirty="0">
                 <a:solidFill>
                   <a:srgbClr val="F0C674"/>
                 </a:solidFill>
-                <a:latin typeface="Consolas" pitchFamily="34" charset="0"/>
-                <a:ea typeface="Consolas" pitchFamily="34" charset="-122"/>
-                <a:cs typeface="Consolas" pitchFamily="34" charset="-120"/>
+                <a:latin typeface="Courier New" pitchFamily="49" charset="0"/>
+                <a:ea typeface="Courier New" pitchFamily="49" charset="-122"/>
+                <a:cs typeface="Courier New" pitchFamily="49" charset="-120"/>
               </a:rPr>
               <a:t>"matricula"</a:t>
             </a:r>
@@ -8241,13 +8242,13 @@
               <a:buNone/>
             </a:pPr>
             <a:r>
-              <a:rPr lang="en-US" sz="1050" dirty="0">
+              <a:rPr lang="en-US" sz="1000" dirty="0">
                 <a:solidFill>
                   <a:srgbClr val="E6EDF3"/>
                 </a:solidFill>
-                <a:latin typeface="Consolas" pitchFamily="34" charset="0"/>
-                <a:ea typeface="Consolas" pitchFamily="34" charset="-122"/>
-                <a:cs typeface="Consolas" pitchFamily="34" charset="-120"/>
+                <a:latin typeface="Courier New" pitchFamily="49" charset="0"/>
+                <a:ea typeface="Courier New" pitchFamily="49" charset="-122"/>
+                <a:cs typeface="Courier New" pitchFamily="49" charset="-120"/>
               </a:rPr>
               <a:t>, </a:t>
             </a:r>
@@ -8255,13 +8256,13 @@
               <a:buNone/>
             </a:pPr>
             <a:r>
-              <a:rPr lang="en-US" sz="1050" dirty="0">
+              <a:rPr lang="en-US" sz="1000" dirty="0">
                 <a:solidFill>
                   <a:srgbClr val="F0C674"/>
                 </a:solidFill>
-                <a:latin typeface="Consolas" pitchFamily="34" charset="0"/>
-                <a:ea typeface="Consolas" pitchFamily="34" charset="-122"/>
-                <a:cs typeface="Consolas" pitchFamily="34" charset="-120"/>
+                <a:latin typeface="Courier New" pitchFamily="49" charset="0"/>
+                <a:ea typeface="Courier New" pitchFamily="49" charset="-122"/>
+                <a:cs typeface="Courier New" pitchFamily="49" charset="-120"/>
               </a:rPr>
               <a:t>"nome"</a:t>
             </a:r>
@@ -8269,13 +8270,13 @@
               <a:buNone/>
             </a:pPr>
             <a:r>
-              <a:rPr lang="en-US" sz="1050" dirty="0">
+              <a:rPr lang="en-US" sz="1000" dirty="0">
                 <a:solidFill>
                   <a:srgbClr val="E6EDF3"/>
                 </a:solidFill>
-                <a:latin typeface="Consolas" pitchFamily="34" charset="0"/>
-                <a:ea typeface="Consolas" pitchFamily="34" charset="-122"/>
-                <a:cs typeface="Consolas" pitchFamily="34" charset="-120"/>
+                <a:latin typeface="Courier New" pitchFamily="49" charset="0"/>
+                <a:ea typeface="Courier New" pitchFamily="49" charset="-122"/>
+                <a:cs typeface="Courier New" pitchFamily="49" charset="-120"/>
               </a:rPr>
               <a:t>, </a:t>
             </a:r>
@@ -8283,13 +8284,13 @@
               <a:buNone/>
             </a:pPr>
             <a:r>
-              <a:rPr lang="en-US" sz="1050" dirty="0">
+              <a:rPr lang="en-US" sz="1000" dirty="0">
                 <a:solidFill>
                   <a:srgbClr val="F0C674"/>
                 </a:solidFill>
-                <a:latin typeface="Consolas" pitchFamily="34" charset="0"/>
-                <a:ea typeface="Consolas" pitchFamily="34" charset="-122"/>
-                <a:cs typeface="Consolas" pitchFamily="34" charset="-120"/>
+                <a:latin typeface="Courier New" pitchFamily="49" charset="0"/>
+                <a:ea typeface="Courier New" pitchFamily="49" charset="-122"/>
+                <a:cs typeface="Courier New" pitchFamily="49" charset="-120"/>
               </a:rPr>
               <a:t>"email"</a:t>
             </a:r>
@@ -8297,13 +8298,13 @@
               <a:buNone/>
             </a:pPr>
             <a:r>
-              <a:rPr lang="en-US" sz="1050" dirty="0">
+              <a:rPr lang="en-US" sz="1000" dirty="0">
                 <a:solidFill>
                   <a:srgbClr val="E6EDF3"/>
                 </a:solidFill>
-                <a:latin typeface="Consolas" pitchFamily="34" charset="0"/>
-                <a:ea typeface="Consolas" pitchFamily="34" charset="-122"/>
-                <a:cs typeface="Consolas" pitchFamily="34" charset="-120"/>
+                <a:latin typeface="Courier New" pitchFamily="49" charset="0"/>
+                <a:ea typeface="Courier New" pitchFamily="49" charset="-122"/>
+                <a:cs typeface="Courier New" pitchFamily="49" charset="-120"/>
               </a:rPr>
               <a:t>, </a:t>
             </a:r>
@@ -8311,13 +8312,13 @@
               <a:buNone/>
             </a:pPr>
             <a:r>
-              <a:rPr lang="en-US" sz="1050" dirty="0">
+              <a:rPr lang="en-US" sz="1000" dirty="0">
                 <a:solidFill>
                   <a:srgbClr val="F0C674"/>
                 </a:solidFill>
-                <a:latin typeface="Consolas" pitchFamily="34" charset="0"/>
-                <a:ea typeface="Consolas" pitchFamily="34" charset="-122"/>
-                <a:cs typeface="Consolas" pitchFamily="34" charset="-120"/>
+                <a:latin typeface="Courier New" pitchFamily="49" charset="0"/>
+                <a:ea typeface="Courier New" pitchFamily="49" charset="-122"/>
+                <a:cs typeface="Courier New" pitchFamily="49" charset="-120"/>
               </a:rPr>
               <a:t>"ativo"</a:t>
             </a:r>
@@ -8325,30 +8326,30 @@
               <a:buNone/>
             </a:pPr>
             <a:r>
-              <a:rPr lang="en-US" sz="1050" dirty="0">
+              <a:rPr lang="en-US" sz="1000" dirty="0">
                 <a:solidFill>
                   <a:srgbClr val="E6EDF3"/>
                 </a:solidFill>
-                <a:latin typeface="Consolas" pitchFamily="34" charset="0"/>
-                <a:ea typeface="Consolas" pitchFamily="34" charset="-122"/>
-                <a:cs typeface="Consolas" pitchFamily="34" charset="-120"/>
+                <a:latin typeface="Courier New" pitchFamily="49" charset="0"/>
+                <a:ea typeface="Courier New" pitchFamily="49" charset="-122"/>
+                <a:cs typeface="Courier New" pitchFamily="49" charset="-120"/>
               </a:rPr>
               <a:t>)</a:t>
             </a:r>
-            <a:endParaRPr lang="en-US" sz="1050" dirty="0"/>
-          </a:p>
-          <a:p>
-            <a:pPr indent="0" marL="0">
-              <a:buNone/>
-            </a:pPr>
-            <a:r>
-              <a:rPr lang="en-US" sz="1050" dirty="0">
+            <a:endParaRPr lang="en-US" sz="1000" dirty="0"/>
+          </a:p>
+          <a:p>
+            <a:pPr indent="0" marL="0">
+              <a:buNone/>
+            </a:pPr>
+            <a:r>
+              <a:rPr lang="en-US" sz="1000" dirty="0">
                 <a:solidFill>
                   <a:srgbClr val="E6EDF3"/>
                 </a:solidFill>
-                <a:latin typeface="Consolas" pitchFamily="34" charset="0"/>
-                <a:ea typeface="Consolas" pitchFamily="34" charset="-122"/>
-                <a:cs typeface="Consolas" pitchFamily="34" charset="-120"/>
+                <a:latin typeface="Courier New" pitchFamily="49" charset="0"/>
+                <a:ea typeface="Courier New" pitchFamily="49" charset="-122"/>
+                <a:cs typeface="Courier New" pitchFamily="49" charset="-120"/>
               </a:rPr>
               <a:t>    list_filter = (</a:t>
             </a:r>
@@ -8356,13 +8357,13 @@
               <a:buNone/>
             </a:pPr>
             <a:r>
-              <a:rPr lang="en-US" sz="1050" dirty="0">
+              <a:rPr lang="en-US" sz="1000" dirty="0">
                 <a:solidFill>
                   <a:srgbClr val="F0C674"/>
                 </a:solidFill>
-                <a:latin typeface="Consolas" pitchFamily="34" charset="0"/>
-                <a:ea typeface="Consolas" pitchFamily="34" charset="-122"/>
-                <a:cs typeface="Consolas" pitchFamily="34" charset="-120"/>
+                <a:latin typeface="Courier New" pitchFamily="49" charset="0"/>
+                <a:ea typeface="Courier New" pitchFamily="49" charset="-122"/>
+                <a:cs typeface="Courier New" pitchFamily="49" charset="-120"/>
               </a:rPr>
               <a:t>"ativo"</a:t>
             </a:r>
@@ -8370,30 +8371,30 @@
               <a:buNone/>
             </a:pPr>
             <a:r>
-              <a:rPr lang="en-US" sz="1050" dirty="0">
+              <a:rPr lang="en-US" sz="1000" dirty="0">
                 <a:solidFill>
                   <a:srgbClr val="E6EDF3"/>
                 </a:solidFill>
-                <a:latin typeface="Consolas" pitchFamily="34" charset="0"/>
-                <a:ea typeface="Consolas" pitchFamily="34" charset="-122"/>
-                <a:cs typeface="Consolas" pitchFamily="34" charset="-120"/>
+                <a:latin typeface="Courier New" pitchFamily="49" charset="0"/>
+                <a:ea typeface="Courier New" pitchFamily="49" charset="-122"/>
+                <a:cs typeface="Courier New" pitchFamily="49" charset="-120"/>
               </a:rPr>
               <a:t>,)</a:t>
             </a:r>
-            <a:endParaRPr lang="en-US" sz="1050" dirty="0"/>
-          </a:p>
-          <a:p>
-            <a:pPr indent="0" marL="0">
-              <a:buNone/>
-            </a:pPr>
-            <a:r>
-              <a:rPr lang="en-US" sz="1050" dirty="0">
+            <a:endParaRPr lang="en-US" sz="1000" dirty="0"/>
+          </a:p>
+          <a:p>
+            <a:pPr indent="0" marL="0">
+              <a:buNone/>
+            </a:pPr>
+            <a:r>
+              <a:rPr lang="en-US" sz="1000" dirty="0">
                 <a:solidFill>
                   <a:srgbClr val="E6EDF3"/>
                 </a:solidFill>
-                <a:latin typeface="Consolas" pitchFamily="34" charset="0"/>
-                <a:ea typeface="Consolas" pitchFamily="34" charset="-122"/>
-                <a:cs typeface="Consolas" pitchFamily="34" charset="-120"/>
+                <a:latin typeface="Courier New" pitchFamily="49" charset="0"/>
+                <a:ea typeface="Courier New" pitchFamily="49" charset="-122"/>
+                <a:cs typeface="Courier New" pitchFamily="49" charset="-120"/>
               </a:rPr>
               <a:t>    search_fields = (</a:t>
             </a:r>
@@ -8401,13 +8402,13 @@
               <a:buNone/>
             </a:pPr>
             <a:r>
-              <a:rPr lang="en-US" sz="1050" dirty="0">
+              <a:rPr lang="en-US" sz="1000" dirty="0">
                 <a:solidFill>
                   <a:srgbClr val="F0C674"/>
                 </a:solidFill>
-                <a:latin typeface="Consolas" pitchFamily="34" charset="0"/>
-                <a:ea typeface="Consolas" pitchFamily="34" charset="-122"/>
-                <a:cs typeface="Consolas" pitchFamily="34" charset="-120"/>
+                <a:latin typeface="Courier New" pitchFamily="49" charset="0"/>
+                <a:ea typeface="Courier New" pitchFamily="49" charset="-122"/>
+                <a:cs typeface="Courier New" pitchFamily="49" charset="-120"/>
               </a:rPr>
               <a:t>"matricula"</a:t>
             </a:r>
@@ -8415,13 +8416,13 @@
               <a:buNone/>
             </a:pPr>
             <a:r>
-              <a:rPr lang="en-US" sz="1050" dirty="0">
+              <a:rPr lang="en-US" sz="1000" dirty="0">
                 <a:solidFill>
                   <a:srgbClr val="E6EDF3"/>
                 </a:solidFill>
-                <a:latin typeface="Consolas" pitchFamily="34" charset="0"/>
-                <a:ea typeface="Consolas" pitchFamily="34" charset="-122"/>
-                <a:cs typeface="Consolas" pitchFamily="34" charset="-120"/>
+                <a:latin typeface="Courier New" pitchFamily="49" charset="0"/>
+                <a:ea typeface="Courier New" pitchFamily="49" charset="-122"/>
+                <a:cs typeface="Courier New" pitchFamily="49" charset="-120"/>
               </a:rPr>
               <a:t>, </a:t>
             </a:r>
@@ -8429,13 +8430,13 @@
               <a:buNone/>
             </a:pPr>
             <a:r>
-              <a:rPr lang="en-US" sz="1050" dirty="0">
+              <a:rPr lang="en-US" sz="1000" dirty="0">
                 <a:solidFill>
                   <a:srgbClr val="F0C674"/>
                 </a:solidFill>
-                <a:latin typeface="Consolas" pitchFamily="34" charset="0"/>
-                <a:ea typeface="Consolas" pitchFamily="34" charset="-122"/>
-                <a:cs typeface="Consolas" pitchFamily="34" charset="-120"/>
+                <a:latin typeface="Courier New" pitchFamily="49" charset="0"/>
+                <a:ea typeface="Courier New" pitchFamily="49" charset="-122"/>
+                <a:cs typeface="Courier New" pitchFamily="49" charset="-120"/>
               </a:rPr>
               <a:t>"nome"</a:t>
             </a:r>
@@ -8443,13 +8444,13 @@
               <a:buNone/>
             </a:pPr>
             <a:r>
-              <a:rPr lang="en-US" sz="1050" dirty="0">
+              <a:rPr lang="en-US" sz="1000" dirty="0">
                 <a:solidFill>
                   <a:srgbClr val="E6EDF3"/>
                 </a:solidFill>
-                <a:latin typeface="Consolas" pitchFamily="34" charset="0"/>
-                <a:ea typeface="Consolas" pitchFamily="34" charset="-122"/>
-                <a:cs typeface="Consolas" pitchFamily="34" charset="-120"/>
+                <a:latin typeface="Courier New" pitchFamily="49" charset="0"/>
+                <a:ea typeface="Courier New" pitchFamily="49" charset="-122"/>
+                <a:cs typeface="Courier New" pitchFamily="49" charset="-120"/>
               </a:rPr>
               <a:t>, </a:t>
             </a:r>
@@ -8457,13 +8458,13 @@
               <a:buNone/>
             </a:pPr>
             <a:r>
-              <a:rPr lang="en-US" sz="1050" dirty="0">
+              <a:rPr lang="en-US" sz="1000" dirty="0">
                 <a:solidFill>
                   <a:srgbClr val="F0C674"/>
                 </a:solidFill>
-                <a:latin typeface="Consolas" pitchFamily="34" charset="0"/>
-                <a:ea typeface="Consolas" pitchFamily="34" charset="-122"/>
-                <a:cs typeface="Consolas" pitchFamily="34" charset="-120"/>
+                <a:latin typeface="Courier New" pitchFamily="49" charset="0"/>
+                <a:ea typeface="Courier New" pitchFamily="49" charset="-122"/>
+                <a:cs typeface="Courier New" pitchFamily="49" charset="-120"/>
               </a:rPr>
               <a:t>"email"</a:t>
             </a:r>
@@ -8471,47 +8472,47 @@
               <a:buNone/>
             </a:pPr>
             <a:r>
-              <a:rPr lang="en-US" sz="1050" dirty="0">
+              <a:rPr lang="en-US" sz="1000" dirty="0">
                 <a:solidFill>
                   <a:srgbClr val="E6EDF3"/>
                 </a:solidFill>
-                <a:latin typeface="Consolas" pitchFamily="34" charset="0"/>
-                <a:ea typeface="Consolas" pitchFamily="34" charset="-122"/>
-                <a:cs typeface="Consolas" pitchFamily="34" charset="-120"/>
+                <a:latin typeface="Courier New" pitchFamily="49" charset="0"/>
+                <a:ea typeface="Courier New" pitchFamily="49" charset="-122"/>
+                <a:cs typeface="Courier New" pitchFamily="49" charset="-120"/>
               </a:rPr>
               <a:t>)</a:t>
             </a:r>
-            <a:endParaRPr lang="en-US" sz="1050" dirty="0"/>
-          </a:p>
-          <a:p>
-            <a:pPr indent="0" marL="0">
-              <a:buNone/>
-            </a:pPr>
-            <a:r>
-              <a:rPr lang="en-US" sz="1050" dirty="0">
+            <a:endParaRPr lang="en-US" sz="1000" dirty="0"/>
+          </a:p>
+          <a:p>
+            <a:pPr indent="0" marL="0">
+              <a:buNone/>
+            </a:pPr>
+            <a:r>
+              <a:rPr lang="en-US" sz="1000" dirty="0">
                 <a:solidFill>
                   <a:srgbClr val="E6EDF3"/>
                 </a:solidFill>
-                <a:latin typeface="Consolas" pitchFamily="34" charset="0"/>
-                <a:ea typeface="Consolas" pitchFamily="34" charset="-122"/>
-                <a:cs typeface="Consolas" pitchFamily="34" charset="-120"/>
+                <a:latin typeface="Courier New" pitchFamily="49" charset="0"/>
+                <a:ea typeface="Courier New" pitchFamily="49" charset="-122"/>
+                <a:cs typeface="Courier New" pitchFamily="49" charset="-120"/>
               </a:rPr>
               <a:t> </a:t>
             </a:r>
-            <a:endParaRPr lang="en-US" sz="1050" dirty="0"/>
-          </a:p>
-          <a:p>
-            <a:pPr indent="0" marL="0">
-              <a:buNone/>
-            </a:pPr>
-            <a:r>
-              <a:rPr lang="en-US" sz="1050" dirty="0">
+            <a:endParaRPr lang="en-US" sz="1000" dirty="0"/>
+          </a:p>
+          <a:p>
+            <a:pPr indent="0" marL="0">
+              <a:buNone/>
+            </a:pPr>
+            <a:r>
+              <a:rPr lang="en-US" sz="1000" dirty="0">
                 <a:solidFill>
                   <a:srgbClr val="C3A6FF"/>
                 </a:solidFill>
-                <a:latin typeface="Consolas" pitchFamily="34" charset="0"/>
-                <a:ea typeface="Consolas" pitchFamily="34" charset="-122"/>
-                <a:cs typeface="Consolas" pitchFamily="34" charset="-120"/>
+                <a:latin typeface="Courier New" pitchFamily="49" charset="0"/>
+                <a:ea typeface="Courier New" pitchFamily="49" charset="-122"/>
+                <a:cs typeface="Courier New" pitchFamily="49" charset="-120"/>
               </a:rPr>
               <a:t>@admin.register</a:t>
             </a:r>
@@ -8519,30 +8520,30 @@
               <a:buNone/>
             </a:pPr>
             <a:r>
-              <a:rPr lang="en-US" sz="1050" dirty="0">
+              <a:rPr lang="en-US" sz="1000" dirty="0">
                 <a:solidFill>
                   <a:srgbClr val="E6EDF3"/>
                 </a:solidFill>
-                <a:latin typeface="Consolas" pitchFamily="34" charset="0"/>
-                <a:ea typeface="Consolas" pitchFamily="34" charset="-122"/>
-                <a:cs typeface="Consolas" pitchFamily="34" charset="-120"/>
+                <a:latin typeface="Courier New" pitchFamily="49" charset="0"/>
+                <a:ea typeface="Courier New" pitchFamily="49" charset="-122"/>
+                <a:cs typeface="Courier New" pitchFamily="49" charset="-120"/>
               </a:rPr>
               <a:t>(Inscricao)</a:t>
             </a:r>
-            <a:endParaRPr lang="en-US" sz="1050" dirty="0"/>
-          </a:p>
-          <a:p>
-            <a:pPr indent="0" marL="0">
-              <a:buNone/>
-            </a:pPr>
-            <a:r>
-              <a:rPr lang="en-US" sz="1050" dirty="0">
+            <a:endParaRPr lang="en-US" sz="1000" dirty="0"/>
+          </a:p>
+          <a:p>
+            <a:pPr indent="0" marL="0">
+              <a:buNone/>
+            </a:pPr>
+            <a:r>
+              <a:rPr lang="en-US" sz="1000" dirty="0">
                 <a:solidFill>
                   <a:srgbClr val="7DCFFF"/>
                 </a:solidFill>
-                <a:latin typeface="Consolas" pitchFamily="34" charset="0"/>
-                <a:ea typeface="Consolas" pitchFamily="34" charset="-122"/>
-                <a:cs typeface="Consolas" pitchFamily="34" charset="-120"/>
+                <a:latin typeface="Courier New" pitchFamily="49" charset="0"/>
+                <a:ea typeface="Courier New" pitchFamily="49" charset="-122"/>
+                <a:cs typeface="Courier New" pitchFamily="49" charset="-120"/>
               </a:rPr>
               <a:t>class</a:t>
             </a:r>
@@ -8550,30 +8551,30 @@
               <a:buNone/>
             </a:pPr>
             <a:r>
-              <a:rPr lang="en-US" sz="1050" dirty="0">
+              <a:rPr lang="en-US" sz="1000" dirty="0">
                 <a:solidFill>
                   <a:srgbClr val="E6EDF3"/>
                 </a:solidFill>
-                <a:latin typeface="Consolas" pitchFamily="34" charset="0"/>
-                <a:ea typeface="Consolas" pitchFamily="34" charset="-122"/>
-                <a:cs typeface="Consolas" pitchFamily="34" charset="-120"/>
+                <a:latin typeface="Courier New" pitchFamily="49" charset="0"/>
+                <a:ea typeface="Courier New" pitchFamily="49" charset="-122"/>
+                <a:cs typeface="Courier New" pitchFamily="49" charset="-120"/>
               </a:rPr>
               <a:t> InscricaoAdmin(admin.ModelAdmin):</a:t>
             </a:r>
-            <a:endParaRPr lang="en-US" sz="1050" dirty="0"/>
-          </a:p>
-          <a:p>
-            <a:pPr indent="0" marL="0">
-              <a:buNone/>
-            </a:pPr>
-            <a:r>
-              <a:rPr lang="en-US" sz="1050" dirty="0">
+            <a:endParaRPr lang="en-US" sz="1000" dirty="0"/>
+          </a:p>
+          <a:p>
+            <a:pPr indent="0" marL="0">
+              <a:buNone/>
+            </a:pPr>
+            <a:r>
+              <a:rPr lang="en-US" sz="1000" dirty="0">
                 <a:solidFill>
                   <a:srgbClr val="E6EDF3"/>
                 </a:solidFill>
-                <a:latin typeface="Consolas" pitchFamily="34" charset="0"/>
-                <a:ea typeface="Consolas" pitchFamily="34" charset="-122"/>
-                <a:cs typeface="Consolas" pitchFamily="34" charset="-120"/>
+                <a:latin typeface="Courier New" pitchFamily="49" charset="0"/>
+                <a:ea typeface="Courier New" pitchFamily="49" charset="-122"/>
+                <a:cs typeface="Courier New" pitchFamily="49" charset="-120"/>
               </a:rPr>
               <a:t>    list_display = (</a:t>
             </a:r>
@@ -8581,13 +8582,13 @@
               <a:buNone/>
             </a:pPr>
             <a:r>
-              <a:rPr lang="en-US" sz="1050" dirty="0">
+              <a:rPr lang="en-US" sz="1000" dirty="0">
                 <a:solidFill>
                   <a:srgbClr val="F0C674"/>
                 </a:solidFill>
-                <a:latin typeface="Consolas" pitchFamily="34" charset="0"/>
-                <a:ea typeface="Consolas" pitchFamily="34" charset="-122"/>
-                <a:cs typeface="Consolas" pitchFamily="34" charset="-120"/>
+                <a:latin typeface="Courier New" pitchFamily="49" charset="0"/>
+                <a:ea typeface="Courier New" pitchFamily="49" charset="-122"/>
+                <a:cs typeface="Courier New" pitchFamily="49" charset="-120"/>
               </a:rPr>
               <a:t>"aluno"</a:t>
             </a:r>
@@ -8595,13 +8596,13 @@
               <a:buNone/>
             </a:pPr>
             <a:r>
-              <a:rPr lang="en-US" sz="1050" dirty="0">
+              <a:rPr lang="en-US" sz="1000" dirty="0">
                 <a:solidFill>
                   <a:srgbClr val="E6EDF3"/>
                 </a:solidFill>
-                <a:latin typeface="Consolas" pitchFamily="34" charset="0"/>
-                <a:ea typeface="Consolas" pitchFamily="34" charset="-122"/>
-                <a:cs typeface="Consolas" pitchFamily="34" charset="-120"/>
+                <a:latin typeface="Courier New" pitchFamily="49" charset="0"/>
+                <a:ea typeface="Courier New" pitchFamily="49" charset="-122"/>
+                <a:cs typeface="Courier New" pitchFamily="49" charset="-120"/>
               </a:rPr>
               <a:t>, </a:t>
             </a:r>
@@ -8609,13 +8610,13 @@
               <a:buNone/>
             </a:pPr>
             <a:r>
-              <a:rPr lang="en-US" sz="1050" dirty="0">
+              <a:rPr lang="en-US" sz="1000" dirty="0">
                 <a:solidFill>
                   <a:srgbClr val="F0C674"/>
                 </a:solidFill>
-                <a:latin typeface="Consolas" pitchFamily="34" charset="0"/>
-                <a:ea typeface="Consolas" pitchFamily="34" charset="-122"/>
-                <a:cs typeface="Consolas" pitchFamily="34" charset="-120"/>
+                <a:latin typeface="Courier New" pitchFamily="49" charset="0"/>
+                <a:ea typeface="Courier New" pitchFamily="49" charset="-122"/>
+                <a:cs typeface="Courier New" pitchFamily="49" charset="-120"/>
               </a:rPr>
               <a:t>"disciplina"</a:t>
             </a:r>
@@ -8623,13 +8624,13 @@
               <a:buNone/>
             </a:pPr>
             <a:r>
-              <a:rPr lang="en-US" sz="1050" dirty="0">
+              <a:rPr lang="en-US" sz="1000" dirty="0">
                 <a:solidFill>
                   <a:srgbClr val="E6EDF3"/>
                 </a:solidFill>
-                <a:latin typeface="Consolas" pitchFamily="34" charset="0"/>
-                <a:ea typeface="Consolas" pitchFamily="34" charset="-122"/>
-                <a:cs typeface="Consolas" pitchFamily="34" charset="-120"/>
+                <a:latin typeface="Courier New" pitchFamily="49" charset="0"/>
+                <a:ea typeface="Courier New" pitchFamily="49" charset="-122"/>
+                <a:cs typeface="Courier New" pitchFamily="49" charset="-120"/>
               </a:rPr>
               <a:t>, </a:t>
             </a:r>
@@ -8637,13 +8638,13 @@
               <a:buNone/>
             </a:pPr>
             <a:r>
-              <a:rPr lang="en-US" sz="1050" dirty="0">
+              <a:rPr lang="en-US" sz="1000" dirty="0">
                 <a:solidFill>
                   <a:srgbClr val="F0C674"/>
                 </a:solidFill>
-                <a:latin typeface="Consolas" pitchFamily="34" charset="0"/>
-                <a:ea typeface="Consolas" pitchFamily="34" charset="-122"/>
-                <a:cs typeface="Consolas" pitchFamily="34" charset="-120"/>
+                <a:latin typeface="Courier New" pitchFamily="49" charset="0"/>
+                <a:ea typeface="Courier New" pitchFamily="49" charset="-122"/>
+                <a:cs typeface="Courier New" pitchFamily="49" charset="-120"/>
               </a:rPr>
               <a:t>"nota1"</a:t>
             </a:r>
@@ -8651,13 +8652,13 @@
               <a:buNone/>
             </a:pPr>
             <a:r>
-              <a:rPr lang="en-US" sz="1050" dirty="0">
+              <a:rPr lang="en-US" sz="1000" dirty="0">
                 <a:solidFill>
                   <a:srgbClr val="E6EDF3"/>
                 </a:solidFill>
-                <a:latin typeface="Consolas" pitchFamily="34" charset="0"/>
-                <a:ea typeface="Consolas" pitchFamily="34" charset="-122"/>
-                <a:cs typeface="Consolas" pitchFamily="34" charset="-120"/>
+                <a:latin typeface="Courier New" pitchFamily="49" charset="0"/>
+                <a:ea typeface="Courier New" pitchFamily="49" charset="-122"/>
+                <a:cs typeface="Courier New" pitchFamily="49" charset="-120"/>
               </a:rPr>
               <a:t>, </a:t>
             </a:r>
@@ -8665,13 +8666,13 @@
               <a:buNone/>
             </a:pPr>
             <a:r>
-              <a:rPr lang="en-US" sz="1050" dirty="0">
+              <a:rPr lang="en-US" sz="1000" dirty="0">
                 <a:solidFill>
                   <a:srgbClr val="F0C674"/>
                 </a:solidFill>
-                <a:latin typeface="Consolas" pitchFamily="34" charset="0"/>
-                <a:ea typeface="Consolas" pitchFamily="34" charset="-122"/>
-                <a:cs typeface="Consolas" pitchFamily="34" charset="-120"/>
+                <a:latin typeface="Courier New" pitchFamily="49" charset="0"/>
+                <a:ea typeface="Courier New" pitchFamily="49" charset="-122"/>
+                <a:cs typeface="Courier New" pitchFamily="49" charset="-120"/>
               </a:rPr>
               <a:t>"nota2"</a:t>
             </a:r>
@@ -8679,30 +8680,30 @@
               <a:buNone/>
             </a:pPr>
             <a:r>
-              <a:rPr lang="en-US" sz="1050" dirty="0">
+              <a:rPr lang="en-US" sz="1000" dirty="0">
                 <a:solidFill>
                   <a:srgbClr val="E6EDF3"/>
                 </a:solidFill>
-                <a:latin typeface="Consolas" pitchFamily="34" charset="0"/>
-                <a:ea typeface="Consolas" pitchFamily="34" charset="-122"/>
-                <a:cs typeface="Consolas" pitchFamily="34" charset="-120"/>
+                <a:latin typeface="Courier New" pitchFamily="49" charset="0"/>
+                <a:ea typeface="Courier New" pitchFamily="49" charset="-122"/>
+                <a:cs typeface="Courier New" pitchFamily="49" charset="-120"/>
               </a:rPr>
               <a:t>)</a:t>
             </a:r>
-            <a:endParaRPr lang="en-US" sz="1050" dirty="0"/>
-          </a:p>
-          <a:p>
-            <a:pPr indent="0" marL="0">
-              <a:buNone/>
-            </a:pPr>
-            <a:r>
-              <a:rPr lang="en-US" sz="1050" dirty="0">
+            <a:endParaRPr lang="en-US" sz="1000" dirty="0"/>
+          </a:p>
+          <a:p>
+            <a:pPr indent="0" marL="0">
+              <a:buNone/>
+            </a:pPr>
+            <a:r>
+              <a:rPr lang="en-US" sz="1000" dirty="0">
                 <a:solidFill>
                   <a:srgbClr val="E6EDF3"/>
                 </a:solidFill>
-                <a:latin typeface="Consolas" pitchFamily="34" charset="0"/>
-                <a:ea typeface="Consolas" pitchFamily="34" charset="-122"/>
-                <a:cs typeface="Consolas" pitchFamily="34" charset="-120"/>
+                <a:latin typeface="Courier New" pitchFamily="49" charset="0"/>
+                <a:ea typeface="Courier New" pitchFamily="49" charset="-122"/>
+                <a:cs typeface="Courier New" pitchFamily="49" charset="-120"/>
               </a:rPr>
               <a:t>    list_filter = (</a:t>
             </a:r>
@@ -8710,13 +8711,13 @@
               <a:buNone/>
             </a:pPr>
             <a:r>
-              <a:rPr lang="en-US" sz="1050" dirty="0">
+              <a:rPr lang="en-US" sz="1000" dirty="0">
                 <a:solidFill>
                   <a:srgbClr val="F0C674"/>
                 </a:solidFill>
-                <a:latin typeface="Consolas" pitchFamily="34" charset="0"/>
-                <a:ea typeface="Consolas" pitchFamily="34" charset="-122"/>
-                <a:cs typeface="Consolas" pitchFamily="34" charset="-120"/>
+                <a:latin typeface="Courier New" pitchFamily="49" charset="0"/>
+                <a:ea typeface="Courier New" pitchFamily="49" charset="-122"/>
+                <a:cs typeface="Courier New" pitchFamily="49" charset="-120"/>
               </a:rPr>
               <a:t>"disciplina"</a:t>
             </a:r>
@@ -8724,30 +8725,30 @@
               <a:buNone/>
             </a:pPr>
             <a:r>
-              <a:rPr lang="en-US" sz="1050" dirty="0">
+              <a:rPr lang="en-US" sz="1000" dirty="0">
                 <a:solidFill>
                   <a:srgbClr val="E6EDF3"/>
                 </a:solidFill>
-                <a:latin typeface="Consolas" pitchFamily="34" charset="0"/>
-                <a:ea typeface="Consolas" pitchFamily="34" charset="-122"/>
-                <a:cs typeface="Consolas" pitchFamily="34" charset="-120"/>
+                <a:latin typeface="Courier New" pitchFamily="49" charset="0"/>
+                <a:ea typeface="Courier New" pitchFamily="49" charset="-122"/>
+                <a:cs typeface="Courier New" pitchFamily="49" charset="-120"/>
               </a:rPr>
               <a:t>,)</a:t>
             </a:r>
-            <a:endParaRPr lang="en-US" sz="1050" dirty="0"/>
-          </a:p>
-          <a:p>
-            <a:pPr indent="0" marL="0">
-              <a:buNone/>
-            </a:pPr>
-            <a:r>
-              <a:rPr lang="en-US" sz="1050" dirty="0">
+            <a:endParaRPr lang="en-US" sz="1000" dirty="0"/>
+          </a:p>
+          <a:p>
+            <a:pPr indent="0" marL="0">
+              <a:buNone/>
+            </a:pPr>
+            <a:r>
+              <a:rPr lang="en-US" sz="1000" dirty="0">
                 <a:solidFill>
                   <a:srgbClr val="E6EDF3"/>
                 </a:solidFill>
-                <a:latin typeface="Consolas" pitchFamily="34" charset="0"/>
-                <a:ea typeface="Consolas" pitchFamily="34" charset="-122"/>
-                <a:cs typeface="Consolas" pitchFamily="34" charset="-120"/>
+                <a:latin typeface="Courier New" pitchFamily="49" charset="0"/>
+                <a:ea typeface="Courier New" pitchFamily="49" charset="-122"/>
+                <a:cs typeface="Courier New" pitchFamily="49" charset="-120"/>
               </a:rPr>
               <a:t>    list_select_related = (</a:t>
             </a:r>
@@ -8755,13 +8756,13 @@
               <a:buNone/>
             </a:pPr>
             <a:r>
-              <a:rPr lang="en-US" sz="1050" dirty="0">
+              <a:rPr lang="en-US" sz="1000" dirty="0">
                 <a:solidFill>
                   <a:srgbClr val="F0C674"/>
                 </a:solidFill>
-                <a:latin typeface="Consolas" pitchFamily="34" charset="0"/>
-                <a:ea typeface="Consolas" pitchFamily="34" charset="-122"/>
-                <a:cs typeface="Consolas" pitchFamily="34" charset="-120"/>
+                <a:latin typeface="Courier New" pitchFamily="49" charset="0"/>
+                <a:ea typeface="Courier New" pitchFamily="49" charset="-122"/>
+                <a:cs typeface="Courier New" pitchFamily="49" charset="-120"/>
               </a:rPr>
               <a:t>"aluno"</a:t>
             </a:r>
@@ -8769,13 +8770,13 @@
               <a:buNone/>
             </a:pPr>
             <a:r>
-              <a:rPr lang="en-US" sz="1050" dirty="0">
+              <a:rPr lang="en-US" sz="1000" dirty="0">
                 <a:solidFill>
                   <a:srgbClr val="E6EDF3"/>
                 </a:solidFill>
-                <a:latin typeface="Consolas" pitchFamily="34" charset="0"/>
-                <a:ea typeface="Consolas" pitchFamily="34" charset="-122"/>
-                <a:cs typeface="Consolas" pitchFamily="34" charset="-120"/>
+                <a:latin typeface="Courier New" pitchFamily="49" charset="0"/>
+                <a:ea typeface="Courier New" pitchFamily="49" charset="-122"/>
+                <a:cs typeface="Courier New" pitchFamily="49" charset="-120"/>
               </a:rPr>
               <a:t>, </a:t>
             </a:r>
@@ -8783,13 +8784,13 @@
               <a:buNone/>
             </a:pPr>
             <a:r>
-              <a:rPr lang="en-US" sz="1050" dirty="0">
+              <a:rPr lang="en-US" sz="1000" dirty="0">
                 <a:solidFill>
                   <a:srgbClr val="F0C674"/>
                 </a:solidFill>
-                <a:latin typeface="Consolas" pitchFamily="34" charset="0"/>
-                <a:ea typeface="Consolas" pitchFamily="34" charset="-122"/>
-                <a:cs typeface="Consolas" pitchFamily="34" charset="-120"/>
+                <a:latin typeface="Courier New" pitchFamily="49" charset="0"/>
+                <a:ea typeface="Courier New" pitchFamily="49" charset="-122"/>
+                <a:cs typeface="Courier New" pitchFamily="49" charset="-120"/>
               </a:rPr>
               <a:t>"disciplina"</a:t>
             </a:r>
@@ -8797,17 +8798,17 @@
               <a:buNone/>
             </a:pPr>
             <a:r>
-              <a:rPr lang="en-US" sz="1050" dirty="0">
+              <a:rPr lang="en-US" sz="1000" dirty="0">
                 <a:solidFill>
                   <a:srgbClr val="E6EDF3"/>
                 </a:solidFill>
-                <a:latin typeface="Consolas" pitchFamily="34" charset="0"/>
-                <a:ea typeface="Consolas" pitchFamily="34" charset="-122"/>
-                <a:cs typeface="Consolas" pitchFamily="34" charset="-120"/>
+                <a:latin typeface="Courier New" pitchFamily="49" charset="0"/>
+                <a:ea typeface="Courier New" pitchFamily="49" charset="-122"/>
+                <a:cs typeface="Courier New" pitchFamily="49" charset="-120"/>
               </a:rPr>
               <a:t>)</a:t>
             </a:r>
-            <a:endParaRPr lang="en-US" sz="1050" dirty="0"/>
+            <a:endParaRPr lang="en-US" sz="1000" dirty="0"/>
           </a:p>
         </p:txBody>
       </p:sp>
@@ -9054,7 +9055,7 @@
           <a:ln/>
         </p:spPr>
         <p:txBody>
-          <a:bodyPr wrap="square" lIns="0" tIns="0" rIns="0" bIns="0" rtlCol="0" anchor="ctr"/>
+          <a:bodyPr wrap="none" lIns="0" tIns="0" rIns="0" bIns="0" rtlCol="0" anchor="ctr"/>
           <a:lstStyle/>
           <a:p>
             <a:pPr indent="0" marL="0">
@@ -9065,9 +9066,9 @@
                 <a:solidFill>
                   <a:srgbClr val="00397B"/>
                 </a:solidFill>
-                <a:latin typeface="Consolas" pitchFamily="34" charset="0"/>
-                <a:ea typeface="Consolas" pitchFamily="34" charset="-122"/>
-                <a:cs typeface="Consolas" pitchFamily="34" charset="-120"/>
+                <a:latin typeface="Courier New" pitchFamily="49" charset="0"/>
+                <a:ea typeface="Courier New" pitchFamily="49" charset="-122"/>
+                <a:cs typeface="Courier New" pitchFamily="49" charset="-120"/>
               </a:rPr>
               <a:t>list_select_related</a:t>
             </a:r>
@@ -9294,7 +9295,7 @@
           <a:ln/>
         </p:spPr>
         <p:txBody>
-          <a:bodyPr wrap="square" lIns="0" tIns="0" rIns="0" bIns="0" rtlCol="0" anchor="ctr"/>
+          <a:bodyPr wrap="none" lIns="0" tIns="0" rIns="0" bIns="0" rtlCol="0" anchor="ctr"/>
           <a:lstStyle/>
           <a:p>
             <a:pPr indent="0" marL="0">
@@ -9305,9 +9306,9 @@
                 <a:solidFill>
                   <a:srgbClr val="8B949E"/>
                 </a:solidFill>
-                <a:latin typeface="Consolas" pitchFamily="34" charset="0"/>
-                <a:ea typeface="Consolas" pitchFamily="34" charset="-122"/>
-                <a:cs typeface="Consolas" pitchFamily="34" charset="-120"/>
+                <a:latin typeface="Courier New" pitchFamily="49" charset="0"/>
+                <a:ea typeface="Courier New" pitchFamily="49" charset="-122"/>
+                <a:cs typeface="Courier New" pitchFamily="49" charset="-120"/>
               </a:rPr>
               <a:t>config/settings.py</a:t>
             </a:r>
@@ -9333,37 +9334,37 @@
           <a:ln/>
         </p:spPr>
         <p:txBody>
-          <a:bodyPr wrap="square" lIns="0" tIns="0" rIns="0" bIns="0" rtlCol="0" anchor="t"/>
-          <a:lstStyle/>
-          <a:p>
-            <a:pPr indent="0" marL="0">
-              <a:buNone/>
-            </a:pPr>
-            <a:r>
-              <a:rPr lang="en-US" sz="1200" i="1" dirty="0">
+          <a:bodyPr wrap="none" lIns="0" tIns="0" rIns="0" bIns="0" rtlCol="0" anchor="t"/>
+          <a:lstStyle/>
+          <a:p>
+            <a:pPr indent="0" marL="0">
+              <a:buNone/>
+            </a:pPr>
+            <a:r>
+              <a:rPr lang="en-US" sz="1150" i="1" dirty="0">
                 <a:solidFill>
                   <a:srgbClr val="8B949E"/>
                 </a:solidFill>
-                <a:latin typeface="Consolas" pitchFamily="34" charset="0"/>
-                <a:ea typeface="Consolas" pitchFamily="34" charset="-122"/>
-                <a:cs typeface="Consolas" pitchFamily="34" charset="-120"/>
+                <a:latin typeface="Courier New" pitchFamily="49" charset="0"/>
+                <a:ea typeface="Courier New" pitchFamily="49" charset="-122"/>
+                <a:cs typeface="Courier New" pitchFamily="49" charset="-120"/>
               </a:rPr>
               <a:t># antes</a:t>
             </a:r>
-            <a:endParaRPr lang="en-US" sz="1200" dirty="0"/>
-          </a:p>
-          <a:p>
-            <a:pPr indent="0" marL="0">
-              <a:buNone/>
-            </a:pPr>
-            <a:r>
-              <a:rPr lang="en-US" sz="1200" dirty="0">
+            <a:endParaRPr lang="en-US" sz="1150" dirty="0"/>
+          </a:p>
+          <a:p>
+            <a:pPr indent="0" marL="0">
+              <a:buNone/>
+            </a:pPr>
+            <a:r>
+              <a:rPr lang="en-US" sz="1150" dirty="0">
                 <a:solidFill>
                   <a:srgbClr val="E6EDF3"/>
                 </a:solidFill>
-                <a:latin typeface="Consolas" pitchFamily="34" charset="0"/>
-                <a:ea typeface="Consolas" pitchFamily="34" charset="-122"/>
-                <a:cs typeface="Consolas" pitchFamily="34" charset="-120"/>
+                <a:latin typeface="Courier New" pitchFamily="49" charset="0"/>
+                <a:ea typeface="Courier New" pitchFamily="49" charset="-122"/>
+                <a:cs typeface="Courier New" pitchFamily="49" charset="-120"/>
               </a:rPr>
               <a:t>DATABASES = {</a:t>
             </a:r>
@@ -9371,13 +9372,13 @@
               <a:buNone/>
             </a:pPr>
             <a:r>
-              <a:rPr lang="en-US" sz="1200" dirty="0">
+              <a:rPr lang="en-US" sz="1150" dirty="0">
                 <a:solidFill>
                   <a:srgbClr val="F0C674"/>
                 </a:solidFill>
-                <a:latin typeface="Consolas" pitchFamily="34" charset="0"/>
-                <a:ea typeface="Consolas" pitchFamily="34" charset="-122"/>
-                <a:cs typeface="Consolas" pitchFamily="34" charset="-120"/>
+                <a:latin typeface="Courier New" pitchFamily="49" charset="0"/>
+                <a:ea typeface="Courier New" pitchFamily="49" charset="-122"/>
+                <a:cs typeface="Courier New" pitchFamily="49" charset="-120"/>
               </a:rPr>
               <a:t>"default"</a:t>
             </a:r>
@@ -9385,30 +9386,30 @@
               <a:buNone/>
             </a:pPr>
             <a:r>
-              <a:rPr lang="en-US" sz="1200" dirty="0">
+              <a:rPr lang="en-US" sz="1150" dirty="0">
                 <a:solidFill>
                   <a:srgbClr val="E6EDF3"/>
                 </a:solidFill>
-                <a:latin typeface="Consolas" pitchFamily="34" charset="0"/>
-                <a:ea typeface="Consolas" pitchFamily="34" charset="-122"/>
-                <a:cs typeface="Consolas" pitchFamily="34" charset="-120"/>
+                <a:latin typeface="Courier New" pitchFamily="49" charset="0"/>
+                <a:ea typeface="Courier New" pitchFamily="49" charset="-122"/>
+                <a:cs typeface="Courier New" pitchFamily="49" charset="-120"/>
               </a:rPr>
               <a:t>: {</a:t>
             </a:r>
-            <a:endParaRPr lang="en-US" sz="1200" dirty="0"/>
-          </a:p>
-          <a:p>
-            <a:pPr indent="0" marL="0">
-              <a:buNone/>
-            </a:pPr>
-            <a:r>
-              <a:rPr lang="en-US" sz="1200" dirty="0">
+            <a:endParaRPr lang="en-US" sz="1150" dirty="0"/>
+          </a:p>
+          <a:p>
+            <a:pPr indent="0" marL="0">
+              <a:buNone/>
+            </a:pPr>
+            <a:r>
+              <a:rPr lang="en-US" sz="1150" dirty="0">
                 <a:solidFill>
                   <a:srgbClr val="E6EDF3"/>
                 </a:solidFill>
-                <a:latin typeface="Consolas" pitchFamily="34" charset="0"/>
-                <a:ea typeface="Consolas" pitchFamily="34" charset="-122"/>
-                <a:cs typeface="Consolas" pitchFamily="34" charset="-120"/>
+                <a:latin typeface="Courier New" pitchFamily="49" charset="0"/>
+                <a:ea typeface="Courier New" pitchFamily="49" charset="-122"/>
+                <a:cs typeface="Courier New" pitchFamily="49" charset="-120"/>
               </a:rPr>
               <a:t>    </a:t>
             </a:r>
@@ -9416,13 +9417,13 @@
               <a:buNone/>
             </a:pPr>
             <a:r>
-              <a:rPr lang="en-US" sz="1200" dirty="0">
+              <a:rPr lang="en-US" sz="1150" dirty="0">
                 <a:solidFill>
                   <a:srgbClr val="F0C674"/>
                 </a:solidFill>
-                <a:latin typeface="Consolas" pitchFamily="34" charset="0"/>
-                <a:ea typeface="Consolas" pitchFamily="34" charset="-122"/>
-                <a:cs typeface="Consolas" pitchFamily="34" charset="-120"/>
+                <a:latin typeface="Courier New" pitchFamily="49" charset="0"/>
+                <a:ea typeface="Courier New" pitchFamily="49" charset="-122"/>
+                <a:cs typeface="Courier New" pitchFamily="49" charset="-120"/>
               </a:rPr>
               <a:t>"ENGINE"</a:t>
             </a:r>
@@ -9430,13 +9431,13 @@
               <a:buNone/>
             </a:pPr>
             <a:r>
-              <a:rPr lang="en-US" sz="1200" dirty="0">
+              <a:rPr lang="en-US" sz="1150" dirty="0">
                 <a:solidFill>
                   <a:srgbClr val="E6EDF3"/>
                 </a:solidFill>
-                <a:latin typeface="Consolas" pitchFamily="34" charset="0"/>
-                <a:ea typeface="Consolas" pitchFamily="34" charset="-122"/>
-                <a:cs typeface="Consolas" pitchFamily="34" charset="-120"/>
+                <a:latin typeface="Courier New" pitchFamily="49" charset="0"/>
+                <a:ea typeface="Courier New" pitchFamily="49" charset="-122"/>
+                <a:cs typeface="Courier New" pitchFamily="49" charset="-120"/>
               </a:rPr>
               <a:t>: </a:t>
             </a:r>
@@ -9444,13 +9445,13 @@
               <a:buNone/>
             </a:pPr>
             <a:r>
-              <a:rPr lang="en-US" sz="1200" dirty="0">
+              <a:rPr lang="en-US" sz="1150" dirty="0">
                 <a:solidFill>
                   <a:srgbClr val="F0C674"/>
                 </a:solidFill>
-                <a:latin typeface="Consolas" pitchFamily="34" charset="0"/>
-                <a:ea typeface="Consolas" pitchFamily="34" charset="-122"/>
-                <a:cs typeface="Consolas" pitchFamily="34" charset="-120"/>
+                <a:latin typeface="Courier New" pitchFamily="49" charset="0"/>
+                <a:ea typeface="Courier New" pitchFamily="49" charset="-122"/>
+                <a:cs typeface="Courier New" pitchFamily="49" charset="-120"/>
               </a:rPr>
               <a:t>"django.db.backends.sqlite3"</a:t>
             </a:r>
@@ -9458,30 +9459,30 @@
               <a:buNone/>
             </a:pPr>
             <a:r>
-              <a:rPr lang="en-US" sz="1200" dirty="0">
+              <a:rPr lang="en-US" sz="1150" dirty="0">
                 <a:solidFill>
                   <a:srgbClr val="E6EDF3"/>
                 </a:solidFill>
-                <a:latin typeface="Consolas" pitchFamily="34" charset="0"/>
-                <a:ea typeface="Consolas" pitchFamily="34" charset="-122"/>
-                <a:cs typeface="Consolas" pitchFamily="34" charset="-120"/>
+                <a:latin typeface="Courier New" pitchFamily="49" charset="0"/>
+                <a:ea typeface="Courier New" pitchFamily="49" charset="-122"/>
+                <a:cs typeface="Courier New" pitchFamily="49" charset="-120"/>
               </a:rPr>
               <a:t>,</a:t>
             </a:r>
-            <a:endParaRPr lang="en-US" sz="1200" dirty="0"/>
-          </a:p>
-          <a:p>
-            <a:pPr indent="0" marL="0">
-              <a:buNone/>
-            </a:pPr>
-            <a:r>
-              <a:rPr lang="en-US" sz="1200" dirty="0">
+            <a:endParaRPr lang="en-US" sz="1150" dirty="0"/>
+          </a:p>
+          <a:p>
+            <a:pPr indent="0" marL="0">
+              <a:buNone/>
+            </a:pPr>
+            <a:r>
+              <a:rPr lang="en-US" sz="1150" dirty="0">
                 <a:solidFill>
                   <a:srgbClr val="E6EDF3"/>
                 </a:solidFill>
-                <a:latin typeface="Consolas" pitchFamily="34" charset="0"/>
-                <a:ea typeface="Consolas" pitchFamily="34" charset="-122"/>
-                <a:cs typeface="Consolas" pitchFamily="34" charset="-120"/>
+                <a:latin typeface="Courier New" pitchFamily="49" charset="0"/>
+                <a:ea typeface="Courier New" pitchFamily="49" charset="-122"/>
+                <a:cs typeface="Courier New" pitchFamily="49" charset="-120"/>
               </a:rPr>
               <a:t>    </a:t>
             </a:r>
@@ -9489,13 +9490,13 @@
               <a:buNone/>
             </a:pPr>
             <a:r>
-              <a:rPr lang="en-US" sz="1200" dirty="0">
+              <a:rPr lang="en-US" sz="1150" dirty="0">
                 <a:solidFill>
                   <a:srgbClr val="F0C674"/>
                 </a:solidFill>
-                <a:latin typeface="Consolas" pitchFamily="34" charset="0"/>
-                <a:ea typeface="Consolas" pitchFamily="34" charset="-122"/>
-                <a:cs typeface="Consolas" pitchFamily="34" charset="-120"/>
+                <a:latin typeface="Courier New" pitchFamily="49" charset="0"/>
+                <a:ea typeface="Courier New" pitchFamily="49" charset="-122"/>
+                <a:cs typeface="Courier New" pitchFamily="49" charset="-120"/>
               </a:rPr>
               <a:t>"NAME"</a:t>
             </a:r>
@@ -9503,13 +9504,13 @@
               <a:buNone/>
             </a:pPr>
             <a:r>
-              <a:rPr lang="en-US" sz="1200" dirty="0">
+              <a:rPr lang="en-US" sz="1150" dirty="0">
                 <a:solidFill>
                   <a:srgbClr val="E6EDF3"/>
                 </a:solidFill>
-                <a:latin typeface="Consolas" pitchFamily="34" charset="0"/>
-                <a:ea typeface="Consolas" pitchFamily="34" charset="-122"/>
-                <a:cs typeface="Consolas" pitchFamily="34" charset="-120"/>
+                <a:latin typeface="Courier New" pitchFamily="49" charset="0"/>
+                <a:ea typeface="Courier New" pitchFamily="49" charset="-122"/>
+                <a:cs typeface="Courier New" pitchFamily="49" charset="-120"/>
               </a:rPr>
               <a:t>: BASE_DIR / </a:t>
             </a:r>
@@ -9517,13 +9518,13 @@
               <a:buNone/>
             </a:pPr>
             <a:r>
-              <a:rPr lang="en-US" sz="1200" dirty="0">
+              <a:rPr lang="en-US" sz="1150" dirty="0">
                 <a:solidFill>
                   <a:srgbClr val="F0C674"/>
                 </a:solidFill>
-                <a:latin typeface="Consolas" pitchFamily="34" charset="0"/>
-                <a:ea typeface="Consolas" pitchFamily="34" charset="-122"/>
-                <a:cs typeface="Consolas" pitchFamily="34" charset="-120"/>
+                <a:latin typeface="Courier New" pitchFamily="49" charset="0"/>
+                <a:ea typeface="Courier New" pitchFamily="49" charset="-122"/>
+                <a:cs typeface="Courier New" pitchFamily="49" charset="-120"/>
               </a:rPr>
               <a:t>"escola.sqlite3"</a:t>
             </a:r>
@@ -9531,81 +9532,81 @@
               <a:buNone/>
             </a:pPr>
             <a:r>
-              <a:rPr lang="en-US" sz="1200" dirty="0">
+              <a:rPr lang="en-US" sz="1150" dirty="0">
                 <a:solidFill>
                   <a:srgbClr val="E6EDF3"/>
                 </a:solidFill>
-                <a:latin typeface="Consolas" pitchFamily="34" charset="0"/>
-                <a:ea typeface="Consolas" pitchFamily="34" charset="-122"/>
-                <a:cs typeface="Consolas" pitchFamily="34" charset="-120"/>
+                <a:latin typeface="Courier New" pitchFamily="49" charset="0"/>
+                <a:ea typeface="Courier New" pitchFamily="49" charset="-122"/>
+                <a:cs typeface="Courier New" pitchFamily="49" charset="-120"/>
               </a:rPr>
               <a:t>,</a:t>
             </a:r>
-            <a:endParaRPr lang="en-US" sz="1200" dirty="0"/>
-          </a:p>
-          <a:p>
-            <a:pPr indent="0" marL="0">
-              <a:buNone/>
-            </a:pPr>
-            <a:r>
-              <a:rPr lang="en-US" sz="1200" dirty="0">
+            <a:endParaRPr lang="en-US" sz="1150" dirty="0"/>
+          </a:p>
+          <a:p>
+            <a:pPr indent="0" marL="0">
+              <a:buNone/>
+            </a:pPr>
+            <a:r>
+              <a:rPr lang="en-US" sz="1150" dirty="0">
                 <a:solidFill>
                   <a:srgbClr val="E6EDF3"/>
                 </a:solidFill>
-                <a:latin typeface="Consolas" pitchFamily="34" charset="0"/>
-                <a:ea typeface="Consolas" pitchFamily="34" charset="-122"/>
-                <a:cs typeface="Consolas" pitchFamily="34" charset="-120"/>
+                <a:latin typeface="Courier New" pitchFamily="49" charset="0"/>
+                <a:ea typeface="Courier New" pitchFamily="49" charset="-122"/>
+                <a:cs typeface="Courier New" pitchFamily="49" charset="-120"/>
               </a:rPr>
               <a:t>}}</a:t>
             </a:r>
-            <a:endParaRPr lang="en-US" sz="1200" dirty="0"/>
-          </a:p>
-          <a:p>
-            <a:pPr indent="0" marL="0">
-              <a:buNone/>
-            </a:pPr>
-            <a:r>
-              <a:rPr lang="en-US" sz="1200" dirty="0">
+            <a:endParaRPr lang="en-US" sz="1150" dirty="0"/>
+          </a:p>
+          <a:p>
+            <a:pPr indent="0" marL="0">
+              <a:buNone/>
+            </a:pPr>
+            <a:r>
+              <a:rPr lang="en-US" sz="1150" dirty="0">
                 <a:solidFill>
                   <a:srgbClr val="E6EDF3"/>
                 </a:solidFill>
-                <a:latin typeface="Consolas" pitchFamily="34" charset="0"/>
-                <a:ea typeface="Consolas" pitchFamily="34" charset="-122"/>
-                <a:cs typeface="Consolas" pitchFamily="34" charset="-120"/>
+                <a:latin typeface="Courier New" pitchFamily="49" charset="0"/>
+                <a:ea typeface="Courier New" pitchFamily="49" charset="-122"/>
+                <a:cs typeface="Courier New" pitchFamily="49" charset="-120"/>
               </a:rPr>
               <a:t> </a:t>
             </a:r>
-            <a:endParaRPr lang="en-US" sz="1200" dirty="0"/>
-          </a:p>
-          <a:p>
-            <a:pPr indent="0" marL="0">
-              <a:buNone/>
-            </a:pPr>
-            <a:r>
-              <a:rPr lang="en-US" sz="1200" i="1" dirty="0">
+            <a:endParaRPr lang="en-US" sz="1150" dirty="0"/>
+          </a:p>
+          <a:p>
+            <a:pPr indent="0" marL="0">
+              <a:buNone/>
+            </a:pPr>
+            <a:r>
+              <a:rPr lang="en-US" sz="1150" i="1" dirty="0">
                 <a:solidFill>
                   <a:srgbClr val="8B949E"/>
                 </a:solidFill>
-                <a:latin typeface="Consolas" pitchFamily="34" charset="0"/>
-                <a:ea typeface="Consolas" pitchFamily="34" charset="-122"/>
-                <a:cs typeface="Consolas" pitchFamily="34" charset="-120"/>
+                <a:latin typeface="Courier New" pitchFamily="49" charset="0"/>
+                <a:ea typeface="Courier New" pitchFamily="49" charset="-122"/>
+                <a:cs typeface="Courier New" pitchFamily="49" charset="-120"/>
               </a:rPr>
               <a:t># depois: pip install psycopg2-binary</a:t>
             </a:r>
-            <a:endParaRPr lang="en-US" sz="1200" dirty="0"/>
-          </a:p>
-          <a:p>
-            <a:pPr indent="0" marL="0">
-              <a:buNone/>
-            </a:pPr>
-            <a:r>
-              <a:rPr lang="en-US" sz="1200" dirty="0">
+            <a:endParaRPr lang="en-US" sz="1150" dirty="0"/>
+          </a:p>
+          <a:p>
+            <a:pPr indent="0" marL="0">
+              <a:buNone/>
+            </a:pPr>
+            <a:r>
+              <a:rPr lang="en-US" sz="1150" dirty="0">
                 <a:solidFill>
                   <a:srgbClr val="E6EDF3"/>
                 </a:solidFill>
-                <a:latin typeface="Consolas" pitchFamily="34" charset="0"/>
-                <a:ea typeface="Consolas" pitchFamily="34" charset="-122"/>
-                <a:cs typeface="Consolas" pitchFamily="34" charset="-120"/>
+                <a:latin typeface="Courier New" pitchFamily="49" charset="0"/>
+                <a:ea typeface="Courier New" pitchFamily="49" charset="-122"/>
+                <a:cs typeface="Courier New" pitchFamily="49" charset="-120"/>
               </a:rPr>
               <a:t>DATABASES = {</a:t>
             </a:r>
@@ -9613,13 +9614,13 @@
               <a:buNone/>
             </a:pPr>
             <a:r>
-              <a:rPr lang="en-US" sz="1200" dirty="0">
+              <a:rPr lang="en-US" sz="1150" dirty="0">
                 <a:solidFill>
                   <a:srgbClr val="F0C674"/>
                 </a:solidFill>
-                <a:latin typeface="Consolas" pitchFamily="34" charset="0"/>
-                <a:ea typeface="Consolas" pitchFamily="34" charset="-122"/>
-                <a:cs typeface="Consolas" pitchFamily="34" charset="-120"/>
+                <a:latin typeface="Courier New" pitchFamily="49" charset="0"/>
+                <a:ea typeface="Courier New" pitchFamily="49" charset="-122"/>
+                <a:cs typeface="Courier New" pitchFamily="49" charset="-120"/>
               </a:rPr>
               <a:t>"default"</a:t>
             </a:r>
@@ -9627,30 +9628,30 @@
               <a:buNone/>
             </a:pPr>
             <a:r>
-              <a:rPr lang="en-US" sz="1200" dirty="0">
+              <a:rPr lang="en-US" sz="1150" dirty="0">
                 <a:solidFill>
                   <a:srgbClr val="E6EDF3"/>
                 </a:solidFill>
-                <a:latin typeface="Consolas" pitchFamily="34" charset="0"/>
-                <a:ea typeface="Consolas" pitchFamily="34" charset="-122"/>
-                <a:cs typeface="Consolas" pitchFamily="34" charset="-120"/>
+                <a:latin typeface="Courier New" pitchFamily="49" charset="0"/>
+                <a:ea typeface="Courier New" pitchFamily="49" charset="-122"/>
+                <a:cs typeface="Courier New" pitchFamily="49" charset="-120"/>
               </a:rPr>
               <a:t>: {</a:t>
             </a:r>
-            <a:endParaRPr lang="en-US" sz="1200" dirty="0"/>
-          </a:p>
-          <a:p>
-            <a:pPr indent="0" marL="0">
-              <a:buNone/>
-            </a:pPr>
-            <a:r>
-              <a:rPr lang="en-US" sz="1200" dirty="0">
+            <a:endParaRPr lang="en-US" sz="1150" dirty="0"/>
+          </a:p>
+          <a:p>
+            <a:pPr indent="0" marL="0">
+              <a:buNone/>
+            </a:pPr>
+            <a:r>
+              <a:rPr lang="en-US" sz="1150" dirty="0">
                 <a:solidFill>
                   <a:srgbClr val="E6EDF3"/>
                 </a:solidFill>
-                <a:latin typeface="Consolas" pitchFamily="34" charset="0"/>
-                <a:ea typeface="Consolas" pitchFamily="34" charset="-122"/>
-                <a:cs typeface="Consolas" pitchFamily="34" charset="-120"/>
+                <a:latin typeface="Courier New" pitchFamily="49" charset="0"/>
+                <a:ea typeface="Courier New" pitchFamily="49" charset="-122"/>
+                <a:cs typeface="Courier New" pitchFamily="49" charset="-120"/>
               </a:rPr>
               <a:t>    </a:t>
             </a:r>
@@ -9658,13 +9659,13 @@
               <a:buNone/>
             </a:pPr>
             <a:r>
-              <a:rPr lang="en-US" sz="1200" dirty="0">
+              <a:rPr lang="en-US" sz="1150" dirty="0">
                 <a:solidFill>
                   <a:srgbClr val="F0C674"/>
                 </a:solidFill>
-                <a:latin typeface="Consolas" pitchFamily="34" charset="0"/>
-                <a:ea typeface="Consolas" pitchFamily="34" charset="-122"/>
-                <a:cs typeface="Consolas" pitchFamily="34" charset="-120"/>
+                <a:latin typeface="Courier New" pitchFamily="49" charset="0"/>
+                <a:ea typeface="Courier New" pitchFamily="49" charset="-122"/>
+                <a:cs typeface="Courier New" pitchFamily="49" charset="-120"/>
               </a:rPr>
               <a:t>"ENGINE"</a:t>
             </a:r>
@@ -9672,13 +9673,13 @@
               <a:buNone/>
             </a:pPr>
             <a:r>
-              <a:rPr lang="en-US" sz="1200" dirty="0">
+              <a:rPr lang="en-US" sz="1150" dirty="0">
                 <a:solidFill>
                   <a:srgbClr val="E6EDF3"/>
                 </a:solidFill>
-                <a:latin typeface="Consolas" pitchFamily="34" charset="0"/>
-                <a:ea typeface="Consolas" pitchFamily="34" charset="-122"/>
-                <a:cs typeface="Consolas" pitchFamily="34" charset="-120"/>
+                <a:latin typeface="Courier New" pitchFamily="49" charset="0"/>
+                <a:ea typeface="Courier New" pitchFamily="49" charset="-122"/>
+                <a:cs typeface="Courier New" pitchFamily="49" charset="-120"/>
               </a:rPr>
               <a:t>: </a:t>
             </a:r>
@@ -9686,13 +9687,13 @@
               <a:buNone/>
             </a:pPr>
             <a:r>
-              <a:rPr lang="en-US" sz="1200" dirty="0">
+              <a:rPr lang="en-US" sz="1150" dirty="0">
                 <a:solidFill>
                   <a:srgbClr val="F0C674"/>
                 </a:solidFill>
-                <a:latin typeface="Consolas" pitchFamily="34" charset="0"/>
-                <a:ea typeface="Consolas" pitchFamily="34" charset="-122"/>
-                <a:cs typeface="Consolas" pitchFamily="34" charset="-120"/>
+                <a:latin typeface="Courier New" pitchFamily="49" charset="0"/>
+                <a:ea typeface="Courier New" pitchFamily="49" charset="-122"/>
+                <a:cs typeface="Courier New" pitchFamily="49" charset="-120"/>
               </a:rPr>
               <a:t>"django.db.backends.postgresql"</a:t>
             </a:r>
@@ -9700,30 +9701,30 @@
               <a:buNone/>
             </a:pPr>
             <a:r>
-              <a:rPr lang="en-US" sz="1200" dirty="0">
+              <a:rPr lang="en-US" sz="1150" dirty="0">
                 <a:solidFill>
                   <a:srgbClr val="E6EDF3"/>
                 </a:solidFill>
-                <a:latin typeface="Consolas" pitchFamily="34" charset="0"/>
-                <a:ea typeface="Consolas" pitchFamily="34" charset="-122"/>
-                <a:cs typeface="Consolas" pitchFamily="34" charset="-120"/>
+                <a:latin typeface="Courier New" pitchFamily="49" charset="0"/>
+                <a:ea typeface="Courier New" pitchFamily="49" charset="-122"/>
+                <a:cs typeface="Courier New" pitchFamily="49" charset="-120"/>
               </a:rPr>
               <a:t>,</a:t>
             </a:r>
-            <a:endParaRPr lang="en-US" sz="1200" dirty="0"/>
-          </a:p>
-          <a:p>
-            <a:pPr indent="0" marL="0">
-              <a:buNone/>
-            </a:pPr>
-            <a:r>
-              <a:rPr lang="en-US" sz="1200" dirty="0">
+            <a:endParaRPr lang="en-US" sz="1150" dirty="0"/>
+          </a:p>
+          <a:p>
+            <a:pPr indent="0" marL="0">
+              <a:buNone/>
+            </a:pPr>
+            <a:r>
+              <a:rPr lang="en-US" sz="1150" dirty="0">
                 <a:solidFill>
                   <a:srgbClr val="E6EDF3"/>
                 </a:solidFill>
-                <a:latin typeface="Consolas" pitchFamily="34" charset="0"/>
-                <a:ea typeface="Consolas" pitchFamily="34" charset="-122"/>
-                <a:cs typeface="Consolas" pitchFamily="34" charset="-120"/>
+                <a:latin typeface="Courier New" pitchFamily="49" charset="0"/>
+                <a:ea typeface="Courier New" pitchFamily="49" charset="-122"/>
+                <a:cs typeface="Courier New" pitchFamily="49" charset="-120"/>
               </a:rPr>
               <a:t>    </a:t>
             </a:r>
@@ -9731,13 +9732,13 @@
               <a:buNone/>
             </a:pPr>
             <a:r>
-              <a:rPr lang="en-US" sz="1200" dirty="0">
+              <a:rPr lang="en-US" sz="1150" dirty="0">
                 <a:solidFill>
                   <a:srgbClr val="F0C674"/>
                 </a:solidFill>
-                <a:latin typeface="Consolas" pitchFamily="34" charset="0"/>
-                <a:ea typeface="Consolas" pitchFamily="34" charset="-122"/>
-                <a:cs typeface="Consolas" pitchFamily="34" charset="-120"/>
+                <a:latin typeface="Courier New" pitchFamily="49" charset="0"/>
+                <a:ea typeface="Courier New" pitchFamily="49" charset="-122"/>
+                <a:cs typeface="Courier New" pitchFamily="49" charset="-120"/>
               </a:rPr>
               <a:t>"NAME"</a:t>
             </a:r>
@@ -9745,13 +9746,13 @@
               <a:buNone/>
             </a:pPr>
             <a:r>
-              <a:rPr lang="en-US" sz="1200" dirty="0">
+              <a:rPr lang="en-US" sz="1150" dirty="0">
                 <a:solidFill>
                   <a:srgbClr val="E6EDF3"/>
                 </a:solidFill>
-                <a:latin typeface="Consolas" pitchFamily="34" charset="0"/>
-                <a:ea typeface="Consolas" pitchFamily="34" charset="-122"/>
-                <a:cs typeface="Consolas" pitchFamily="34" charset="-120"/>
+                <a:latin typeface="Courier New" pitchFamily="49" charset="0"/>
+                <a:ea typeface="Courier New" pitchFamily="49" charset="-122"/>
+                <a:cs typeface="Courier New" pitchFamily="49" charset="-120"/>
               </a:rPr>
               <a:t>: </a:t>
             </a:r>
@@ -9759,13 +9760,13 @@
               <a:buNone/>
             </a:pPr>
             <a:r>
-              <a:rPr lang="en-US" sz="1200" dirty="0">
+              <a:rPr lang="en-US" sz="1150" dirty="0">
                 <a:solidFill>
                   <a:srgbClr val="F0C674"/>
                 </a:solidFill>
-                <a:latin typeface="Consolas" pitchFamily="34" charset="0"/>
-                <a:ea typeface="Consolas" pitchFamily="34" charset="-122"/>
-                <a:cs typeface="Consolas" pitchFamily="34" charset="-120"/>
+                <a:latin typeface="Courier New" pitchFamily="49" charset="0"/>
+                <a:ea typeface="Courier New" pitchFamily="49" charset="-122"/>
+                <a:cs typeface="Courier New" pitchFamily="49" charset="-120"/>
               </a:rPr>
               <a:t>"escola"</a:t>
             </a:r>
@@ -9773,30 +9774,30 @@
               <a:buNone/>
             </a:pPr>
             <a:r>
-              <a:rPr lang="en-US" sz="1200" dirty="0">
+              <a:rPr lang="en-US" sz="1150" dirty="0">
                 <a:solidFill>
                   <a:srgbClr val="E6EDF3"/>
                 </a:solidFill>
-                <a:latin typeface="Consolas" pitchFamily="34" charset="0"/>
-                <a:ea typeface="Consolas" pitchFamily="34" charset="-122"/>
-                <a:cs typeface="Consolas" pitchFamily="34" charset="-120"/>
+                <a:latin typeface="Courier New" pitchFamily="49" charset="0"/>
+                <a:ea typeface="Courier New" pitchFamily="49" charset="-122"/>
+                <a:cs typeface="Courier New" pitchFamily="49" charset="-120"/>
               </a:rPr>
               <a:t>,</a:t>
             </a:r>
-            <a:endParaRPr lang="en-US" sz="1200" dirty="0"/>
-          </a:p>
-          <a:p>
-            <a:pPr indent="0" marL="0">
-              <a:buNone/>
-            </a:pPr>
-            <a:r>
-              <a:rPr lang="en-US" sz="1200" dirty="0">
+            <a:endParaRPr lang="en-US" sz="1150" dirty="0"/>
+          </a:p>
+          <a:p>
+            <a:pPr indent="0" marL="0">
+              <a:buNone/>
+            </a:pPr>
+            <a:r>
+              <a:rPr lang="en-US" sz="1150" dirty="0">
                 <a:solidFill>
                   <a:srgbClr val="E6EDF3"/>
                 </a:solidFill>
-                <a:latin typeface="Consolas" pitchFamily="34" charset="0"/>
-                <a:ea typeface="Consolas" pitchFamily="34" charset="-122"/>
-                <a:cs typeface="Consolas" pitchFamily="34" charset="-120"/>
+                <a:latin typeface="Courier New" pitchFamily="49" charset="0"/>
+                <a:ea typeface="Courier New" pitchFamily="49" charset="-122"/>
+                <a:cs typeface="Courier New" pitchFamily="49" charset="-120"/>
               </a:rPr>
               <a:t>    </a:t>
             </a:r>
@@ -9804,13 +9805,13 @@
               <a:buNone/>
             </a:pPr>
             <a:r>
-              <a:rPr lang="en-US" sz="1200" dirty="0">
+              <a:rPr lang="en-US" sz="1150" dirty="0">
                 <a:solidFill>
                   <a:srgbClr val="F0C674"/>
                 </a:solidFill>
-                <a:latin typeface="Consolas" pitchFamily="34" charset="0"/>
-                <a:ea typeface="Consolas" pitchFamily="34" charset="-122"/>
-                <a:cs typeface="Consolas" pitchFamily="34" charset="-120"/>
+                <a:latin typeface="Courier New" pitchFamily="49" charset="0"/>
+                <a:ea typeface="Courier New" pitchFamily="49" charset="-122"/>
+                <a:cs typeface="Courier New" pitchFamily="49" charset="-120"/>
               </a:rPr>
               <a:t>"USER"</a:t>
             </a:r>
@@ -9818,13 +9819,13 @@
               <a:buNone/>
             </a:pPr>
             <a:r>
-              <a:rPr lang="en-US" sz="1200" dirty="0">
+              <a:rPr lang="en-US" sz="1150" dirty="0">
                 <a:solidFill>
                   <a:srgbClr val="E6EDF3"/>
                 </a:solidFill>
-                <a:latin typeface="Consolas" pitchFamily="34" charset="0"/>
-                <a:ea typeface="Consolas" pitchFamily="34" charset="-122"/>
-                <a:cs typeface="Consolas" pitchFamily="34" charset="-120"/>
+                <a:latin typeface="Courier New" pitchFamily="49" charset="0"/>
+                <a:ea typeface="Courier New" pitchFamily="49" charset="-122"/>
+                <a:cs typeface="Courier New" pitchFamily="49" charset="-120"/>
               </a:rPr>
               <a:t>: os.getenv(</a:t>
             </a:r>
@@ -9832,13 +9833,13 @@
               <a:buNone/>
             </a:pPr>
             <a:r>
-              <a:rPr lang="en-US" sz="1200" dirty="0">
+              <a:rPr lang="en-US" sz="1150" dirty="0">
                 <a:solidFill>
                   <a:srgbClr val="F0C674"/>
                 </a:solidFill>
-                <a:latin typeface="Consolas" pitchFamily="34" charset="0"/>
-                <a:ea typeface="Consolas" pitchFamily="34" charset="-122"/>
-                <a:cs typeface="Consolas" pitchFamily="34" charset="-120"/>
+                <a:latin typeface="Courier New" pitchFamily="49" charset="0"/>
+                <a:ea typeface="Courier New" pitchFamily="49" charset="-122"/>
+                <a:cs typeface="Courier New" pitchFamily="49" charset="-120"/>
               </a:rPr>
               <a:t>"DB_USER"</a:t>
             </a:r>
@@ -9846,30 +9847,30 @@
               <a:buNone/>
             </a:pPr>
             <a:r>
-              <a:rPr lang="en-US" sz="1200" dirty="0">
+              <a:rPr lang="en-US" sz="1150" dirty="0">
                 <a:solidFill>
                   <a:srgbClr val="E6EDF3"/>
                 </a:solidFill>
-                <a:latin typeface="Consolas" pitchFamily="34" charset="0"/>
-                <a:ea typeface="Consolas" pitchFamily="34" charset="-122"/>
-                <a:cs typeface="Consolas" pitchFamily="34" charset="-120"/>
+                <a:latin typeface="Courier New" pitchFamily="49" charset="0"/>
+                <a:ea typeface="Courier New" pitchFamily="49" charset="-122"/>
+                <a:cs typeface="Courier New" pitchFamily="49" charset="-120"/>
               </a:rPr>
               <a:t>),</a:t>
             </a:r>
-            <a:endParaRPr lang="en-US" sz="1200" dirty="0"/>
-          </a:p>
-          <a:p>
-            <a:pPr indent="0" marL="0">
-              <a:buNone/>
-            </a:pPr>
-            <a:r>
-              <a:rPr lang="en-US" sz="1200" dirty="0">
+            <a:endParaRPr lang="en-US" sz="1150" dirty="0"/>
+          </a:p>
+          <a:p>
+            <a:pPr indent="0" marL="0">
+              <a:buNone/>
+            </a:pPr>
+            <a:r>
+              <a:rPr lang="en-US" sz="1150" dirty="0">
                 <a:solidFill>
                   <a:srgbClr val="E6EDF3"/>
                 </a:solidFill>
-                <a:latin typeface="Consolas" pitchFamily="34" charset="0"/>
-                <a:ea typeface="Consolas" pitchFamily="34" charset="-122"/>
-                <a:cs typeface="Consolas" pitchFamily="34" charset="-120"/>
+                <a:latin typeface="Courier New" pitchFamily="49" charset="0"/>
+                <a:ea typeface="Courier New" pitchFamily="49" charset="-122"/>
+                <a:cs typeface="Courier New" pitchFamily="49" charset="-120"/>
               </a:rPr>
               <a:t>    </a:t>
             </a:r>
@@ -9877,13 +9878,13 @@
               <a:buNone/>
             </a:pPr>
             <a:r>
-              <a:rPr lang="en-US" sz="1200" dirty="0">
+              <a:rPr lang="en-US" sz="1150" dirty="0">
                 <a:solidFill>
                   <a:srgbClr val="F0C674"/>
                 </a:solidFill>
-                <a:latin typeface="Consolas" pitchFamily="34" charset="0"/>
-                <a:ea typeface="Consolas" pitchFamily="34" charset="-122"/>
-                <a:cs typeface="Consolas" pitchFamily="34" charset="-120"/>
+                <a:latin typeface="Courier New" pitchFamily="49" charset="0"/>
+                <a:ea typeface="Courier New" pitchFamily="49" charset="-122"/>
+                <a:cs typeface="Courier New" pitchFamily="49" charset="-120"/>
               </a:rPr>
               <a:t>"PASSWORD"</a:t>
             </a:r>
@@ -9891,13 +9892,13 @@
               <a:buNone/>
             </a:pPr>
             <a:r>
-              <a:rPr lang="en-US" sz="1200" dirty="0">
+              <a:rPr lang="en-US" sz="1150" dirty="0">
                 <a:solidFill>
                   <a:srgbClr val="E6EDF3"/>
                 </a:solidFill>
-                <a:latin typeface="Consolas" pitchFamily="34" charset="0"/>
-                <a:ea typeface="Consolas" pitchFamily="34" charset="-122"/>
-                <a:cs typeface="Consolas" pitchFamily="34" charset="-120"/>
+                <a:latin typeface="Courier New" pitchFamily="49" charset="0"/>
+                <a:ea typeface="Courier New" pitchFamily="49" charset="-122"/>
+                <a:cs typeface="Courier New" pitchFamily="49" charset="-120"/>
               </a:rPr>
               <a:t>: os.getenv(</a:t>
             </a:r>
@@ -9905,13 +9906,13 @@
               <a:buNone/>
             </a:pPr>
             <a:r>
-              <a:rPr lang="en-US" sz="1200" dirty="0">
+              <a:rPr lang="en-US" sz="1150" dirty="0">
                 <a:solidFill>
                   <a:srgbClr val="F0C674"/>
                 </a:solidFill>
-                <a:latin typeface="Consolas" pitchFamily="34" charset="0"/>
-                <a:ea typeface="Consolas" pitchFamily="34" charset="-122"/>
-                <a:cs typeface="Consolas" pitchFamily="34" charset="-120"/>
+                <a:latin typeface="Courier New" pitchFamily="49" charset="0"/>
+                <a:ea typeface="Courier New" pitchFamily="49" charset="-122"/>
+                <a:cs typeface="Courier New" pitchFamily="49" charset="-120"/>
               </a:rPr>
               <a:t>"DB_PASSWORD"</a:t>
             </a:r>
@@ -9919,30 +9920,30 @@
               <a:buNone/>
             </a:pPr>
             <a:r>
-              <a:rPr lang="en-US" sz="1200" dirty="0">
+              <a:rPr lang="en-US" sz="1150" dirty="0">
                 <a:solidFill>
                   <a:srgbClr val="E6EDF3"/>
                 </a:solidFill>
-                <a:latin typeface="Consolas" pitchFamily="34" charset="0"/>
-                <a:ea typeface="Consolas" pitchFamily="34" charset="-122"/>
-                <a:cs typeface="Consolas" pitchFamily="34" charset="-120"/>
+                <a:latin typeface="Courier New" pitchFamily="49" charset="0"/>
+                <a:ea typeface="Courier New" pitchFamily="49" charset="-122"/>
+                <a:cs typeface="Courier New" pitchFamily="49" charset="-120"/>
               </a:rPr>
               <a:t>),</a:t>
             </a:r>
-            <a:endParaRPr lang="en-US" sz="1200" dirty="0"/>
-          </a:p>
-          <a:p>
-            <a:pPr indent="0" marL="0">
-              <a:buNone/>
-            </a:pPr>
-            <a:r>
-              <a:rPr lang="en-US" sz="1200" dirty="0">
+            <a:endParaRPr lang="en-US" sz="1150" dirty="0"/>
+          </a:p>
+          <a:p>
+            <a:pPr indent="0" marL="0">
+              <a:buNone/>
+            </a:pPr>
+            <a:r>
+              <a:rPr lang="en-US" sz="1150" dirty="0">
                 <a:solidFill>
                   <a:srgbClr val="E6EDF3"/>
                 </a:solidFill>
-                <a:latin typeface="Consolas" pitchFamily="34" charset="0"/>
-                <a:ea typeface="Consolas" pitchFamily="34" charset="-122"/>
-                <a:cs typeface="Consolas" pitchFamily="34" charset="-120"/>
+                <a:latin typeface="Courier New" pitchFamily="49" charset="0"/>
+                <a:ea typeface="Courier New" pitchFamily="49" charset="-122"/>
+                <a:cs typeface="Courier New" pitchFamily="49" charset="-120"/>
               </a:rPr>
               <a:t>    </a:t>
             </a:r>
@@ -9950,13 +9951,13 @@
               <a:buNone/>
             </a:pPr>
             <a:r>
-              <a:rPr lang="en-US" sz="1200" dirty="0">
+              <a:rPr lang="en-US" sz="1150" dirty="0">
                 <a:solidFill>
                   <a:srgbClr val="F0C674"/>
                 </a:solidFill>
-                <a:latin typeface="Consolas" pitchFamily="34" charset="0"/>
-                <a:ea typeface="Consolas" pitchFamily="34" charset="-122"/>
-                <a:cs typeface="Consolas" pitchFamily="34" charset="-120"/>
+                <a:latin typeface="Courier New" pitchFamily="49" charset="0"/>
+                <a:ea typeface="Courier New" pitchFamily="49" charset="-122"/>
+                <a:cs typeface="Courier New" pitchFamily="49" charset="-120"/>
               </a:rPr>
               <a:t>"HOST"</a:t>
             </a:r>
@@ -9964,13 +9965,13 @@
               <a:buNone/>
             </a:pPr>
             <a:r>
-              <a:rPr lang="en-US" sz="1200" dirty="0">
+              <a:rPr lang="en-US" sz="1150" dirty="0">
                 <a:solidFill>
                   <a:srgbClr val="E6EDF3"/>
                 </a:solidFill>
-                <a:latin typeface="Consolas" pitchFamily="34" charset="0"/>
-                <a:ea typeface="Consolas" pitchFamily="34" charset="-122"/>
-                <a:cs typeface="Consolas" pitchFamily="34" charset="-120"/>
+                <a:latin typeface="Courier New" pitchFamily="49" charset="0"/>
+                <a:ea typeface="Courier New" pitchFamily="49" charset="-122"/>
+                <a:cs typeface="Courier New" pitchFamily="49" charset="-120"/>
               </a:rPr>
               <a:t>: </a:t>
             </a:r>
@@ -9978,13 +9979,13 @@
               <a:buNone/>
             </a:pPr>
             <a:r>
-              <a:rPr lang="en-US" sz="1200" dirty="0">
+              <a:rPr lang="en-US" sz="1150" dirty="0">
                 <a:solidFill>
                   <a:srgbClr val="F0C674"/>
                 </a:solidFill>
-                <a:latin typeface="Consolas" pitchFamily="34" charset="0"/>
-                <a:ea typeface="Consolas" pitchFamily="34" charset="-122"/>
-                <a:cs typeface="Consolas" pitchFamily="34" charset="-120"/>
+                <a:latin typeface="Courier New" pitchFamily="49" charset="0"/>
+                <a:ea typeface="Courier New" pitchFamily="49" charset="-122"/>
+                <a:cs typeface="Courier New" pitchFamily="49" charset="-120"/>
               </a:rPr>
               <a:t>"localhost"</a:t>
             </a:r>
@@ -9992,13 +9993,13 @@
               <a:buNone/>
             </a:pPr>
             <a:r>
-              <a:rPr lang="en-US" sz="1200" dirty="0">
+              <a:rPr lang="en-US" sz="1150" dirty="0">
                 <a:solidFill>
                   <a:srgbClr val="E6EDF3"/>
                 </a:solidFill>
-                <a:latin typeface="Consolas" pitchFamily="34" charset="0"/>
-                <a:ea typeface="Consolas" pitchFamily="34" charset="-122"/>
-                <a:cs typeface="Consolas" pitchFamily="34" charset="-120"/>
+                <a:latin typeface="Courier New" pitchFamily="49" charset="0"/>
+                <a:ea typeface="Courier New" pitchFamily="49" charset="-122"/>
+                <a:cs typeface="Courier New" pitchFamily="49" charset="-120"/>
               </a:rPr>
               <a:t>, </a:t>
             </a:r>
@@ -10006,13 +10007,13 @@
               <a:buNone/>
             </a:pPr>
             <a:r>
-              <a:rPr lang="en-US" sz="1200" dirty="0">
+              <a:rPr lang="en-US" sz="1150" dirty="0">
                 <a:solidFill>
                   <a:srgbClr val="F0C674"/>
                 </a:solidFill>
-                <a:latin typeface="Consolas" pitchFamily="34" charset="0"/>
-                <a:ea typeface="Consolas" pitchFamily="34" charset="-122"/>
-                <a:cs typeface="Consolas" pitchFamily="34" charset="-120"/>
+                <a:latin typeface="Courier New" pitchFamily="49" charset="0"/>
+                <a:ea typeface="Courier New" pitchFamily="49" charset="-122"/>
+                <a:cs typeface="Courier New" pitchFamily="49" charset="-120"/>
               </a:rPr>
               <a:t>"PORT"</a:t>
             </a:r>
@@ -10020,13 +10021,13 @@
               <a:buNone/>
             </a:pPr>
             <a:r>
-              <a:rPr lang="en-US" sz="1200" dirty="0">
+              <a:rPr lang="en-US" sz="1150" dirty="0">
                 <a:solidFill>
                   <a:srgbClr val="E6EDF3"/>
                 </a:solidFill>
-                <a:latin typeface="Consolas" pitchFamily="34" charset="0"/>
-                <a:ea typeface="Consolas" pitchFamily="34" charset="-122"/>
-                <a:cs typeface="Consolas" pitchFamily="34" charset="-120"/>
+                <a:latin typeface="Courier New" pitchFamily="49" charset="0"/>
+                <a:ea typeface="Courier New" pitchFamily="49" charset="-122"/>
+                <a:cs typeface="Courier New" pitchFamily="49" charset="-120"/>
               </a:rPr>
               <a:t>: </a:t>
             </a:r>
@@ -10034,13 +10035,13 @@
               <a:buNone/>
             </a:pPr>
             <a:r>
-              <a:rPr lang="en-US" sz="1200" dirty="0">
+              <a:rPr lang="en-US" sz="1150" dirty="0">
                 <a:solidFill>
                   <a:srgbClr val="F0C674"/>
                 </a:solidFill>
-                <a:latin typeface="Consolas" pitchFamily="34" charset="0"/>
-                <a:ea typeface="Consolas" pitchFamily="34" charset="-122"/>
-                <a:cs typeface="Consolas" pitchFamily="34" charset="-120"/>
+                <a:latin typeface="Courier New" pitchFamily="49" charset="0"/>
+                <a:ea typeface="Courier New" pitchFamily="49" charset="-122"/>
+                <a:cs typeface="Courier New" pitchFamily="49" charset="-120"/>
               </a:rPr>
               <a:t>"5432"</a:t>
             </a:r>
@@ -10048,34 +10049,34 @@
               <a:buNone/>
             </a:pPr>
             <a:r>
-              <a:rPr lang="en-US" sz="1200" dirty="0">
+              <a:rPr lang="en-US" sz="1150" dirty="0">
                 <a:solidFill>
                   <a:srgbClr val="E6EDF3"/>
                 </a:solidFill>
-                <a:latin typeface="Consolas" pitchFamily="34" charset="0"/>
-                <a:ea typeface="Consolas" pitchFamily="34" charset="-122"/>
-                <a:cs typeface="Consolas" pitchFamily="34" charset="-120"/>
+                <a:latin typeface="Courier New" pitchFamily="49" charset="0"/>
+                <a:ea typeface="Courier New" pitchFamily="49" charset="-122"/>
+                <a:cs typeface="Courier New" pitchFamily="49" charset="-120"/>
               </a:rPr>
               <a:t>,</a:t>
             </a:r>
-            <a:endParaRPr lang="en-US" sz="1200" dirty="0"/>
-          </a:p>
-          <a:p>
-            <a:pPr indent="0" marL="0">
-              <a:buNone/>
-            </a:pPr>
-            <a:r>
-              <a:rPr lang="en-US" sz="1200" dirty="0">
+            <a:endParaRPr lang="en-US" sz="1150" dirty="0"/>
+          </a:p>
+          <a:p>
+            <a:pPr indent="0" marL="0">
+              <a:buNone/>
+            </a:pPr>
+            <a:r>
+              <a:rPr lang="en-US" sz="1150" dirty="0">
                 <a:solidFill>
                   <a:srgbClr val="E6EDF3"/>
                 </a:solidFill>
-                <a:latin typeface="Consolas" pitchFamily="34" charset="0"/>
-                <a:ea typeface="Consolas" pitchFamily="34" charset="-122"/>
-                <a:cs typeface="Consolas" pitchFamily="34" charset="-120"/>
+                <a:latin typeface="Courier New" pitchFamily="49" charset="0"/>
+                <a:ea typeface="Courier New" pitchFamily="49" charset="-122"/>
+                <a:cs typeface="Courier New" pitchFamily="49" charset="-120"/>
               </a:rPr>
               <a:t>}}</a:t>
             </a:r>
-            <a:endParaRPr lang="en-US" sz="1200" dirty="0"/>
+            <a:endParaRPr lang="en-US" sz="1150" dirty="0"/>
           </a:p>
         </p:txBody>
       </p:sp>
@@ -10239,13 +10240,13 @@
               <a:buNone/>
             </a:pPr>
             <a:r>
-              <a:rPr lang="en-US" sz="1200" dirty="0">
+              <a:rPr lang="en-US" sz="1100" dirty="0">
                 <a:solidFill>
                   <a:srgbClr val="00397B"/>
                 </a:solidFill>
-                <a:latin typeface="Consolas" pitchFamily="34" charset="0"/>
-                <a:ea typeface="Consolas" pitchFamily="34" charset="-122"/>
-                <a:cs typeface="Consolas" pitchFamily="34" charset="-120"/>
+                <a:latin typeface="Courier New" pitchFamily="49" charset="0"/>
+                <a:ea typeface="Courier New" pitchFamily="49" charset="-122"/>
+                <a:cs typeface="Courier New" pitchFamily="49" charset="-120"/>
               </a:rPr>
               <a:t>psycopg2</a:t>
             </a:r>
@@ -10413,15 +10414,40 @@
               <a:buNone/>
             </a:pPr>
             <a:r>
+              <a:rPr lang="en-US" sz="1100" dirty="0">
+                <a:solidFill>
+                  <a:srgbClr val="00397B"/>
+                </a:solidFill>
+                <a:latin typeface="Courier New" pitchFamily="49" charset="0"/>
+                <a:ea typeface="Courier New" pitchFamily="49" charset="-122"/>
+                <a:cs typeface="Courier New" pitchFamily="49" charset="-120"/>
+              </a:rPr>
+              <a:t>escola</a:t>
+            </a:r>
+            <a:pPr indent="0" marL="0">
+              <a:buNone/>
+            </a:pPr>
+            <a:r>
               <a:rPr lang="en-US" sz="1200" dirty="0">
                 <a:solidFill>
+                  <a:srgbClr val="3A3F44"/>
+                </a:solidFill>
+              </a:rPr>
+              <a:t>, no pgAdmin ou no </a:t>
+            </a:r>
+            <a:pPr indent="0" marL="0">
+              <a:buNone/>
+            </a:pPr>
+            <a:r>
+              <a:rPr lang="en-US" sz="1100" dirty="0">
+                <a:solidFill>
                   <a:srgbClr val="00397B"/>
                 </a:solidFill>
-                <a:latin typeface="Consolas" pitchFamily="34" charset="0"/>
-                <a:ea typeface="Consolas" pitchFamily="34" charset="-122"/>
-                <a:cs typeface="Consolas" pitchFamily="34" charset="-120"/>
-              </a:rPr>
-              <a:t>escola</a:t>
+                <a:latin typeface="Courier New" pitchFamily="49" charset="0"/>
+                <a:ea typeface="Courier New" pitchFamily="49" charset="-122"/>
+                <a:cs typeface="Courier New" pitchFamily="49" charset="-120"/>
+              </a:rPr>
+              <a:t>psql</a:t>
             </a:r>
             <a:pPr indent="0" marL="0">
               <a:buNone/>
@@ -10432,44 +10458,19 @@
                   <a:srgbClr val="3A3F44"/>
                 </a:solidFill>
               </a:rPr>
-              <a:t>, no pgAdmin ou no </a:t>
-            </a:r>
-            <a:pPr indent="0" marL="0">
-              <a:buNone/>
-            </a:pPr>
-            <a:r>
-              <a:rPr lang="en-US" sz="1200" dirty="0">
+              <a:t>. Senha no </a:t>
+            </a:r>
+            <a:pPr indent="0" marL="0">
+              <a:buNone/>
+            </a:pPr>
+            <a:r>
+              <a:rPr lang="en-US" sz="1100" dirty="0">
                 <a:solidFill>
                   <a:srgbClr val="00397B"/>
                 </a:solidFill>
-                <a:latin typeface="Consolas" pitchFamily="34" charset="0"/>
-                <a:ea typeface="Consolas" pitchFamily="34" charset="-122"/>
-                <a:cs typeface="Consolas" pitchFamily="34" charset="-120"/>
-              </a:rPr>
-              <a:t>psql</a:t>
-            </a:r>
-            <a:pPr indent="0" marL="0">
-              <a:buNone/>
-            </a:pPr>
-            <a:r>
-              <a:rPr lang="en-US" sz="1200" dirty="0">
-                <a:solidFill>
-                  <a:srgbClr val="3A3F44"/>
-                </a:solidFill>
-              </a:rPr>
-              <a:t>. Senha no </a:t>
-            </a:r>
-            <a:pPr indent="0" marL="0">
-              <a:buNone/>
-            </a:pPr>
-            <a:r>
-              <a:rPr lang="en-US" sz="1200" dirty="0">
-                <a:solidFill>
-                  <a:srgbClr val="00397B"/>
-                </a:solidFill>
-                <a:latin typeface="Consolas" pitchFamily="34" charset="0"/>
-                <a:ea typeface="Consolas" pitchFamily="34" charset="-122"/>
-                <a:cs typeface="Consolas" pitchFamily="34" charset="-120"/>
+                <a:latin typeface="Courier New" pitchFamily="49" charset="0"/>
+                <a:ea typeface="Courier New" pitchFamily="49" charset="-122"/>
+                <a:cs typeface="Courier New" pitchFamily="49" charset="-120"/>
               </a:rPr>
               <a:t>.env</a:t>
             </a:r>
@@ -10637,13 +10638,13 @@
               <a:buNone/>
             </a:pPr>
             <a:r>
-              <a:rPr lang="en-US" sz="1200" dirty="0">
+              <a:rPr lang="en-US" sz="1100" dirty="0">
                 <a:solidFill>
                   <a:srgbClr val="00397B"/>
                 </a:solidFill>
-                <a:latin typeface="Consolas" pitchFamily="34" charset="0"/>
-                <a:ea typeface="Consolas" pitchFamily="34" charset="-122"/>
-                <a:cs typeface="Consolas" pitchFamily="34" charset="-120"/>
+                <a:latin typeface="Courier New" pitchFamily="49" charset="0"/>
+                <a:ea typeface="Courier New" pitchFamily="49" charset="-122"/>
+                <a:cs typeface="Courier New" pitchFamily="49" charset="-120"/>
               </a:rPr>
               <a:t>python manage.py migrate</a:t>
             </a:r>
@@ -10849,13 +10850,13 @@
               <a:buNone/>
             </a:pPr>
             <a:r>
-              <a:rPr lang="en-US" sz="1600" dirty="0">
+              <a:rPr lang="en-US" sz="1450" dirty="0">
                 <a:solidFill>
                   <a:srgbClr val="00397B"/>
                 </a:solidFill>
-                <a:latin typeface="Consolas" pitchFamily="34" charset="0"/>
-                <a:ea typeface="Consolas" pitchFamily="34" charset="-122"/>
-                <a:cs typeface="Consolas" pitchFamily="34" charset="-120"/>
+                <a:latin typeface="Courier New" pitchFamily="49" charset="0"/>
+                <a:ea typeface="Courier New" pitchFamily="49" charset="-122"/>
+                <a:cs typeface="Courier New" pitchFamily="49" charset="-120"/>
               </a:rPr>
               <a:t>inscricao</a:t>
             </a:r>
@@ -10998,13 +10999,13 @@
               <a:buNone/>
             </a:pPr>
             <a:r>
-              <a:rPr lang="en-US" sz="1600" dirty="0">
+              <a:rPr lang="en-US" sz="1450" dirty="0">
                 <a:solidFill>
                   <a:srgbClr val="00397B"/>
                 </a:solidFill>
-                <a:latin typeface="Consolas" pitchFamily="34" charset="0"/>
-                <a:ea typeface="Consolas" pitchFamily="34" charset="-122"/>
-                <a:cs typeface="Consolas" pitchFamily="34" charset="-120"/>
+                <a:latin typeface="Courier New" pitchFamily="49" charset="0"/>
+                <a:ea typeface="Courier New" pitchFamily="49" charset="-122"/>
+                <a:cs typeface="Courier New" pitchFamily="49" charset="-120"/>
               </a:rPr>
               <a:t>select_related</a:t>
             </a:r>
@@ -11147,13 +11148,13 @@
               <a:buNone/>
             </a:pPr>
             <a:r>
-              <a:rPr lang="en-US" sz="1600" dirty="0">
+              <a:rPr lang="en-US" sz="1450" dirty="0">
                 <a:solidFill>
                   <a:srgbClr val="00397B"/>
                 </a:solidFill>
-                <a:latin typeface="Consolas" pitchFamily="34" charset="0"/>
-                <a:ea typeface="Consolas" pitchFamily="34" charset="-122"/>
-                <a:cs typeface="Consolas" pitchFamily="34" charset="-120"/>
+                <a:latin typeface="Courier New" pitchFamily="49" charset="0"/>
+                <a:ea typeface="Courier New" pitchFamily="49" charset="-122"/>
+                <a:cs typeface="Courier New" pitchFamily="49" charset="-120"/>
               </a:rPr>
               <a:t>&lt;select&gt;</a:t>
             </a:r>
@@ -11517,7 +11518,7 @@
           <a:ln/>
         </p:spPr>
         <p:txBody>
-          <a:bodyPr wrap="square" lIns="0" tIns="0" rIns="0" bIns="0" rtlCol="0" anchor="ctr"/>
+          <a:bodyPr wrap="none" lIns="0" tIns="0" rIns="0" bIns="0" rtlCol="0" anchor="ctr"/>
           <a:lstStyle/>
           <a:p>
             <a:pPr indent="0" marL="0">
@@ -11528,9 +11529,9 @@
                 <a:solidFill>
                   <a:srgbClr val="8B949E"/>
                 </a:solidFill>
-                <a:latin typeface="Consolas" pitchFamily="34" charset="0"/>
-                <a:ea typeface="Consolas" pitchFamily="34" charset="-122"/>
-                <a:cs typeface="Consolas" pitchFamily="34" charset="-120"/>
+                <a:latin typeface="Courier New" pitchFamily="49" charset="0"/>
+                <a:ea typeface="Courier New" pitchFamily="49" charset="-122"/>
+                <a:cs typeface="Courier New" pitchFamily="49" charset="-120"/>
               </a:rPr>
               <a:t>terminal</a:t>
             </a:r>
@@ -11556,7 +11557,7 @@
           <a:ln/>
         </p:spPr>
         <p:txBody>
-          <a:bodyPr wrap="square" lIns="0" tIns="0" rIns="0" bIns="0" rtlCol="0" anchor="t"/>
+          <a:bodyPr wrap="none" lIns="0" tIns="0" rIns="0" bIns="0" rtlCol="0" anchor="t"/>
           <a:lstStyle/>
           <a:p>
             <a:pPr indent="0" marL="0">
@@ -11567,9 +11568,9 @@
                 <a:solidFill>
                   <a:srgbClr val="E6EDF3"/>
                 </a:solidFill>
-                <a:latin typeface="Consolas" pitchFamily="34" charset="0"/>
-                <a:ea typeface="Consolas" pitchFamily="34" charset="-122"/>
-                <a:cs typeface="Consolas" pitchFamily="34" charset="-120"/>
+                <a:latin typeface="Courier New" pitchFamily="49" charset="0"/>
+                <a:ea typeface="Courier New" pitchFamily="49" charset="-122"/>
+                <a:cs typeface="Courier New" pitchFamily="49" charset="-120"/>
               </a:rPr>
               <a:t>python manage.py seed_demo</a:t>
             </a:r>
@@ -11584,9 +11585,9 @@
                 <a:solidFill>
                   <a:srgbClr val="E6EDF3"/>
                 </a:solidFill>
-                <a:latin typeface="Consolas" pitchFamily="34" charset="0"/>
-                <a:ea typeface="Consolas" pitchFamily="34" charset="-122"/>
-                <a:cs typeface="Consolas" pitchFamily="34" charset="-120"/>
+                <a:latin typeface="Courier New" pitchFamily="49" charset="0"/>
+                <a:ea typeface="Courier New" pitchFamily="49" charset="-122"/>
+                <a:cs typeface="Courier New" pitchFamily="49" charset="-120"/>
               </a:rPr>
               <a:t>python manage.py shell</a:t>
             </a:r>
@@ -11601,9 +11602,9 @@
                 <a:solidFill>
                   <a:srgbClr val="E6EDF3"/>
                 </a:solidFill>
-                <a:latin typeface="Consolas" pitchFamily="34" charset="0"/>
-                <a:ea typeface="Consolas" pitchFamily="34" charset="-122"/>
-                <a:cs typeface="Consolas" pitchFamily="34" charset="-120"/>
+                <a:latin typeface="Courier New" pitchFamily="49" charset="0"/>
+                <a:ea typeface="Courier New" pitchFamily="49" charset="-122"/>
+                <a:cs typeface="Courier New" pitchFamily="49" charset="-120"/>
               </a:rPr>
               <a:t>python verificar.py</a:t>
             </a:r>
@@ -11886,13 +11887,13 @@
               <a:buNone/>
             </a:pPr>
             <a:r>
-              <a:rPr lang="en-US" sz="1300" dirty="0">
+              <a:rPr lang="en-US" sz="1150" dirty="0">
                 <a:solidFill>
                   <a:srgbClr val="00397B"/>
                 </a:solidFill>
-                <a:latin typeface="Consolas" pitchFamily="34" charset="0"/>
-                <a:ea typeface="Consolas" pitchFamily="34" charset="-122"/>
-                <a:cs typeface="Consolas" pitchFamily="34" charset="-120"/>
+                <a:latin typeface="Courier New" pitchFamily="49" charset="0"/>
+                <a:ea typeface="Courier New" pitchFamily="49" charset="-122"/>
+                <a:cs typeface="Courier New" pitchFamily="49" charset="-120"/>
               </a:rPr>
               <a:t>python manage.py seed_demo</a:t>
             </a:r>
@@ -12071,13 +12072,13 @@
               <a:buNone/>
             </a:pPr>
             <a:r>
-              <a:rPr lang="en-US" sz="1300" dirty="0">
+              <a:rPr lang="en-US" sz="1150" dirty="0">
                 <a:solidFill>
                   <a:srgbClr val="00397B"/>
                 </a:solidFill>
-                <a:latin typeface="Consolas" pitchFamily="34" charset="0"/>
-                <a:ea typeface="Consolas" pitchFamily="34" charset="-122"/>
-                <a:cs typeface="Consolas" pitchFamily="34" charset="-120"/>
+                <a:latin typeface="Courier New" pitchFamily="49" charset="0"/>
+                <a:ea typeface="Courier New" pitchFamily="49" charset="-122"/>
+                <a:cs typeface="Courier New" pitchFamily="49" charset="-120"/>
               </a:rPr>
               <a:t>select_related</a:t>
             </a:r>
@@ -12245,13 +12246,13 @@
               <a:buNone/>
             </a:pPr>
             <a:r>
-              <a:rPr lang="en-US" sz="1300" dirty="0">
+              <a:rPr lang="en-US" sz="1150" dirty="0">
                 <a:solidFill>
                   <a:srgbClr val="00397B"/>
                 </a:solidFill>
-                <a:latin typeface="Consolas" pitchFamily="34" charset="0"/>
-                <a:ea typeface="Consolas" pitchFamily="34" charset="-122"/>
-                <a:cs typeface="Consolas" pitchFamily="34" charset="-120"/>
+                <a:latin typeface="Courier New" pitchFamily="49" charset="0"/>
+                <a:ea typeface="Courier New" pitchFamily="49" charset="-122"/>
+                <a:cs typeface="Courier New" pitchFamily="49" charset="-120"/>
               </a:rPr>
               <a:t>print(qs.query)</a:t>
             </a:r>
@@ -12871,13 +12872,13 @@
                         <a:buNone/>
                       </a:pPr>
                       <a:r>
-                        <a:rPr lang="en-US" sz="1300" dirty="0">
+                        <a:rPr lang="en-US" sz="1150" dirty="0">
                           <a:solidFill>
                             <a:srgbClr val="00397B"/>
                           </a:solidFill>
-                          <a:latin typeface="Consolas" pitchFamily="34" charset="0"/>
-                          <a:ea typeface="Consolas" pitchFamily="34" charset="-122"/>
-                          <a:cs typeface="Consolas" pitchFamily="34" charset="-120"/>
+                          <a:latin typeface="Courier New" pitchFamily="49" charset="0"/>
+                          <a:ea typeface="Courier New" pitchFamily="49" charset="-122"/>
+                          <a:cs typeface="Courier New" pitchFamily="49" charset="-120"/>
                         </a:rPr>
                         <a:t>disciplina_lista</a:t>
                       </a:r>
@@ -13023,13 +13024,13 @@
                         <a:buNone/>
                       </a:pPr>
                       <a:r>
-                        <a:rPr lang="en-US" sz="1300" dirty="0">
+                        <a:rPr lang="en-US" sz="1150" dirty="0">
                           <a:solidFill>
                             <a:srgbClr val="00397B"/>
                           </a:solidFill>
-                          <a:latin typeface="Consolas" pitchFamily="34" charset="0"/>
-                          <a:ea typeface="Consolas" pitchFamily="34" charset="-122"/>
-                          <a:cs typeface="Consolas" pitchFamily="34" charset="-120"/>
+                          <a:latin typeface="Courier New" pitchFamily="49" charset="0"/>
+                          <a:ea typeface="Courier New" pitchFamily="49" charset="-122"/>
+                          <a:cs typeface="Courier New" pitchFamily="49" charset="-120"/>
                         </a:rPr>
                         <a:t>disciplina_nova/editar/excluir</a:t>
                       </a:r>
@@ -13086,13 +13087,13 @@
                         <a:buNone/>
                       </a:pPr>
                       <a:r>
-                        <a:rPr lang="en-US" sz="1300" dirty="0">
+                        <a:rPr lang="en-US" sz="1150" dirty="0">
                           <a:solidFill>
                             <a:srgbClr val="00397B"/>
                           </a:solidFill>
-                          <a:latin typeface="Consolas" pitchFamily="34" charset="0"/>
-                          <a:ea typeface="Consolas" pitchFamily="34" charset="-122"/>
-                          <a:cs typeface="Consolas" pitchFamily="34" charset="-120"/>
+                          <a:latin typeface="Courier New" pitchFamily="49" charset="0"/>
+                          <a:ea typeface="Courier New" pitchFamily="49" charset="-122"/>
+                          <a:cs typeface="Courier New" pitchFamily="49" charset="-120"/>
                         </a:rPr>
                         <a:t>ProtectedError</a:t>
                       </a:r>
@@ -13189,13 +13190,13 @@
                         <a:buNone/>
                       </a:pPr>
                       <a:r>
-                        <a:rPr lang="en-US" sz="1300" dirty="0">
+                        <a:rPr lang="en-US" sz="1150" dirty="0">
                           <a:solidFill>
                             <a:srgbClr val="00397B"/>
                           </a:solidFill>
-                          <a:latin typeface="Consolas" pitchFamily="34" charset="0"/>
-                          <a:ea typeface="Consolas" pitchFamily="34" charset="-122"/>
-                          <a:cs typeface="Consolas" pitchFamily="34" charset="-120"/>
+                          <a:latin typeface="Courier New" pitchFamily="49" charset="0"/>
+                          <a:ea typeface="Courier New" pitchFamily="49" charset="-122"/>
+                          <a:cs typeface="Courier New" pitchFamily="49" charset="-120"/>
                         </a:rPr>
                         <a:t>inscricao_lista</a:t>
                       </a:r>
@@ -13241,13 +13242,13 @@
                         <a:buNone/>
                       </a:pPr>
                       <a:r>
-                        <a:rPr lang="en-US" sz="1300" dirty="0">
+                        <a:rPr lang="en-US" sz="1150" dirty="0">
                           <a:solidFill>
                             <a:srgbClr val="00397B"/>
                           </a:solidFill>
-                          <a:latin typeface="Consolas" pitchFamily="34" charset="0"/>
-                          <a:ea typeface="Consolas" pitchFamily="34" charset="-122"/>
-                          <a:cs typeface="Consolas" pitchFamily="34" charset="-120"/>
+                          <a:latin typeface="Courier New" pitchFamily="49" charset="0"/>
+                          <a:ea typeface="Courier New" pitchFamily="49" charset="-122"/>
+                          <a:cs typeface="Courier New" pitchFamily="49" charset="-120"/>
                         </a:rPr>
                         <a:t>select_related("aluno", "disciplina")</a:t>
                       </a:r>
@@ -13344,13 +13345,13 @@
                         <a:buNone/>
                       </a:pPr>
                       <a:r>
-                        <a:rPr lang="en-US" sz="1300" dirty="0">
+                        <a:rPr lang="en-US" sz="1150" dirty="0">
                           <a:solidFill>
                             <a:srgbClr val="00397B"/>
                           </a:solidFill>
-                          <a:latin typeface="Consolas" pitchFamily="34" charset="0"/>
-                          <a:ea typeface="Consolas" pitchFamily="34" charset="-122"/>
-                          <a:cs typeface="Consolas" pitchFamily="34" charset="-120"/>
+                          <a:latin typeface="Courier New" pitchFamily="49" charset="0"/>
+                          <a:ea typeface="Courier New" pitchFamily="49" charset="-122"/>
+                          <a:cs typeface="Courier New" pitchFamily="49" charset="-120"/>
                         </a:rPr>
                         <a:t>inscricao_nova/editar/excluir</a:t>
                       </a:r>
@@ -13783,7 +13784,7 @@
           <a:ln/>
         </p:spPr>
         <p:txBody>
-          <a:bodyPr wrap="square" lIns="0" tIns="0" rIns="0" bIns="0" rtlCol="0" anchor="ctr"/>
+          <a:bodyPr wrap="none" lIns="0" tIns="0" rIns="0" bIns="0" rtlCol="0" anchor="ctr"/>
           <a:lstStyle/>
           <a:p>
             <a:pPr indent="0" marL="0">
@@ -13794,9 +13795,9 @@
                 <a:solidFill>
                   <a:srgbClr val="8B949E"/>
                 </a:solidFill>
-                <a:latin typeface="Consolas" pitchFamily="34" charset="0"/>
-                <a:ea typeface="Consolas" pitchFamily="34" charset="-122"/>
-                <a:cs typeface="Consolas" pitchFamily="34" charset="-120"/>
+                <a:latin typeface="Courier New" pitchFamily="49" charset="0"/>
+                <a:ea typeface="Courier New" pitchFamily="49" charset="-122"/>
+                <a:cs typeface="Courier New" pitchFamily="49" charset="-120"/>
               </a:rPr>
               <a:t>templates/academico/inscricao_lista.html</a:t>
             </a:r>
@@ -13822,7 +13823,7 @@
           <a:ln/>
         </p:spPr>
         <p:txBody>
-          <a:bodyPr wrap="square" lIns="0" tIns="0" rIns="0" bIns="0" rtlCol="0" anchor="t"/>
+          <a:bodyPr wrap="none" lIns="0" tIns="0" rIns="0" bIns="0" rtlCol="0" anchor="t"/>
           <a:lstStyle/>
           <a:p>
             <a:pPr indent="0" marL="0">
@@ -13833,9 +13834,9 @@
                 <a:solidFill>
                   <a:srgbClr val="A5D6A7"/>
                 </a:solidFill>
-                <a:latin typeface="Consolas" pitchFamily="34" charset="0"/>
-                <a:ea typeface="Consolas" pitchFamily="34" charset="-122"/>
-                <a:cs typeface="Consolas" pitchFamily="34" charset="-120"/>
+                <a:latin typeface="Courier New" pitchFamily="49" charset="0"/>
+                <a:ea typeface="Courier New" pitchFamily="49" charset="-122"/>
+                <a:cs typeface="Courier New" pitchFamily="49" charset="-120"/>
               </a:rPr>
               <a:t>{% for i in inscricoes %}</a:t>
             </a:r>
@@ -13850,9 +13851,9 @@
                 <a:solidFill>
                   <a:srgbClr val="E6EDF3"/>
                 </a:solidFill>
-                <a:latin typeface="Consolas" pitchFamily="34" charset="0"/>
-                <a:ea typeface="Consolas" pitchFamily="34" charset="-122"/>
-                <a:cs typeface="Consolas" pitchFamily="34" charset="-120"/>
+                <a:latin typeface="Courier New" pitchFamily="49" charset="0"/>
+                <a:ea typeface="Courier New" pitchFamily="49" charset="-122"/>
+                <a:cs typeface="Courier New" pitchFamily="49" charset="-120"/>
               </a:rPr>
               <a:t>  &lt;tr&gt;</a:t>
             </a:r>
@@ -13867,9 +13868,9 @@
                 <a:solidFill>
                   <a:srgbClr val="E6EDF3"/>
                 </a:solidFill>
-                <a:latin typeface="Consolas" pitchFamily="34" charset="0"/>
-                <a:ea typeface="Consolas" pitchFamily="34" charset="-122"/>
-                <a:cs typeface="Consolas" pitchFamily="34" charset="-120"/>
+                <a:latin typeface="Courier New" pitchFamily="49" charset="0"/>
+                <a:ea typeface="Courier New" pitchFamily="49" charset="-122"/>
+                <a:cs typeface="Courier New" pitchFamily="49" charset="-120"/>
               </a:rPr>
               <a:t>    &lt;td&gt;</a:t>
             </a:r>
@@ -13881,9 +13882,9 @@
                 <a:solidFill>
                   <a:srgbClr val="A5D6A7"/>
                 </a:solidFill>
-                <a:latin typeface="Consolas" pitchFamily="34" charset="0"/>
-                <a:ea typeface="Consolas" pitchFamily="34" charset="-122"/>
-                <a:cs typeface="Consolas" pitchFamily="34" charset="-120"/>
+                <a:latin typeface="Courier New" pitchFamily="49" charset="0"/>
+                <a:ea typeface="Courier New" pitchFamily="49" charset="-122"/>
+                <a:cs typeface="Courier New" pitchFamily="49" charset="-120"/>
               </a:rPr>
               <a:t>{{ i.aluno.nome }}</a:t>
             </a:r>
@@ -13895,9 +13896,9 @@
                 <a:solidFill>
                   <a:srgbClr val="E6EDF3"/>
                 </a:solidFill>
-                <a:latin typeface="Consolas" pitchFamily="34" charset="0"/>
-                <a:ea typeface="Consolas" pitchFamily="34" charset="-122"/>
-                <a:cs typeface="Consolas" pitchFamily="34" charset="-120"/>
+                <a:latin typeface="Courier New" pitchFamily="49" charset="0"/>
+                <a:ea typeface="Courier New" pitchFamily="49" charset="-122"/>
+                <a:cs typeface="Courier New" pitchFamily="49" charset="-120"/>
               </a:rPr>
               <a:t>&lt;/td&gt;</a:t>
             </a:r>
@@ -13912,9 +13913,9 @@
                 <a:solidFill>
                   <a:srgbClr val="E6EDF3"/>
                 </a:solidFill>
-                <a:latin typeface="Consolas" pitchFamily="34" charset="0"/>
-                <a:ea typeface="Consolas" pitchFamily="34" charset="-122"/>
-                <a:cs typeface="Consolas" pitchFamily="34" charset="-120"/>
+                <a:latin typeface="Courier New" pitchFamily="49" charset="0"/>
+                <a:ea typeface="Courier New" pitchFamily="49" charset="-122"/>
+                <a:cs typeface="Courier New" pitchFamily="49" charset="-120"/>
               </a:rPr>
               <a:t>    &lt;td&gt;</a:t>
             </a:r>
@@ -13926,9 +13927,9 @@
                 <a:solidFill>
                   <a:srgbClr val="A5D6A7"/>
                 </a:solidFill>
-                <a:latin typeface="Consolas" pitchFamily="34" charset="0"/>
-                <a:ea typeface="Consolas" pitchFamily="34" charset="-122"/>
-                <a:cs typeface="Consolas" pitchFamily="34" charset="-120"/>
+                <a:latin typeface="Courier New" pitchFamily="49" charset="0"/>
+                <a:ea typeface="Courier New" pitchFamily="49" charset="-122"/>
+                <a:cs typeface="Courier New" pitchFamily="49" charset="-120"/>
               </a:rPr>
               <a:t>{{ i.disciplina.nome }}</a:t>
             </a:r>
@@ -13940,9 +13941,9 @@
                 <a:solidFill>
                   <a:srgbClr val="E6EDF3"/>
                 </a:solidFill>
-                <a:latin typeface="Consolas" pitchFamily="34" charset="0"/>
-                <a:ea typeface="Consolas" pitchFamily="34" charset="-122"/>
-                <a:cs typeface="Consolas" pitchFamily="34" charset="-120"/>
+                <a:latin typeface="Courier New" pitchFamily="49" charset="0"/>
+                <a:ea typeface="Courier New" pitchFamily="49" charset="-122"/>
+                <a:cs typeface="Courier New" pitchFamily="49" charset="-120"/>
               </a:rPr>
               <a:t>&lt;/td&gt;</a:t>
             </a:r>
@@ -13957,9 +13958,9 @@
                 <a:solidFill>
                   <a:srgbClr val="E6EDF3"/>
                 </a:solidFill>
-                <a:latin typeface="Consolas" pitchFamily="34" charset="0"/>
-                <a:ea typeface="Consolas" pitchFamily="34" charset="-122"/>
-                <a:cs typeface="Consolas" pitchFamily="34" charset="-120"/>
+                <a:latin typeface="Courier New" pitchFamily="49" charset="0"/>
+                <a:ea typeface="Courier New" pitchFamily="49" charset="-122"/>
+                <a:cs typeface="Courier New" pitchFamily="49" charset="-120"/>
               </a:rPr>
               <a:t>    &lt;td&gt;</a:t>
             </a:r>
@@ -13971,9 +13972,9 @@
                 <a:solidFill>
                   <a:srgbClr val="A5D6A7"/>
                 </a:solidFill>
-                <a:latin typeface="Consolas" pitchFamily="34" charset="0"/>
-                <a:ea typeface="Consolas" pitchFamily="34" charset="-122"/>
-                <a:cs typeface="Consolas" pitchFamily="34" charset="-120"/>
+                <a:latin typeface="Courier New" pitchFamily="49" charset="0"/>
+                <a:ea typeface="Courier New" pitchFamily="49" charset="-122"/>
+                <a:cs typeface="Courier New" pitchFamily="49" charset="-120"/>
               </a:rPr>
               <a:t>{{ i.media }}</a:t>
             </a:r>
@@ -13985,9 +13986,9 @@
                 <a:solidFill>
                   <a:srgbClr val="E6EDF3"/>
                 </a:solidFill>
-                <a:latin typeface="Consolas" pitchFamily="34" charset="0"/>
-                <a:ea typeface="Consolas" pitchFamily="34" charset="-122"/>
-                <a:cs typeface="Consolas" pitchFamily="34" charset="-120"/>
+                <a:latin typeface="Courier New" pitchFamily="49" charset="0"/>
+                <a:ea typeface="Courier New" pitchFamily="49" charset="-122"/>
+                <a:cs typeface="Courier New" pitchFamily="49" charset="-120"/>
               </a:rPr>
               <a:t>&lt;/td&gt;</a:t>
             </a:r>
@@ -14002,9 +14003,9 @@
                 <a:solidFill>
                   <a:srgbClr val="E6EDF3"/>
                 </a:solidFill>
-                <a:latin typeface="Consolas" pitchFamily="34" charset="0"/>
-                <a:ea typeface="Consolas" pitchFamily="34" charset="-122"/>
-                <a:cs typeface="Consolas" pitchFamily="34" charset="-120"/>
+                <a:latin typeface="Courier New" pitchFamily="49" charset="0"/>
+                <a:ea typeface="Courier New" pitchFamily="49" charset="-122"/>
+                <a:cs typeface="Courier New" pitchFamily="49" charset="-120"/>
               </a:rPr>
               <a:t>  &lt;/tr&gt;</a:t>
             </a:r>
@@ -14019,9 +14020,9 @@
                 <a:solidFill>
                   <a:srgbClr val="A5D6A7"/>
                 </a:solidFill>
-                <a:latin typeface="Consolas" pitchFamily="34" charset="0"/>
-                <a:ea typeface="Consolas" pitchFamily="34" charset="-122"/>
-                <a:cs typeface="Consolas" pitchFamily="34" charset="-120"/>
+                <a:latin typeface="Courier New" pitchFamily="49" charset="0"/>
+                <a:ea typeface="Courier New" pitchFamily="49" charset="-122"/>
+                <a:cs typeface="Courier New" pitchFamily="49" charset="-120"/>
               </a:rPr>
               <a:t>{% endfor %}</a:t>
             </a:r>
@@ -14183,13 +14184,13 @@
               <a:buNone/>
             </a:pPr>
             <a:r>
-              <a:rPr lang="en-US" sz="1400" dirty="0">
+              <a:rPr lang="en-US" sz="1250" dirty="0">
                 <a:solidFill>
                   <a:srgbClr val="00397B"/>
                 </a:solidFill>
-                <a:latin typeface="Consolas" pitchFamily="34" charset="0"/>
-                <a:ea typeface="Consolas" pitchFamily="34" charset="-122"/>
-                <a:cs typeface="Consolas" pitchFamily="34" charset="-120"/>
+                <a:latin typeface="Courier New" pitchFamily="49" charset="0"/>
+                <a:ea typeface="Courier New" pitchFamily="49" charset="-122"/>
+                <a:cs typeface="Courier New" pitchFamily="49" charset="-120"/>
               </a:rPr>
               <a:t>Inscricao.objects.all()</a:t>
             </a:r>
@@ -14539,15 +14540,40 @@
               <a:buNone/>
             </a:pPr>
             <a:r>
+              <a:rPr lang="en-US" sz="1150" dirty="0">
+                <a:solidFill>
+                  <a:srgbClr val="00397B"/>
+                </a:solidFill>
+                <a:latin typeface="Courier New" pitchFamily="49" charset="0"/>
+                <a:ea typeface="Courier New" pitchFamily="49" charset="-122"/>
+                <a:cs typeface="Courier New" pitchFamily="49" charset="-120"/>
+              </a:rPr>
+              <a:t>list_display</a:t>
+            </a:r>
+            <a:pPr indent="0" marL="0">
+              <a:buNone/>
+            </a:pPr>
+            <a:r>
               <a:rPr lang="en-US" sz="1300" dirty="0">
                 <a:solidFill>
+                  <a:srgbClr val="3A3F44"/>
+                </a:solidFill>
+              </a:rPr>
+              <a:t>, </a:t>
+            </a:r>
+            <a:pPr indent="0" marL="0">
+              <a:buNone/>
+            </a:pPr>
+            <a:r>
+              <a:rPr lang="en-US" sz="1150" dirty="0">
+                <a:solidFill>
                   <a:srgbClr val="00397B"/>
                 </a:solidFill>
-                <a:latin typeface="Consolas" pitchFamily="34" charset="0"/>
-                <a:ea typeface="Consolas" pitchFamily="34" charset="-122"/>
-                <a:cs typeface="Consolas" pitchFamily="34" charset="-120"/>
-              </a:rPr>
-              <a:t>list_display</a:t>
+                <a:latin typeface="Courier New" pitchFamily="49" charset="0"/>
+                <a:ea typeface="Courier New" pitchFamily="49" charset="-122"/>
+                <a:cs typeface="Courier New" pitchFamily="49" charset="-120"/>
+              </a:rPr>
+              <a:t>search_fields</a:t>
             </a:r>
             <a:pPr indent="0" marL="0">
               <a:buNone/>
@@ -14558,44 +14584,19 @@
                   <a:srgbClr val="3A3F44"/>
                 </a:solidFill>
               </a:rPr>
-              <a:t>, </a:t>
-            </a:r>
-            <a:pPr indent="0" marL="0">
-              <a:buNone/>
-            </a:pPr>
-            <a:r>
-              <a:rPr lang="en-US" sz="1300" dirty="0">
+              <a:t> e </a:t>
+            </a:r>
+            <a:pPr indent="0" marL="0">
+              <a:buNone/>
+            </a:pPr>
+            <a:r>
+              <a:rPr lang="en-US" sz="1150" dirty="0">
                 <a:solidFill>
                   <a:srgbClr val="00397B"/>
                 </a:solidFill>
-                <a:latin typeface="Consolas" pitchFamily="34" charset="0"/>
-                <a:ea typeface="Consolas" pitchFamily="34" charset="-122"/>
-                <a:cs typeface="Consolas" pitchFamily="34" charset="-120"/>
-              </a:rPr>
-              <a:t>search_fields</a:t>
-            </a:r>
-            <a:pPr indent="0" marL="0">
-              <a:buNone/>
-            </a:pPr>
-            <a:r>
-              <a:rPr lang="en-US" sz="1300" dirty="0">
-                <a:solidFill>
-                  <a:srgbClr val="3A3F44"/>
-                </a:solidFill>
-              </a:rPr>
-              <a:t> e </a:t>
-            </a:r>
-            <a:pPr indent="0" marL="0">
-              <a:buNone/>
-            </a:pPr>
-            <a:r>
-              <a:rPr lang="en-US" sz="1300" dirty="0">
-                <a:solidFill>
-                  <a:srgbClr val="00397B"/>
-                </a:solidFill>
-                <a:latin typeface="Consolas" pitchFamily="34" charset="0"/>
-                <a:ea typeface="Consolas" pitchFamily="34" charset="-122"/>
-                <a:cs typeface="Consolas" pitchFamily="34" charset="-120"/>
+                <a:latin typeface="Courier New" pitchFamily="49" charset="0"/>
+                <a:ea typeface="Courier New" pitchFamily="49" charset="-122"/>
+                <a:cs typeface="Courier New" pitchFamily="49" charset="-120"/>
               </a:rPr>
               <a:t>list_select_related</a:t>
             </a:r>
@@ -14923,13 +14924,13 @@
               <a:buNone/>
             </a:pPr>
             <a:r>
-              <a:rPr lang="en-US" sz="1300" dirty="0">
+              <a:rPr lang="en-US" sz="1150" dirty="0">
                 <a:solidFill>
                   <a:srgbClr val="00397B"/>
                 </a:solidFill>
-                <a:latin typeface="Consolas" pitchFamily="34" charset="0"/>
-                <a:ea typeface="Consolas" pitchFamily="34" charset="-122"/>
-                <a:cs typeface="Consolas" pitchFamily="34" charset="-120"/>
+                <a:latin typeface="Courier New" pitchFamily="49" charset="0"/>
+                <a:ea typeface="Courier New" pitchFamily="49" charset="-122"/>
+                <a:cs typeface="Courier New" pitchFamily="49" charset="-120"/>
               </a:rPr>
               <a:t>python verificar.py</a:t>
             </a:r>
@@ -15068,7 +15069,7 @@
           <a:ln/>
         </p:spPr>
         <p:txBody>
-          <a:bodyPr wrap="square" lIns="0" tIns="0" rIns="0" bIns="0" rtlCol="0" anchor="ctr"/>
+          <a:bodyPr wrap="none" lIns="0" tIns="0" rIns="0" bIns="0" rtlCol="0" anchor="ctr"/>
           <a:lstStyle/>
           <a:p>
             <a:pPr indent="0" marL="0">
@@ -15079,9 +15080,9 @@
                 <a:solidFill>
                   <a:srgbClr val="8B949E"/>
                 </a:solidFill>
-                <a:latin typeface="Consolas" pitchFamily="34" charset="0"/>
-                <a:ea typeface="Consolas" pitchFamily="34" charset="-122"/>
-                <a:cs typeface="Consolas" pitchFamily="34" charset="-120"/>
+                <a:latin typeface="Courier New" pitchFamily="49" charset="0"/>
+                <a:ea typeface="Courier New" pitchFamily="49" charset="-122"/>
+                <a:cs typeface="Courier New" pitchFamily="49" charset="-120"/>
               </a:rPr>
               <a:t>terminal</a:t>
             </a:r>
@@ -15107,7 +15108,7 @@
           <a:ln/>
         </p:spPr>
         <p:txBody>
-          <a:bodyPr wrap="square" lIns="0" tIns="0" rIns="0" bIns="0" rtlCol="0" anchor="t"/>
+          <a:bodyPr wrap="none" lIns="0" tIns="0" rIns="0" bIns="0" rtlCol="0" anchor="t"/>
           <a:lstStyle/>
           <a:p>
             <a:pPr indent="0" marL="0">
@@ -15118,9 +15119,9 @@
                 <a:solidFill>
                   <a:srgbClr val="7DCFFF"/>
                 </a:solidFill>
-                <a:latin typeface="Consolas" pitchFamily="34" charset="0"/>
-                <a:ea typeface="Consolas" pitchFamily="34" charset="-122"/>
-                <a:cs typeface="Consolas" pitchFamily="34" charset="-120"/>
+                <a:latin typeface="Courier New" pitchFamily="49" charset="0"/>
+                <a:ea typeface="Courier New" pitchFamily="49" charset="-122"/>
+                <a:cs typeface="Courier New" pitchFamily="49" charset="-120"/>
               </a:rPr>
               <a:t>python</a:t>
             </a:r>
@@ -15132,9 +15133,9 @@
                 <a:solidFill>
                   <a:srgbClr val="E6EDF3"/>
                 </a:solidFill>
-                <a:latin typeface="Consolas" pitchFamily="34" charset="0"/>
-                <a:ea typeface="Consolas" pitchFamily="34" charset="-122"/>
-                <a:cs typeface="Consolas" pitchFamily="34" charset="-120"/>
+                <a:latin typeface="Courier New" pitchFamily="49" charset="0"/>
+                <a:ea typeface="Courier New" pitchFamily="49" charset="-122"/>
+                <a:cs typeface="Courier New" pitchFamily="49" charset="-120"/>
               </a:rPr>
               <a:t> verificar.py</a:t>
             </a:r>
@@ -15149,9 +15150,9 @@
                 <a:solidFill>
                   <a:srgbClr val="8B949E"/>
                 </a:solidFill>
-                <a:latin typeface="Consolas" pitchFamily="34" charset="0"/>
-                <a:ea typeface="Consolas" pitchFamily="34" charset="-122"/>
-                <a:cs typeface="Consolas" pitchFamily="34" charset="-120"/>
+                <a:latin typeface="Courier New" pitchFamily="49" charset="0"/>
+                <a:ea typeface="Courier New" pitchFamily="49" charset="-122"/>
+                <a:cs typeface="Courier New" pitchFamily="49" charset="-120"/>
               </a:rPr>
               <a:t># meta: 0 FALHA</a:t>
             </a:r>
@@ -15675,13 +15676,13 @@
               <a:buNone/>
             </a:pPr>
             <a:r>
-              <a:rPr lang="en-US" sz="1400" dirty="0">
+              <a:rPr lang="en-US" sz="1250" dirty="0">
                 <a:solidFill>
                   <a:srgbClr val="00397B"/>
                 </a:solidFill>
-                <a:latin typeface="Consolas" pitchFamily="34" charset="0"/>
-                <a:ea typeface="Consolas" pitchFamily="34" charset="-122"/>
-                <a:cs typeface="Consolas" pitchFamily="34" charset="-120"/>
+                <a:latin typeface="Courier New" pitchFamily="49" charset="0"/>
+                <a:ea typeface="Courier New" pitchFamily="49" charset="-122"/>
+                <a:cs typeface="Courier New" pitchFamily="49" charset="-120"/>
               </a:rPr>
               <a:t>verificar.py</a:t>
             </a:r>
@@ -15706,13 +15707,13 @@
               <a:buNone/>
             </a:pPr>
             <a:r>
-              <a:rPr lang="en-US" sz="1400" dirty="0">
+              <a:rPr lang="en-US" sz="1250" dirty="0">
                 <a:solidFill>
                   <a:srgbClr val="00397B"/>
                 </a:solidFill>
-                <a:latin typeface="Consolas" pitchFamily="34" charset="0"/>
-                <a:ea typeface="Consolas" pitchFamily="34" charset="-122"/>
-                <a:cs typeface="Consolas" pitchFamily="34" charset="-120"/>
+                <a:latin typeface="Courier New" pitchFamily="49" charset="0"/>
+                <a:ea typeface="Courier New" pitchFamily="49" charset="-122"/>
+                <a:cs typeface="Courier New" pitchFamily="49" charset="-120"/>
               </a:rPr>
               <a:t>modelo_dados.png</a:t>
             </a:r>
@@ -16005,6 +16006,1354 @@
               <a:t>arguição simulada. Tragam o projeto rodando no notebook do grupo.</a:t>
             </a:r>
             <a:endParaRPr lang="en-US" sz="1500" dirty="0"/>
+          </a:p>
+        </p:txBody>
+      </p:sp>
+    </p:spTree>
+  </p:cSld>
+  <p:clrMapOvr>
+    <a:masterClrMapping/>
+  </p:clrMapOvr>
+</p:sld>
+</file>
+
+<file path=ppt/slides/slide22.xml><?xml version="1.0" encoding="utf-8"?>
+<p:sld xmlns:a="http://schemas.openxmlformats.org/drawingml/2006/main" xmlns:r="http://schemas.openxmlformats.org/officeDocument/2006/relationships" xmlns:p="http://schemas.openxmlformats.org/presentationml/2006/main">
+  <p:cSld name="Slide 18">
+    <p:spTree>
+      <p:nvGrpSpPr>
+        <p:cNvPr id="1" name=""/>
+        <p:cNvGrpSpPr/>
+        <p:nvPr/>
+      </p:nvGrpSpPr>
+      <p:grpSpPr>
+        <a:xfrm>
+          <a:off x="0" y="0"/>
+          <a:ext cx="0" cy="0"/>
+          <a:chOff x="0" y="0"/>
+          <a:chExt cx="0" cy="0"/>
+        </a:xfrm>
+      </p:grpSpPr>
+      <p:sp>
+        <p:nvSpPr>
+          <p:cNvPr id="2" name="Text 5"/>
+          <p:cNvSpPr/>
+          <p:nvPr>
+            <p:ph idx="105" type="title" hasCustomPrompt="1"/>
+          </p:nvPr>
+        </p:nvSpPr>
+        <p:spPr>
+          <a:xfrm>
+            <a:off x="786384" y="329184"/>
+            <a:ext cx="7589520" cy="603504"/>
+          </a:xfrm>
+          <a:prstGeom prst="rect">
+            <a:avLst/>
+          </a:prstGeom>
+          <a:noFill/>
+          <a:ln/>
+        </p:spPr>
+        <p:txBody>
+          <a:bodyPr wrap="square" lIns="0" tIns="0" rIns="0" bIns="0" rtlCol="0" anchor="ctr"/>
+          <a:lstStyle/>
+          <a:p>
+            <a:pPr algn="l" indent="0" marL="0">
+              <a:buNone/>
+            </a:pPr>
+            <a:r>
+              <a:rPr lang="en-US" sz="3200" dirty="0">
+                <a:solidFill>
+                  <a:schemeClr val="tx2"/>
+                </a:solidFill>
+              </a:rPr>
+              <a:t>Gabarito: meça o N+1</a:t>
+            </a:r>
+            <a:endParaRPr lang="en-US" sz="3200" dirty="0"/>
+          </a:p>
+        </p:txBody>
+      </p:sp>
+      <p:sp>
+        <p:nvSpPr>
+          <p:cNvPr id="4" name="Shape 1"/>
+          <p:cNvSpPr/>
+          <p:nvPr/>
+        </p:nvSpPr>
+        <p:spPr>
+          <a:xfrm>
+            <a:off x="6784848" y="512064"/>
+            <a:ext cx="1591056" cy="274320"/>
+          </a:xfrm>
+          <a:prstGeom prst="roundRect">
+            <a:avLst>
+              <a:gd name="adj" fmla="val 50000"/>
+            </a:avLst>
+          </a:prstGeom>
+          <a:solidFill>
+            <a:srgbClr val="1185AA"/>
+          </a:solidFill>
+          <a:ln w="12700">
+            <a:solidFill>
+              <a:srgbClr val="1185AA"/>
+            </a:solidFill>
+            <a:prstDash val="solid"/>
+          </a:ln>
+        </p:spPr>
+      </p:sp>
+      <p:sp>
+        <p:nvSpPr>
+          <p:cNvPr id="5" name="Text 2"/>
+          <p:cNvSpPr txBox="1"/>
+          <p:nvPr/>
+        </p:nvSpPr>
+        <p:spPr>
+          <a:xfrm>
+            <a:off x="6784848" y="512064"/>
+            <a:ext cx="1591056" cy="274320"/>
+          </a:xfrm>
+          <a:prstGeom prst="rect">
+            <a:avLst/>
+          </a:prstGeom>
+          <a:noFill/>
+          <a:ln/>
+        </p:spPr>
+        <p:txBody>
+          <a:bodyPr wrap="square" lIns="0" tIns="0" rIns="0" bIns="0" rtlCol="0" anchor="ctr"/>
+          <a:lstStyle/>
+          <a:p>
+            <a:pPr algn="ctr" indent="0" marL="0">
+              <a:buNone/>
+            </a:pPr>
+            <a:r>
+              <a:rPr lang="en-US" sz="1100" b="1" dirty="0">
+                <a:solidFill>
+                  <a:srgbClr val="FFFFFF"/>
+                </a:solidFill>
+              </a:rPr>
+              <a:t>respostas da prática 1</a:t>
+            </a:r>
+            <a:endParaRPr lang="en-US" sz="1100" dirty="0"/>
+          </a:p>
+        </p:txBody>
+      </p:sp>
+      <p:sp>
+        <p:nvSpPr>
+          <p:cNvPr id="9001" name="numero grande"/>
+          <p:cNvSpPr/>
+          <p:nvPr/>
+        </p:nvSpPr>
+        <p:spPr>
+          <a:xfrm>
+            <a:off x="768096" y="1097280"/>
+            <a:ext cx="2414016" cy="1234440"/>
+          </a:xfrm>
+          <a:prstGeom prst="roundRect">
+            <a:avLst>
+              <a:gd name="adj" fmla="val 6000"/>
+            </a:avLst>
+          </a:prstGeom>
+          <a:solidFill>
+            <a:srgbClr val="E3EFF1"/>
+          </a:solidFill>
+          <a:ln>
+            <a:noFill/>
+          </a:ln>
+        </p:spPr>
+        <p:txBody>
+          <a:bodyPr rtlCol="0" anchor="ctr"/>
+          <a:lstStyle/>
+          <a:p>
+            <a:endParaRPr lang="pt-BR"/>
+          </a:p>
+        </p:txBody>
+      </p:sp>
+      <p:sp>
+        <p:nvSpPr>
+          <p:cNvPr id="9002" name="texto"/>
+          <p:cNvSpPr txBox="1"/>
+          <p:nvPr/>
+        </p:nvSpPr>
+        <p:spPr>
+          <a:xfrm>
+            <a:off x="950976" y="1170432"/>
+            <a:ext cx="2048256" cy="566928"/>
+          </a:xfrm>
+          <a:prstGeom prst="rect">
+            <a:avLst/>
+          </a:prstGeom>
+          <a:noFill/>
+        </p:spPr>
+        <p:txBody>
+          <a:bodyPr wrap="square" lIns="0" tIns="0" rIns="0" bIns="0" rtlCol="0" anchor="ctr">
+            <a:noAutofit/>
+          </a:bodyPr>
+          <a:lstStyle/>
+          <a:p>
+            <a:pPr marL="0" indent="0">
+              <a:buNone/>
+            </a:pPr>
+            <a:r>
+              <a:rPr lang="pt-BR" sz="3600" b="1" dirty="0">
+                <a:solidFill>
+                  <a:srgbClr val="1185AA"/>
+                </a:solidFill>
+              </a:rPr>
+              <a:t>12</a:t>
+            </a:r>
+            <a:endParaRPr lang="pt-BR" sz="3600" dirty="0"/>
+          </a:p>
+        </p:txBody>
+      </p:sp>
+      <p:sp>
+        <p:nvSpPr>
+          <p:cNvPr id="9003" name="texto"/>
+          <p:cNvSpPr txBox="1"/>
+          <p:nvPr/>
+        </p:nvSpPr>
+        <p:spPr>
+          <a:xfrm>
+            <a:off x="950976" y="1737360"/>
+            <a:ext cx="2048256" cy="502920"/>
+          </a:xfrm>
+          <a:prstGeom prst="rect">
+            <a:avLst/>
+          </a:prstGeom>
+          <a:noFill/>
+        </p:spPr>
+        <p:txBody>
+          <a:bodyPr wrap="square" lIns="0" tIns="0" rIns="0" bIns="0" rtlCol="0" anchor="t">
+            <a:noAutofit/>
+          </a:bodyPr>
+          <a:lstStyle/>
+          <a:p>
+            <a:pPr marL="0" indent="0">
+              <a:buNone/>
+            </a:pPr>
+            <a:r>
+              <a:rPr lang="pt-BR" sz="1150" dirty="0">
+                <a:solidFill>
+                  <a:srgbClr val="3A3F44"/>
+                </a:solidFill>
+              </a:rPr>
+              <a:t xml:space="preserve">inscrições no banco (N), criadas pelo </a:t>
+            </a:r>
+            <a:r>
+              <a:rPr lang="pt-BR" sz="1000" dirty="0">
+                <a:solidFill>
+                  <a:srgbClr val="00397B"/>
+                </a:solidFill>
+                <a:latin typeface="Courier New" pitchFamily="49" charset="0"/>
+                <a:ea typeface="Courier New" pitchFamily="49" charset="0"/>
+                <a:cs typeface="Courier New" pitchFamily="49" charset="0"/>
+              </a:rPr>
+              <a:t>seed_demo</a:t>
+            </a:r>
+            <a:endParaRPr lang="pt-BR" sz="1150" dirty="0"/>
+          </a:p>
+        </p:txBody>
+      </p:sp>
+      <p:sp>
+        <p:nvSpPr>
+          <p:cNvPr id="9004" name="numero grande"/>
+          <p:cNvSpPr/>
+          <p:nvPr/>
+        </p:nvSpPr>
+        <p:spPr>
+          <a:xfrm>
+            <a:off x="3364992" y="1097280"/>
+            <a:ext cx="2414016" cy="1234440"/>
+          </a:xfrm>
+          <a:prstGeom prst="roundRect">
+            <a:avLst>
+              <a:gd name="adj" fmla="val 6000"/>
+            </a:avLst>
+          </a:prstGeom>
+          <a:solidFill>
+            <a:srgbClr val="E3EFF1"/>
+          </a:solidFill>
+          <a:ln>
+            <a:noFill/>
+          </a:ln>
+        </p:spPr>
+        <p:txBody>
+          <a:bodyPr rtlCol="0" anchor="ctr"/>
+          <a:lstStyle/>
+          <a:p>
+            <a:endParaRPr lang="pt-BR"/>
+          </a:p>
+        </p:txBody>
+      </p:sp>
+      <p:sp>
+        <p:nvSpPr>
+          <p:cNvPr id="9005" name="texto"/>
+          <p:cNvSpPr txBox="1"/>
+          <p:nvPr/>
+        </p:nvSpPr>
+        <p:spPr>
+          <a:xfrm>
+            <a:off x="3547872" y="1170432"/>
+            <a:ext cx="2048256" cy="566928"/>
+          </a:xfrm>
+          <a:prstGeom prst="rect">
+            <a:avLst/>
+          </a:prstGeom>
+          <a:noFill/>
+        </p:spPr>
+        <p:txBody>
+          <a:bodyPr wrap="square" lIns="0" tIns="0" rIns="0" bIns="0" rtlCol="0" anchor="ctr">
+            <a:noAutofit/>
+          </a:bodyPr>
+          <a:lstStyle/>
+          <a:p>
+            <a:pPr marL="0" indent="0">
+              <a:buNone/>
+            </a:pPr>
+            <a:r>
+              <a:rPr lang="pt-BR" sz="3600" b="1" dirty="0">
+                <a:solidFill>
+                  <a:srgbClr val="C8641A"/>
+                </a:solidFill>
+              </a:rPr>
+              <a:t>25</a:t>
+            </a:r>
+            <a:endParaRPr lang="pt-BR" sz="3600" dirty="0"/>
+          </a:p>
+        </p:txBody>
+      </p:sp>
+      <p:sp>
+        <p:nvSpPr>
+          <p:cNvPr id="9006" name="texto"/>
+          <p:cNvSpPr txBox="1"/>
+          <p:nvPr/>
+        </p:nvSpPr>
+        <p:spPr>
+          <a:xfrm>
+            <a:off x="3547872" y="1737360"/>
+            <a:ext cx="2048256" cy="502920"/>
+          </a:xfrm>
+          <a:prstGeom prst="rect">
+            <a:avLst/>
+          </a:prstGeom>
+          <a:noFill/>
+        </p:spPr>
+        <p:txBody>
+          <a:bodyPr wrap="square" lIns="0" tIns="0" rIns="0" bIns="0" rtlCol="0" anchor="t">
+            <a:noAutofit/>
+          </a:bodyPr>
+          <a:lstStyle/>
+          <a:p>
+            <a:pPr marL="0" indent="0">
+              <a:buNone/>
+            </a:pPr>
+            <a:r>
+              <a:rPr lang="pt-BR" sz="1150" dirty="0">
+                <a:solidFill>
+                  <a:srgbClr val="3A3F44"/>
+                </a:solidFill>
+              </a:rPr>
+              <a:t xml:space="preserve">consultas sem </a:t>
+            </a:r>
+            <a:r>
+              <a:rPr lang="pt-BR" sz="1000" dirty="0">
+                <a:solidFill>
+                  <a:srgbClr val="00397B"/>
+                </a:solidFill>
+                <a:latin typeface="Courier New" pitchFamily="49" charset="0"/>
+                <a:ea typeface="Courier New" pitchFamily="49" charset="0"/>
+                <a:cs typeface="Courier New" pitchFamily="49" charset="0"/>
+              </a:rPr>
+              <a:t>select_related</a:t>
+            </a:r>
+            <a:r>
+              <a:rPr lang="pt-BR" sz="1150" dirty="0">
+                <a:solidFill>
+                  <a:srgbClr val="3A3F44"/>
+                </a:solidFill>
+              </a:rPr>
+              <a:t>: 1 + 2 × 12</a:t>
+            </a:r>
+            <a:endParaRPr lang="pt-BR" sz="1150" dirty="0"/>
+          </a:p>
+        </p:txBody>
+      </p:sp>
+      <p:sp>
+        <p:nvSpPr>
+          <p:cNvPr id="9007" name="numero grande"/>
+          <p:cNvSpPr/>
+          <p:nvPr/>
+        </p:nvSpPr>
+        <p:spPr>
+          <a:xfrm>
+            <a:off x="5961888" y="1097280"/>
+            <a:ext cx="2414016" cy="1234440"/>
+          </a:xfrm>
+          <a:prstGeom prst="roundRect">
+            <a:avLst>
+              <a:gd name="adj" fmla="val 6000"/>
+            </a:avLst>
+          </a:prstGeom>
+          <a:solidFill>
+            <a:srgbClr val="E3EFF1"/>
+          </a:solidFill>
+          <a:ln>
+            <a:noFill/>
+          </a:ln>
+        </p:spPr>
+        <p:txBody>
+          <a:bodyPr rtlCol="0" anchor="ctr"/>
+          <a:lstStyle/>
+          <a:p>
+            <a:endParaRPr lang="pt-BR"/>
+          </a:p>
+        </p:txBody>
+      </p:sp>
+      <p:sp>
+        <p:nvSpPr>
+          <p:cNvPr id="9008" name="texto"/>
+          <p:cNvSpPr txBox="1"/>
+          <p:nvPr/>
+        </p:nvSpPr>
+        <p:spPr>
+          <a:xfrm>
+            <a:off x="6144768" y="1170432"/>
+            <a:ext cx="2048256" cy="566928"/>
+          </a:xfrm>
+          <a:prstGeom prst="rect">
+            <a:avLst/>
+          </a:prstGeom>
+          <a:noFill/>
+        </p:spPr>
+        <p:txBody>
+          <a:bodyPr wrap="square" lIns="0" tIns="0" rIns="0" bIns="0" rtlCol="0" anchor="ctr">
+            <a:noAutofit/>
+          </a:bodyPr>
+          <a:lstStyle/>
+          <a:p>
+            <a:pPr marL="0" indent="0">
+              <a:buNone/>
+            </a:pPr>
+            <a:r>
+              <a:rPr lang="pt-BR" sz="3600" b="1" dirty="0">
+                <a:solidFill>
+                  <a:srgbClr val="1185AA"/>
+                </a:solidFill>
+              </a:rPr>
+              <a:t>1</a:t>
+            </a:r>
+            <a:endParaRPr lang="pt-BR" sz="3600" dirty="0"/>
+          </a:p>
+        </p:txBody>
+      </p:sp>
+      <p:sp>
+        <p:nvSpPr>
+          <p:cNvPr id="9009" name="texto"/>
+          <p:cNvSpPr txBox="1"/>
+          <p:nvPr/>
+        </p:nvSpPr>
+        <p:spPr>
+          <a:xfrm>
+            <a:off x="6144768" y="1737360"/>
+            <a:ext cx="2048256" cy="502920"/>
+          </a:xfrm>
+          <a:prstGeom prst="rect">
+            <a:avLst/>
+          </a:prstGeom>
+          <a:noFill/>
+        </p:spPr>
+        <p:txBody>
+          <a:bodyPr wrap="square" lIns="0" tIns="0" rIns="0" bIns="0" rtlCol="0" anchor="t">
+            <a:noAutofit/>
+          </a:bodyPr>
+          <a:lstStyle/>
+          <a:p>
+            <a:pPr marL="0" indent="0">
+              <a:buNone/>
+            </a:pPr>
+            <a:r>
+              <a:rPr lang="pt-BR" sz="1150" dirty="0">
+                <a:solidFill>
+                  <a:srgbClr val="3A3F44"/>
+                </a:solidFill>
+              </a:rPr>
+              <a:t xml:space="preserve">consulta com </a:t>
+            </a:r>
+            <a:r>
+              <a:rPr lang="pt-BR" sz="1000" dirty="0">
+                <a:solidFill>
+                  <a:srgbClr val="00397B"/>
+                </a:solidFill>
+                <a:latin typeface="Courier New" pitchFamily="49" charset="0"/>
+                <a:ea typeface="Courier New" pitchFamily="49" charset="0"/>
+                <a:cs typeface="Courier New" pitchFamily="49" charset="0"/>
+              </a:rPr>
+              <a:t>select_related</a:t>
+            </a:r>
+            <a:r>
+              <a:rPr lang="pt-BR" sz="1150" dirty="0">
+                <a:solidFill>
+                  <a:srgbClr val="3A3F44"/>
+                </a:solidFill>
+              </a:rPr>
+              <a:t>: um JOIN traz tudo</a:t>
+            </a:r>
+            <a:endParaRPr lang="pt-BR" sz="1150" dirty="0"/>
+          </a:p>
+        </p:txBody>
+      </p:sp>
+      <p:sp>
+        <p:nvSpPr>
+          <p:cNvPr id="9010" name="codigo fundo"/>
+          <p:cNvSpPr/>
+          <p:nvPr/>
+        </p:nvSpPr>
+        <p:spPr>
+          <a:xfrm>
+            <a:off x="768096" y="2514600"/>
+            <a:ext cx="7607808" cy="1188720"/>
+          </a:xfrm>
+          <a:prstGeom prst="roundRect">
+            <a:avLst>
+              <a:gd name="adj" fmla="val 4651"/>
+            </a:avLst>
+          </a:prstGeom>
+          <a:solidFill>
+            <a:srgbClr val="1E2433"/>
+          </a:solidFill>
+          <a:ln>
+            <a:noFill/>
+          </a:ln>
+        </p:spPr>
+        <p:txBody>
+          <a:bodyPr rtlCol="0" anchor="ctr"/>
+          <a:lstStyle/>
+          <a:p>
+            <a:endParaRPr lang="pt-BR"/>
+          </a:p>
+        </p:txBody>
+      </p:sp>
+      <p:sp>
+        <p:nvSpPr>
+          <p:cNvPr id="9011" name="forma"/>
+          <p:cNvSpPr/>
+          <p:nvPr/>
+        </p:nvSpPr>
+        <p:spPr>
+          <a:xfrm>
+            <a:off x="932688" y="2633472"/>
+            <a:ext cx="91440" cy="91440"/>
+          </a:xfrm>
+          <a:prstGeom prst="ellipse">
+            <a:avLst/>
+          </a:prstGeom>
+          <a:solidFill>
+            <a:srgbClr val="FF5F57"/>
+          </a:solidFill>
+          <a:ln>
+            <a:noFill/>
+          </a:ln>
+        </p:spPr>
+        <p:txBody>
+          <a:bodyPr rtlCol="0" anchor="ctr"/>
+          <a:lstStyle/>
+          <a:p>
+            <a:endParaRPr lang="pt-BR"/>
+          </a:p>
+        </p:txBody>
+      </p:sp>
+      <p:sp>
+        <p:nvSpPr>
+          <p:cNvPr id="9012" name="forma"/>
+          <p:cNvSpPr/>
+          <p:nvPr/>
+        </p:nvSpPr>
+        <p:spPr>
+          <a:xfrm>
+            <a:off x="1078992" y="2633472"/>
+            <a:ext cx="91440" cy="91440"/>
+          </a:xfrm>
+          <a:prstGeom prst="ellipse">
+            <a:avLst/>
+          </a:prstGeom>
+          <a:solidFill>
+            <a:srgbClr val="FEBC2E"/>
+          </a:solidFill>
+          <a:ln>
+            <a:noFill/>
+          </a:ln>
+        </p:spPr>
+        <p:txBody>
+          <a:bodyPr rtlCol="0" anchor="ctr"/>
+          <a:lstStyle/>
+          <a:p>
+            <a:endParaRPr lang="pt-BR"/>
+          </a:p>
+        </p:txBody>
+      </p:sp>
+      <p:sp>
+        <p:nvSpPr>
+          <p:cNvPr id="9013" name="forma"/>
+          <p:cNvSpPr/>
+          <p:nvPr/>
+        </p:nvSpPr>
+        <p:spPr>
+          <a:xfrm>
+            <a:off x="1225296" y="2633472"/>
+            <a:ext cx="91440" cy="91440"/>
+          </a:xfrm>
+          <a:prstGeom prst="ellipse">
+            <a:avLst/>
+          </a:prstGeom>
+          <a:solidFill>
+            <a:srgbClr val="28C840"/>
+          </a:solidFill>
+          <a:ln>
+            <a:noFill/>
+          </a:ln>
+        </p:spPr>
+        <p:txBody>
+          <a:bodyPr rtlCol="0" anchor="ctr"/>
+          <a:lstStyle/>
+          <a:p>
+            <a:endParaRPr lang="pt-BR"/>
+          </a:p>
+        </p:txBody>
+      </p:sp>
+      <p:sp>
+        <p:nvSpPr>
+          <p:cNvPr id="9014" name="codigo rotulo"/>
+          <p:cNvSpPr txBox="1"/>
+          <p:nvPr/>
+        </p:nvSpPr>
+        <p:spPr>
+          <a:xfrm>
+            <a:off x="1426464" y="2569464"/>
+            <a:ext cx="6784848" cy="219456"/>
+          </a:xfrm>
+          <a:prstGeom prst="rect">
+            <a:avLst/>
+          </a:prstGeom>
+          <a:noFill/>
+        </p:spPr>
+        <p:txBody>
+          <a:bodyPr wrap="square" lIns="0" tIns="0" rIns="0" bIns="0" rtlCol="0" anchor="ctr">
+            <a:noAutofit/>
+          </a:bodyPr>
+          <a:lstStyle/>
+          <a:p>
+            <a:pPr marL="0" indent="0">
+              <a:buNone/>
+            </a:pPr>
+            <a:r>
+              <a:rPr lang="pt-BR" sz="900" dirty="0">
+                <a:solidFill>
+                  <a:srgbClr val="8B949E"/>
+                </a:solidFill>
+                <a:latin typeface="Courier New" pitchFamily="49" charset="0"/>
+                <a:ea typeface="Courier New" pitchFamily="49" charset="0"/>
+                <a:cs typeface="Courier New" pitchFamily="49" charset="0"/>
+              </a:rPr>
+              <a:t>print(qs.query) · com select_related, resumido</a:t>
+            </a:r>
+            <a:endParaRPr lang="pt-BR" sz="900" dirty="0"/>
+          </a:p>
+        </p:txBody>
+      </p:sp>
+      <p:sp>
+        <p:nvSpPr>
+          <p:cNvPr id="9015" name="codigo texto"/>
+          <p:cNvSpPr txBox="1"/>
+          <p:nvPr/>
+        </p:nvSpPr>
+        <p:spPr>
+          <a:xfrm>
+            <a:off x="987552" y="2898648"/>
+            <a:ext cx="7242048" cy="731520"/>
+          </a:xfrm>
+          <a:prstGeom prst="rect">
+            <a:avLst/>
+          </a:prstGeom>
+          <a:noFill/>
+        </p:spPr>
+        <p:txBody>
+          <a:bodyPr wrap="none" lIns="0" tIns="0" rIns="0" bIns="0" rtlCol="0" anchor="t">
+            <a:noAutofit/>
+          </a:bodyPr>
+          <a:lstStyle/>
+          <a:p>
+            <a:pPr marL="0" indent="0">
+              <a:buNone/>
+            </a:pPr>
+            <a:r>
+              <a:rPr lang="pt-BR" sz="1000" dirty="0">
+                <a:solidFill>
+                  <a:srgbClr val="7DCFFF"/>
+                </a:solidFill>
+                <a:latin typeface="Courier New" pitchFamily="49" charset="0"/>
+                <a:ea typeface="Courier New" pitchFamily="49" charset="0"/>
+                <a:cs typeface="Courier New" pitchFamily="49" charset="0"/>
+              </a:rPr>
+              <a:t>SELECT</a:t>
+            </a:r>
+            <a:r>
+              <a:rPr lang="pt-BR" sz="1000" dirty="0">
+                <a:solidFill>
+                  <a:srgbClr val="E6EDF3"/>
+                </a:solidFill>
+                <a:latin typeface="Courier New" pitchFamily="49" charset="0"/>
+                <a:ea typeface="Courier New" pitchFamily="49" charset="0"/>
+                <a:cs typeface="Courier New" pitchFamily="49" charset="0"/>
+              </a:rPr>
+              <a:t xml:space="preserve"> </a:t>
+            </a:r>
+            <a:r>
+              <a:rPr lang="pt-BR" sz="1000" dirty="0">
+                <a:solidFill>
+                  <a:srgbClr val="F0C674"/>
+                </a:solidFill>
+                <a:latin typeface="Courier New" pitchFamily="49" charset="0"/>
+                <a:ea typeface="Courier New" pitchFamily="49" charset="0"/>
+                <a:cs typeface="Courier New" pitchFamily="49" charset="0"/>
+              </a:rPr>
+              <a:t>"inscricao"</a:t>
+            </a:r>
+            <a:r>
+              <a:rPr lang="pt-BR" sz="1000" dirty="0">
+                <a:solidFill>
+                  <a:srgbClr val="E6EDF3"/>
+                </a:solidFill>
+                <a:latin typeface="Courier New" pitchFamily="49" charset="0"/>
+                <a:ea typeface="Courier New" pitchFamily="49" charset="0"/>
+                <a:cs typeface="Courier New" pitchFamily="49" charset="0"/>
+              </a:rPr>
+              <a:t>.</a:t>
+            </a:r>
+            <a:r>
+              <a:rPr lang="pt-BR" sz="1000" dirty="0">
+                <a:solidFill>
+                  <a:srgbClr val="F0C674"/>
+                </a:solidFill>
+                <a:latin typeface="Courier New" pitchFamily="49" charset="0"/>
+                <a:ea typeface="Courier New" pitchFamily="49" charset="0"/>
+                <a:cs typeface="Courier New" pitchFamily="49" charset="0"/>
+              </a:rPr>
+              <a:t>"id"</a:t>
+            </a:r>
+            <a:r>
+              <a:rPr lang="pt-BR" sz="1000" dirty="0">
+                <a:solidFill>
+                  <a:srgbClr val="E6EDF3"/>
+                </a:solidFill>
+                <a:latin typeface="Courier New" pitchFamily="49" charset="0"/>
+                <a:ea typeface="Courier New" pitchFamily="49" charset="0"/>
+                <a:cs typeface="Courier New" pitchFamily="49" charset="0"/>
+              </a:rPr>
+              <a:t xml:space="preserve">, ..., </a:t>
+            </a:r>
+            <a:r>
+              <a:rPr lang="pt-BR" sz="1000" dirty="0">
+                <a:solidFill>
+                  <a:srgbClr val="F0C674"/>
+                </a:solidFill>
+                <a:latin typeface="Courier New" pitchFamily="49" charset="0"/>
+                <a:ea typeface="Courier New" pitchFamily="49" charset="0"/>
+                <a:cs typeface="Courier New" pitchFamily="49" charset="0"/>
+              </a:rPr>
+              <a:t>"aluno"</a:t>
+            </a:r>
+            <a:r>
+              <a:rPr lang="pt-BR" sz="1000" dirty="0">
+                <a:solidFill>
+                  <a:srgbClr val="E6EDF3"/>
+                </a:solidFill>
+                <a:latin typeface="Courier New" pitchFamily="49" charset="0"/>
+                <a:ea typeface="Courier New" pitchFamily="49" charset="0"/>
+                <a:cs typeface="Courier New" pitchFamily="49" charset="0"/>
+              </a:rPr>
+              <a:t>.</a:t>
+            </a:r>
+            <a:r>
+              <a:rPr lang="pt-BR" sz="1000" dirty="0">
+                <a:solidFill>
+                  <a:srgbClr val="F0C674"/>
+                </a:solidFill>
+                <a:latin typeface="Courier New" pitchFamily="49" charset="0"/>
+                <a:ea typeface="Courier New" pitchFamily="49" charset="0"/>
+                <a:cs typeface="Courier New" pitchFamily="49" charset="0"/>
+              </a:rPr>
+              <a:t>"nome"</a:t>
+            </a:r>
+            <a:r>
+              <a:rPr lang="pt-BR" sz="1000" dirty="0">
+                <a:solidFill>
+                  <a:srgbClr val="E6EDF3"/>
+                </a:solidFill>
+                <a:latin typeface="Courier New" pitchFamily="49" charset="0"/>
+                <a:ea typeface="Courier New" pitchFamily="49" charset="0"/>
+                <a:cs typeface="Courier New" pitchFamily="49" charset="0"/>
+              </a:rPr>
+              <a:t xml:space="preserve">, ..., </a:t>
+            </a:r>
+            <a:r>
+              <a:rPr lang="pt-BR" sz="1000" dirty="0">
+                <a:solidFill>
+                  <a:srgbClr val="F0C674"/>
+                </a:solidFill>
+                <a:latin typeface="Courier New" pitchFamily="49" charset="0"/>
+                <a:ea typeface="Courier New" pitchFamily="49" charset="0"/>
+                <a:cs typeface="Courier New" pitchFamily="49" charset="0"/>
+              </a:rPr>
+              <a:t>"disciplina"</a:t>
+            </a:r>
+            <a:r>
+              <a:rPr lang="pt-BR" sz="1000" dirty="0">
+                <a:solidFill>
+                  <a:srgbClr val="E6EDF3"/>
+                </a:solidFill>
+                <a:latin typeface="Courier New" pitchFamily="49" charset="0"/>
+                <a:ea typeface="Courier New" pitchFamily="49" charset="0"/>
+                <a:cs typeface="Courier New" pitchFamily="49" charset="0"/>
+              </a:rPr>
+              <a:t>.</a:t>
+            </a:r>
+            <a:r>
+              <a:rPr lang="pt-BR" sz="1000" dirty="0">
+                <a:solidFill>
+                  <a:srgbClr val="F0C674"/>
+                </a:solidFill>
+                <a:latin typeface="Courier New" pitchFamily="49" charset="0"/>
+                <a:ea typeface="Courier New" pitchFamily="49" charset="0"/>
+                <a:cs typeface="Courier New" pitchFamily="49" charset="0"/>
+              </a:rPr>
+              <a:t>"nome"</a:t>
+            </a:r>
+            <a:r>
+              <a:rPr lang="pt-BR" sz="1000" dirty="0">
+                <a:solidFill>
+                  <a:srgbClr val="E6EDF3"/>
+                </a:solidFill>
+                <a:latin typeface="Courier New" pitchFamily="49" charset="0"/>
+                <a:ea typeface="Courier New" pitchFamily="49" charset="0"/>
+                <a:cs typeface="Courier New" pitchFamily="49" charset="0"/>
+              </a:rPr>
+              <a:t>, ...</a:t>
+            </a:r>
+            <a:endParaRPr lang="pt-BR" sz="1000" dirty="0"/>
+          </a:p>
+          <a:p>
+            <a:pPr marL="0" indent="0">
+              <a:buNone/>
+            </a:pPr>
+            <a:r>
+              <a:rPr lang="pt-BR" sz="1000" dirty="0">
+                <a:solidFill>
+                  <a:srgbClr val="7DCFFF"/>
+                </a:solidFill>
+                <a:latin typeface="Courier New" pitchFamily="49" charset="0"/>
+                <a:ea typeface="Courier New" pitchFamily="49" charset="0"/>
+                <a:cs typeface="Courier New" pitchFamily="49" charset="0"/>
+              </a:rPr>
+              <a:t>FROM</a:t>
+            </a:r>
+            <a:r>
+              <a:rPr lang="pt-BR" sz="1000" dirty="0">
+                <a:solidFill>
+                  <a:srgbClr val="E6EDF3"/>
+                </a:solidFill>
+                <a:latin typeface="Courier New" pitchFamily="49" charset="0"/>
+                <a:ea typeface="Courier New" pitchFamily="49" charset="0"/>
+                <a:cs typeface="Courier New" pitchFamily="49" charset="0"/>
+              </a:rPr>
+              <a:t xml:space="preserve"> </a:t>
+            </a:r>
+            <a:r>
+              <a:rPr lang="pt-BR" sz="1000" dirty="0">
+                <a:solidFill>
+                  <a:srgbClr val="F0C674"/>
+                </a:solidFill>
+                <a:latin typeface="Courier New" pitchFamily="49" charset="0"/>
+                <a:ea typeface="Courier New" pitchFamily="49" charset="0"/>
+                <a:cs typeface="Courier New" pitchFamily="49" charset="0"/>
+              </a:rPr>
+              <a:t>"inscricao"</a:t>
+            </a:r>
+            <a:endParaRPr lang="pt-BR" sz="1000" dirty="0"/>
+          </a:p>
+          <a:p>
+            <a:pPr marL="0" indent="0">
+              <a:buNone/>
+            </a:pPr>
+            <a:r>
+              <a:rPr lang="pt-BR" sz="1000" dirty="0">
+                <a:solidFill>
+                  <a:srgbClr val="7DCFFF"/>
+                </a:solidFill>
+                <a:latin typeface="Courier New" pitchFamily="49" charset="0"/>
+                <a:ea typeface="Courier New" pitchFamily="49" charset="0"/>
+                <a:cs typeface="Courier New" pitchFamily="49" charset="0"/>
+              </a:rPr>
+              <a:t>INNER</a:t>
+            </a:r>
+            <a:r>
+              <a:rPr lang="pt-BR" sz="1000" dirty="0">
+                <a:solidFill>
+                  <a:srgbClr val="E6EDF3"/>
+                </a:solidFill>
+                <a:latin typeface="Courier New" pitchFamily="49" charset="0"/>
+                <a:ea typeface="Courier New" pitchFamily="49" charset="0"/>
+                <a:cs typeface="Courier New" pitchFamily="49" charset="0"/>
+              </a:rPr>
+              <a:t xml:space="preserve"> </a:t>
+            </a:r>
+            <a:r>
+              <a:rPr lang="pt-BR" sz="1000" dirty="0">
+                <a:solidFill>
+                  <a:srgbClr val="7DCFFF"/>
+                </a:solidFill>
+                <a:latin typeface="Courier New" pitchFamily="49" charset="0"/>
+                <a:ea typeface="Courier New" pitchFamily="49" charset="0"/>
+                <a:cs typeface="Courier New" pitchFamily="49" charset="0"/>
+              </a:rPr>
+              <a:t>JOIN</a:t>
+            </a:r>
+            <a:r>
+              <a:rPr lang="pt-BR" sz="1000" dirty="0">
+                <a:solidFill>
+                  <a:srgbClr val="E6EDF3"/>
+                </a:solidFill>
+                <a:latin typeface="Courier New" pitchFamily="49" charset="0"/>
+                <a:ea typeface="Courier New" pitchFamily="49" charset="0"/>
+                <a:cs typeface="Courier New" pitchFamily="49" charset="0"/>
+              </a:rPr>
+              <a:t xml:space="preserve"> </a:t>
+            </a:r>
+            <a:r>
+              <a:rPr lang="pt-BR" sz="1000" dirty="0">
+                <a:solidFill>
+                  <a:srgbClr val="F0C674"/>
+                </a:solidFill>
+                <a:latin typeface="Courier New" pitchFamily="49" charset="0"/>
+                <a:ea typeface="Courier New" pitchFamily="49" charset="0"/>
+                <a:cs typeface="Courier New" pitchFamily="49" charset="0"/>
+              </a:rPr>
+              <a:t>"aluno"</a:t>
+            </a:r>
+            <a:r>
+              <a:rPr lang="pt-BR" sz="1000" dirty="0">
+                <a:solidFill>
+                  <a:srgbClr val="E6EDF3"/>
+                </a:solidFill>
+                <a:latin typeface="Courier New" pitchFamily="49" charset="0"/>
+                <a:ea typeface="Courier New" pitchFamily="49" charset="0"/>
+                <a:cs typeface="Courier New" pitchFamily="49" charset="0"/>
+              </a:rPr>
+              <a:t xml:space="preserve"> </a:t>
+            </a:r>
+            <a:r>
+              <a:rPr lang="pt-BR" sz="1000" dirty="0">
+                <a:solidFill>
+                  <a:srgbClr val="7DCFFF"/>
+                </a:solidFill>
+                <a:latin typeface="Courier New" pitchFamily="49" charset="0"/>
+                <a:ea typeface="Courier New" pitchFamily="49" charset="0"/>
+                <a:cs typeface="Courier New" pitchFamily="49" charset="0"/>
+              </a:rPr>
+              <a:t>ON</a:t>
+            </a:r>
+            <a:r>
+              <a:rPr lang="pt-BR" sz="1000" dirty="0">
+                <a:solidFill>
+                  <a:srgbClr val="E6EDF3"/>
+                </a:solidFill>
+                <a:latin typeface="Courier New" pitchFamily="49" charset="0"/>
+                <a:ea typeface="Courier New" pitchFamily="49" charset="0"/>
+                <a:cs typeface="Courier New" pitchFamily="49" charset="0"/>
+              </a:rPr>
+              <a:t xml:space="preserve"> (</a:t>
+            </a:r>
+            <a:r>
+              <a:rPr lang="pt-BR" sz="1000" dirty="0">
+                <a:solidFill>
+                  <a:srgbClr val="F0C674"/>
+                </a:solidFill>
+                <a:latin typeface="Courier New" pitchFamily="49" charset="0"/>
+                <a:ea typeface="Courier New" pitchFamily="49" charset="0"/>
+                <a:cs typeface="Courier New" pitchFamily="49" charset="0"/>
+              </a:rPr>
+              <a:t>"inscricao"</a:t>
+            </a:r>
+            <a:r>
+              <a:rPr lang="pt-BR" sz="1000" dirty="0">
+                <a:solidFill>
+                  <a:srgbClr val="E6EDF3"/>
+                </a:solidFill>
+                <a:latin typeface="Courier New" pitchFamily="49" charset="0"/>
+                <a:ea typeface="Courier New" pitchFamily="49" charset="0"/>
+                <a:cs typeface="Courier New" pitchFamily="49" charset="0"/>
+              </a:rPr>
+              <a:t>.</a:t>
+            </a:r>
+            <a:r>
+              <a:rPr lang="pt-BR" sz="1000" dirty="0">
+                <a:solidFill>
+                  <a:srgbClr val="F0C674"/>
+                </a:solidFill>
+                <a:latin typeface="Courier New" pitchFamily="49" charset="0"/>
+                <a:ea typeface="Courier New" pitchFamily="49" charset="0"/>
+                <a:cs typeface="Courier New" pitchFamily="49" charset="0"/>
+              </a:rPr>
+              <a:t>"aluno_id"</a:t>
+            </a:r>
+            <a:r>
+              <a:rPr lang="pt-BR" sz="1000" dirty="0">
+                <a:solidFill>
+                  <a:srgbClr val="E6EDF3"/>
+                </a:solidFill>
+                <a:latin typeface="Courier New" pitchFamily="49" charset="0"/>
+                <a:ea typeface="Courier New" pitchFamily="49" charset="0"/>
+                <a:cs typeface="Courier New" pitchFamily="49" charset="0"/>
+              </a:rPr>
+              <a:t xml:space="preserve"> = </a:t>
+            </a:r>
+            <a:r>
+              <a:rPr lang="pt-BR" sz="1000" dirty="0">
+                <a:solidFill>
+                  <a:srgbClr val="F0C674"/>
+                </a:solidFill>
+                <a:latin typeface="Courier New" pitchFamily="49" charset="0"/>
+                <a:ea typeface="Courier New" pitchFamily="49" charset="0"/>
+                <a:cs typeface="Courier New" pitchFamily="49" charset="0"/>
+              </a:rPr>
+              <a:t>"aluno"</a:t>
+            </a:r>
+            <a:r>
+              <a:rPr lang="pt-BR" sz="1000" dirty="0">
+                <a:solidFill>
+                  <a:srgbClr val="E6EDF3"/>
+                </a:solidFill>
+                <a:latin typeface="Courier New" pitchFamily="49" charset="0"/>
+                <a:ea typeface="Courier New" pitchFamily="49" charset="0"/>
+                <a:cs typeface="Courier New" pitchFamily="49" charset="0"/>
+              </a:rPr>
+              <a:t>.</a:t>
+            </a:r>
+            <a:r>
+              <a:rPr lang="pt-BR" sz="1000" dirty="0">
+                <a:solidFill>
+                  <a:srgbClr val="F0C674"/>
+                </a:solidFill>
+                <a:latin typeface="Courier New" pitchFamily="49" charset="0"/>
+                <a:ea typeface="Courier New" pitchFamily="49" charset="0"/>
+                <a:cs typeface="Courier New" pitchFamily="49" charset="0"/>
+              </a:rPr>
+              <a:t>"id"</a:t>
+            </a:r>
+            <a:r>
+              <a:rPr lang="pt-BR" sz="1000" dirty="0">
+                <a:solidFill>
+                  <a:srgbClr val="E6EDF3"/>
+                </a:solidFill>
+                <a:latin typeface="Courier New" pitchFamily="49" charset="0"/>
+                <a:ea typeface="Courier New" pitchFamily="49" charset="0"/>
+                <a:cs typeface="Courier New" pitchFamily="49" charset="0"/>
+              </a:rPr>
+              <a:t>)</a:t>
+            </a:r>
+            <a:endParaRPr lang="pt-BR" sz="1000" dirty="0"/>
+          </a:p>
+          <a:p>
+            <a:pPr marL="0" indent="0">
+              <a:buNone/>
+            </a:pPr>
+            <a:r>
+              <a:rPr lang="pt-BR" sz="1000" dirty="0">
+                <a:solidFill>
+                  <a:srgbClr val="7DCFFF"/>
+                </a:solidFill>
+                <a:latin typeface="Courier New" pitchFamily="49" charset="0"/>
+                <a:ea typeface="Courier New" pitchFamily="49" charset="0"/>
+                <a:cs typeface="Courier New" pitchFamily="49" charset="0"/>
+              </a:rPr>
+              <a:t>INNER</a:t>
+            </a:r>
+            <a:r>
+              <a:rPr lang="pt-BR" sz="1000" dirty="0">
+                <a:solidFill>
+                  <a:srgbClr val="E6EDF3"/>
+                </a:solidFill>
+                <a:latin typeface="Courier New" pitchFamily="49" charset="0"/>
+                <a:ea typeface="Courier New" pitchFamily="49" charset="0"/>
+                <a:cs typeface="Courier New" pitchFamily="49" charset="0"/>
+              </a:rPr>
+              <a:t xml:space="preserve"> </a:t>
+            </a:r>
+            <a:r>
+              <a:rPr lang="pt-BR" sz="1000" dirty="0">
+                <a:solidFill>
+                  <a:srgbClr val="7DCFFF"/>
+                </a:solidFill>
+                <a:latin typeface="Courier New" pitchFamily="49" charset="0"/>
+                <a:ea typeface="Courier New" pitchFamily="49" charset="0"/>
+                <a:cs typeface="Courier New" pitchFamily="49" charset="0"/>
+              </a:rPr>
+              <a:t>JOIN</a:t>
+            </a:r>
+            <a:r>
+              <a:rPr lang="pt-BR" sz="1000" dirty="0">
+                <a:solidFill>
+                  <a:srgbClr val="E6EDF3"/>
+                </a:solidFill>
+                <a:latin typeface="Courier New" pitchFamily="49" charset="0"/>
+                <a:ea typeface="Courier New" pitchFamily="49" charset="0"/>
+                <a:cs typeface="Courier New" pitchFamily="49" charset="0"/>
+              </a:rPr>
+              <a:t xml:space="preserve"> </a:t>
+            </a:r>
+            <a:r>
+              <a:rPr lang="pt-BR" sz="1000" dirty="0">
+                <a:solidFill>
+                  <a:srgbClr val="F0C674"/>
+                </a:solidFill>
+                <a:latin typeface="Courier New" pitchFamily="49" charset="0"/>
+                <a:ea typeface="Courier New" pitchFamily="49" charset="0"/>
+                <a:cs typeface="Courier New" pitchFamily="49" charset="0"/>
+              </a:rPr>
+              <a:t>"disciplina"</a:t>
+            </a:r>
+            <a:r>
+              <a:rPr lang="pt-BR" sz="1000" dirty="0">
+                <a:solidFill>
+                  <a:srgbClr val="E6EDF3"/>
+                </a:solidFill>
+                <a:latin typeface="Courier New" pitchFamily="49" charset="0"/>
+                <a:ea typeface="Courier New" pitchFamily="49" charset="0"/>
+                <a:cs typeface="Courier New" pitchFamily="49" charset="0"/>
+              </a:rPr>
+              <a:t xml:space="preserve"> </a:t>
+            </a:r>
+            <a:r>
+              <a:rPr lang="pt-BR" sz="1000" dirty="0">
+                <a:solidFill>
+                  <a:srgbClr val="7DCFFF"/>
+                </a:solidFill>
+                <a:latin typeface="Courier New" pitchFamily="49" charset="0"/>
+                <a:ea typeface="Courier New" pitchFamily="49" charset="0"/>
+                <a:cs typeface="Courier New" pitchFamily="49" charset="0"/>
+              </a:rPr>
+              <a:t>ON</a:t>
+            </a:r>
+            <a:r>
+              <a:rPr lang="pt-BR" sz="1000" dirty="0">
+                <a:solidFill>
+                  <a:srgbClr val="E6EDF3"/>
+                </a:solidFill>
+                <a:latin typeface="Courier New" pitchFamily="49" charset="0"/>
+                <a:ea typeface="Courier New" pitchFamily="49" charset="0"/>
+                <a:cs typeface="Courier New" pitchFamily="49" charset="0"/>
+              </a:rPr>
+              <a:t xml:space="preserve"> (</a:t>
+            </a:r>
+            <a:r>
+              <a:rPr lang="pt-BR" sz="1000" dirty="0">
+                <a:solidFill>
+                  <a:srgbClr val="F0C674"/>
+                </a:solidFill>
+                <a:latin typeface="Courier New" pitchFamily="49" charset="0"/>
+                <a:ea typeface="Courier New" pitchFamily="49" charset="0"/>
+                <a:cs typeface="Courier New" pitchFamily="49" charset="0"/>
+              </a:rPr>
+              <a:t>"inscricao"</a:t>
+            </a:r>
+            <a:r>
+              <a:rPr lang="pt-BR" sz="1000" dirty="0">
+                <a:solidFill>
+                  <a:srgbClr val="E6EDF3"/>
+                </a:solidFill>
+                <a:latin typeface="Courier New" pitchFamily="49" charset="0"/>
+                <a:ea typeface="Courier New" pitchFamily="49" charset="0"/>
+                <a:cs typeface="Courier New" pitchFamily="49" charset="0"/>
+              </a:rPr>
+              <a:t>.</a:t>
+            </a:r>
+            <a:r>
+              <a:rPr lang="pt-BR" sz="1000" dirty="0">
+                <a:solidFill>
+                  <a:srgbClr val="F0C674"/>
+                </a:solidFill>
+                <a:latin typeface="Courier New" pitchFamily="49" charset="0"/>
+                <a:ea typeface="Courier New" pitchFamily="49" charset="0"/>
+                <a:cs typeface="Courier New" pitchFamily="49" charset="0"/>
+              </a:rPr>
+              <a:t>"disciplina_id"</a:t>
+            </a:r>
+            <a:r>
+              <a:rPr lang="pt-BR" sz="1000" dirty="0">
+                <a:solidFill>
+                  <a:srgbClr val="E6EDF3"/>
+                </a:solidFill>
+                <a:latin typeface="Courier New" pitchFamily="49" charset="0"/>
+                <a:ea typeface="Courier New" pitchFamily="49" charset="0"/>
+                <a:cs typeface="Courier New" pitchFamily="49" charset="0"/>
+              </a:rPr>
+              <a:t xml:space="preserve"> = </a:t>
+            </a:r>
+            <a:r>
+              <a:rPr lang="pt-BR" sz="1000" dirty="0">
+                <a:solidFill>
+                  <a:srgbClr val="F0C674"/>
+                </a:solidFill>
+                <a:latin typeface="Courier New" pitchFamily="49" charset="0"/>
+                <a:ea typeface="Courier New" pitchFamily="49" charset="0"/>
+                <a:cs typeface="Courier New" pitchFamily="49" charset="0"/>
+              </a:rPr>
+              <a:t>"disciplina"</a:t>
+            </a:r>
+            <a:r>
+              <a:rPr lang="pt-BR" sz="1000" dirty="0">
+                <a:solidFill>
+                  <a:srgbClr val="E6EDF3"/>
+                </a:solidFill>
+                <a:latin typeface="Courier New" pitchFamily="49" charset="0"/>
+                <a:ea typeface="Courier New" pitchFamily="49" charset="0"/>
+                <a:cs typeface="Courier New" pitchFamily="49" charset="0"/>
+              </a:rPr>
+              <a:t>.</a:t>
+            </a:r>
+            <a:r>
+              <a:rPr lang="pt-BR" sz="1000" dirty="0">
+                <a:solidFill>
+                  <a:srgbClr val="F0C674"/>
+                </a:solidFill>
+                <a:latin typeface="Courier New" pitchFamily="49" charset="0"/>
+                <a:ea typeface="Courier New" pitchFamily="49" charset="0"/>
+                <a:cs typeface="Courier New" pitchFamily="49" charset="0"/>
+              </a:rPr>
+              <a:t>"id"</a:t>
+            </a:r>
+            <a:r>
+              <a:rPr lang="pt-BR" sz="1000" dirty="0">
+                <a:solidFill>
+                  <a:srgbClr val="E6EDF3"/>
+                </a:solidFill>
+                <a:latin typeface="Courier New" pitchFamily="49" charset="0"/>
+                <a:ea typeface="Courier New" pitchFamily="49" charset="0"/>
+                <a:cs typeface="Courier New" pitchFamily="49" charset="0"/>
+              </a:rPr>
+              <a:t>)</a:t>
+            </a:r>
+            <a:endParaRPr lang="pt-BR" sz="1000" dirty="0"/>
+          </a:p>
+        </p:txBody>
+      </p:sp>
+      <p:sp>
+        <p:nvSpPr>
+          <p:cNvPr id="9016" name="destaque"/>
+          <p:cNvSpPr/>
+          <p:nvPr/>
+        </p:nvSpPr>
+        <p:spPr>
+          <a:xfrm>
+            <a:off x="768096" y="3840480"/>
+            <a:ext cx="7607808" cy="640080"/>
+          </a:xfrm>
+          <a:prstGeom prst="roundRect">
+            <a:avLst>
+              <a:gd name="adj" fmla="val 4651"/>
+            </a:avLst>
+          </a:prstGeom>
+          <a:solidFill>
+            <a:srgbClr val="E3EFF1"/>
+          </a:solidFill>
+          <a:ln>
+            <a:noFill/>
+          </a:ln>
+        </p:spPr>
+        <p:txBody>
+          <a:bodyPr rtlCol="0" anchor="ctr"/>
+          <a:lstStyle/>
+          <a:p>
+            <a:endParaRPr lang="pt-BR"/>
+          </a:p>
+        </p:txBody>
+      </p:sp>
+      <p:sp>
+        <p:nvSpPr>
+          <p:cNvPr id="9017" name="texto"/>
+          <p:cNvSpPr txBox="1"/>
+          <p:nvPr/>
+        </p:nvSpPr>
+        <p:spPr>
+          <a:xfrm>
+            <a:off x="1042416" y="3840480"/>
+            <a:ext cx="7059168" cy="640080"/>
+          </a:xfrm>
+          <a:prstGeom prst="rect">
+            <a:avLst/>
+          </a:prstGeom>
+          <a:noFill/>
+        </p:spPr>
+        <p:txBody>
+          <a:bodyPr wrap="square" lIns="0" tIns="0" rIns="0" bIns="0" rtlCol="0" anchor="ctr">
+            <a:noAutofit/>
+          </a:bodyPr>
+          <a:lstStyle/>
+          <a:p>
+            <a:pPr marL="0" indent="0">
+              <a:buNone/>
+            </a:pPr>
+            <a:r>
+              <a:rPr lang="pt-BR" sz="1300" b="1" dirty="0">
+                <a:solidFill>
+                  <a:srgbClr val="3A3F44"/>
+                </a:solidFill>
+              </a:rPr>
+              <a:t>Deu outro número?</a:t>
+            </a:r>
+            <a:r>
+              <a:rPr lang="pt-BR" sz="1300" dirty="0">
+                <a:solidFill>
+                  <a:srgbClr val="3A3F44"/>
+                </a:solidFill>
+              </a:rPr>
+              <a:t xml:space="preserve"> Confiram </a:t>
+            </a:r>
+            <a:r>
+              <a:rPr lang="pt-BR" sz="1150" dirty="0">
+                <a:solidFill>
+                  <a:srgbClr val="00397B"/>
+                </a:solidFill>
+                <a:latin typeface="Courier New" pitchFamily="49" charset="0"/>
+                <a:ea typeface="Courier New" pitchFamily="49" charset="0"/>
+                <a:cs typeface="Courier New" pitchFamily="49" charset="0"/>
+              </a:rPr>
+              <a:t>Inscricao.objects.count()</a:t>
+            </a:r>
+            <a:r>
+              <a:rPr lang="pt-BR" sz="1300" dirty="0">
+                <a:solidFill>
+                  <a:srgbClr val="3A3F44"/>
+                </a:solidFill>
+              </a:rPr>
+              <a:t xml:space="preserve">. Sem </a:t>
+            </a:r>
+            <a:r>
+              <a:rPr lang="pt-BR" sz="1150" dirty="0">
+                <a:solidFill>
+                  <a:srgbClr val="00397B"/>
+                </a:solidFill>
+                <a:latin typeface="Courier New" pitchFamily="49" charset="0"/>
+                <a:ea typeface="Courier New" pitchFamily="49" charset="0"/>
+                <a:cs typeface="Courier New" pitchFamily="49" charset="0"/>
+              </a:rPr>
+              <a:t>select_related</a:t>
+            </a:r>
+            <a:r>
+              <a:rPr lang="pt-BR" sz="1300" dirty="0">
+                <a:solidFill>
+                  <a:srgbClr val="3A3F44"/>
+                </a:solidFill>
+              </a:rPr>
+              <a:t>, a conta é sempre 1 + 2N.</a:t>
+            </a:r>
+            <a:endParaRPr lang="pt-BR" sz="1300" dirty="0"/>
           </a:p>
         </p:txBody>
       </p:sp>
@@ -16225,13 +17574,13 @@
               <a:buNone/>
             </a:pPr>
             <a:r>
-              <a:rPr lang="en-US" sz="1400" dirty="0">
+              <a:rPr lang="en-US" sz="1250" dirty="0">
                 <a:solidFill>
                   <a:srgbClr val="00397B"/>
                 </a:solidFill>
-                <a:latin typeface="Consolas" pitchFamily="34" charset="0"/>
-                <a:ea typeface="Consolas" pitchFamily="34" charset="-122"/>
-                <a:cs typeface="Consolas" pitchFamily="34" charset="-120"/>
+                <a:latin typeface="Courier New" pitchFamily="49" charset="0"/>
+                <a:ea typeface="Courier New" pitchFamily="49" charset="-122"/>
+                <a:cs typeface="Courier New" pitchFamily="49" charset="-120"/>
               </a:rPr>
               <a:t>inscricao.aluno</a:t>
             </a:r>
@@ -16256,13 +17605,13 @@
               <a:buNone/>
             </a:pPr>
             <a:r>
-              <a:rPr lang="en-US" sz="1400" dirty="0">
+              <a:rPr lang="en-US" sz="1250" dirty="0">
                 <a:solidFill>
                   <a:srgbClr val="00397B"/>
                 </a:solidFill>
-                <a:latin typeface="Consolas" pitchFamily="34" charset="0"/>
-                <a:ea typeface="Consolas" pitchFamily="34" charset="-122"/>
-                <a:cs typeface="Consolas" pitchFamily="34" charset="-120"/>
+                <a:latin typeface="Courier New" pitchFamily="49" charset="0"/>
+                <a:ea typeface="Courier New" pitchFamily="49" charset="-122"/>
+                <a:cs typeface="Courier New" pitchFamily="49" charset="-120"/>
               </a:rPr>
               <a:t>aluno.inscricoes</a:t>
             </a:r>
@@ -16438,13 +17787,13 @@
               <a:buNone/>
             </a:pPr>
             <a:r>
-              <a:rPr lang="en-US" sz="1400" dirty="0">
+              <a:rPr lang="en-US" sz="1250" dirty="0">
                 <a:solidFill>
                   <a:srgbClr val="00397B"/>
                 </a:solidFill>
-                <a:latin typeface="Consolas" pitchFamily="34" charset="0"/>
-                <a:ea typeface="Consolas" pitchFamily="34" charset="-122"/>
-                <a:cs typeface="Consolas" pitchFamily="34" charset="-120"/>
+                <a:latin typeface="Courier New" pitchFamily="49" charset="0"/>
+                <a:ea typeface="Courier New" pitchFamily="49" charset="-122"/>
+                <a:cs typeface="Courier New" pitchFamily="49" charset="-120"/>
               </a:rPr>
               <a:t>select_related</a:t>
             </a:r>
@@ -17041,13 +18390,13 @@
               <a:buNone/>
             </a:pPr>
             <a:r>
-              <a:rPr lang="en-US" sz="1300" dirty="0">
+              <a:rPr lang="en-US" sz="1150" dirty="0">
                 <a:solidFill>
                   <a:srgbClr val="00397B"/>
                 </a:solidFill>
-                <a:latin typeface="Consolas" pitchFamily="34" charset="0"/>
-                <a:ea typeface="Consolas" pitchFamily="34" charset="-122"/>
-                <a:cs typeface="Consolas" pitchFamily="34" charset="-120"/>
+                <a:latin typeface="Courier New" pitchFamily="49" charset="0"/>
+                <a:ea typeface="Courier New" pitchFamily="49" charset="-122"/>
+                <a:cs typeface="Courier New" pitchFamily="49" charset="-120"/>
               </a:rPr>
               <a:t>select_related</a:t>
             </a:r>
@@ -17224,13 +18573,13 @@
               <a:buNone/>
             </a:pPr>
             <a:r>
-              <a:rPr lang="en-US" sz="1300" dirty="0">
+              <a:rPr lang="en-US" sz="1150" dirty="0">
                 <a:solidFill>
                   <a:srgbClr val="00397B"/>
                 </a:solidFill>
-                <a:latin typeface="Consolas" pitchFamily="34" charset="0"/>
-                <a:ea typeface="Consolas" pitchFamily="34" charset="-122"/>
-                <a:cs typeface="Consolas" pitchFamily="34" charset="-120"/>
+                <a:latin typeface="Courier New" pitchFamily="49" charset="0"/>
+                <a:ea typeface="Courier New" pitchFamily="49" charset="-122"/>
+                <a:cs typeface="Courier New" pitchFamily="49" charset="-120"/>
               </a:rPr>
               <a:t>InscricaoForm</a:t>
             </a:r>
@@ -17418,13 +18767,13 @@
               <a:buNone/>
             </a:pPr>
             <a:r>
-              <a:rPr lang="en-US" sz="1300" dirty="0">
+              <a:rPr lang="en-US" sz="1150" dirty="0">
                 <a:solidFill>
                   <a:srgbClr val="00397B"/>
                 </a:solidFill>
-                <a:latin typeface="Consolas" pitchFamily="34" charset="0"/>
-                <a:ea typeface="Consolas" pitchFamily="34" charset="-122"/>
-                <a:cs typeface="Consolas" pitchFamily="34" charset="-120"/>
+                <a:latin typeface="Courier New" pitchFamily="49" charset="0"/>
+                <a:ea typeface="Courier New" pitchFamily="49" charset="-122"/>
+                <a:cs typeface="Courier New" pitchFamily="49" charset="-120"/>
               </a:rPr>
               <a:t>base.html</a:t>
             </a:r>
@@ -17904,7 +19253,7 @@
           <a:ln/>
         </p:spPr>
         <p:txBody>
-          <a:bodyPr wrap="square" lIns="0" tIns="0" rIns="0" bIns="0" rtlCol="0" anchor="ctr"/>
+          <a:bodyPr wrap="none" lIns="0" tIns="0" rIns="0" bIns="0" rtlCol="0" anchor="ctr"/>
           <a:lstStyle/>
           <a:p>
             <a:pPr indent="0" marL="0">
@@ -17915,9 +19264,9 @@
                 <a:solidFill>
                   <a:srgbClr val="00397B"/>
                 </a:solidFill>
-                <a:latin typeface="Consolas" pitchFamily="34" charset="0"/>
-                <a:ea typeface="Consolas" pitchFamily="34" charset="-122"/>
-                <a:cs typeface="Consolas" pitchFamily="34" charset="-120"/>
+                <a:latin typeface="Courier New" pitchFamily="49" charset="0"/>
+                <a:ea typeface="Courier New" pitchFamily="49" charset="-122"/>
+                <a:cs typeface="Courier New" pitchFamily="49" charset="-120"/>
               </a:rPr>
               <a:t>id</a:t>
             </a:r>
@@ -17943,7 +19292,7 @@
           <a:ln/>
         </p:spPr>
         <p:txBody>
-          <a:bodyPr wrap="square" lIns="0" tIns="0" rIns="0" bIns="0" rtlCol="0" anchor="ctr"/>
+          <a:bodyPr wrap="none" lIns="0" tIns="0" rIns="0" bIns="0" rtlCol="0" anchor="ctr"/>
           <a:lstStyle/>
           <a:p>
             <a:pPr indent="0" marL="0">
@@ -17954,9 +19303,9 @@
                 <a:solidFill>
                   <a:srgbClr val="00397B"/>
                 </a:solidFill>
-                <a:latin typeface="Consolas" pitchFamily="34" charset="0"/>
-                <a:ea typeface="Consolas" pitchFamily="34" charset="-122"/>
-                <a:cs typeface="Consolas" pitchFamily="34" charset="-120"/>
+                <a:latin typeface="Courier New" pitchFamily="49" charset="0"/>
+                <a:ea typeface="Courier New" pitchFamily="49" charset="-122"/>
+                <a:cs typeface="Courier New" pitchFamily="49" charset="-120"/>
               </a:rPr>
               <a:t>matricula</a:t>
             </a:r>
@@ -17982,7 +19331,7 @@
           <a:ln/>
         </p:spPr>
         <p:txBody>
-          <a:bodyPr wrap="square" lIns="0" tIns="0" rIns="0" bIns="0" rtlCol="0" anchor="ctr"/>
+          <a:bodyPr wrap="none" lIns="0" tIns="0" rIns="0" bIns="0" rtlCol="0" anchor="ctr"/>
           <a:lstStyle/>
           <a:p>
             <a:pPr indent="0" marL="0">
@@ -17993,9 +19342,9 @@
                 <a:solidFill>
                   <a:srgbClr val="00397B"/>
                 </a:solidFill>
-                <a:latin typeface="Consolas" pitchFamily="34" charset="0"/>
-                <a:ea typeface="Consolas" pitchFamily="34" charset="-122"/>
-                <a:cs typeface="Consolas" pitchFamily="34" charset="-120"/>
+                <a:latin typeface="Courier New" pitchFamily="49" charset="0"/>
+                <a:ea typeface="Courier New" pitchFamily="49" charset="-122"/>
+                <a:cs typeface="Courier New" pitchFamily="49" charset="-120"/>
               </a:rPr>
               <a:t>nome</a:t>
             </a:r>
@@ -18021,7 +19370,7 @@
           <a:ln/>
         </p:spPr>
         <p:txBody>
-          <a:bodyPr wrap="square" lIns="0" tIns="0" rIns="0" bIns="0" rtlCol="0" anchor="ctr"/>
+          <a:bodyPr wrap="none" lIns="0" tIns="0" rIns="0" bIns="0" rtlCol="0" anchor="ctr"/>
           <a:lstStyle/>
           <a:p>
             <a:pPr indent="0" marL="0">
@@ -18032,9 +19381,9 @@
                 <a:solidFill>
                   <a:srgbClr val="00397B"/>
                 </a:solidFill>
-                <a:latin typeface="Consolas" pitchFamily="34" charset="0"/>
-                <a:ea typeface="Consolas" pitchFamily="34" charset="-122"/>
-                <a:cs typeface="Consolas" pitchFamily="34" charset="-120"/>
+                <a:latin typeface="Courier New" pitchFamily="49" charset="0"/>
+                <a:ea typeface="Courier New" pitchFamily="49" charset="-122"/>
+                <a:cs typeface="Courier New" pitchFamily="49" charset="-120"/>
               </a:rPr>
               <a:t>email</a:t>
             </a:r>
@@ -18060,7 +19409,7 @@
           <a:ln/>
         </p:spPr>
         <p:txBody>
-          <a:bodyPr wrap="square" lIns="0" tIns="0" rIns="0" bIns="0" rtlCol="0" anchor="ctr"/>
+          <a:bodyPr wrap="none" lIns="0" tIns="0" rIns="0" bIns="0" rtlCol="0" anchor="ctr"/>
           <a:lstStyle/>
           <a:p>
             <a:pPr indent="0" marL="0">
@@ -18071,9 +19420,9 @@
                 <a:solidFill>
                   <a:srgbClr val="00397B"/>
                 </a:solidFill>
-                <a:latin typeface="Consolas" pitchFamily="34" charset="0"/>
-                <a:ea typeface="Consolas" pitchFamily="34" charset="-122"/>
-                <a:cs typeface="Consolas" pitchFamily="34" charset="-120"/>
+                <a:latin typeface="Courier New" pitchFamily="49" charset="0"/>
+                <a:ea typeface="Courier New" pitchFamily="49" charset="-122"/>
+                <a:cs typeface="Courier New" pitchFamily="49" charset="-120"/>
               </a:rPr>
               <a:t>ativo</a:t>
             </a:r>
@@ -18187,7 +19536,7 @@
           <a:ln/>
         </p:spPr>
         <p:txBody>
-          <a:bodyPr wrap="square" lIns="0" tIns="0" rIns="0" bIns="0" rtlCol="0" anchor="ctr"/>
+          <a:bodyPr wrap="none" lIns="0" tIns="0" rIns="0" bIns="0" rtlCol="0" anchor="ctr"/>
           <a:lstStyle/>
           <a:p>
             <a:pPr indent="0" marL="0">
@@ -18198,9 +19547,9 @@
                 <a:solidFill>
                   <a:srgbClr val="00397B"/>
                 </a:solidFill>
-                <a:latin typeface="Consolas" pitchFamily="34" charset="0"/>
-                <a:ea typeface="Consolas" pitchFamily="34" charset="-122"/>
-                <a:cs typeface="Consolas" pitchFamily="34" charset="-120"/>
+                <a:latin typeface="Courier New" pitchFamily="49" charset="0"/>
+                <a:ea typeface="Courier New" pitchFamily="49" charset="-122"/>
+                <a:cs typeface="Courier New" pitchFamily="49" charset="-120"/>
               </a:rPr>
               <a:t>id</a:t>
             </a:r>
@@ -18226,7 +19575,7 @@
           <a:ln/>
         </p:spPr>
         <p:txBody>
-          <a:bodyPr wrap="square" lIns="0" tIns="0" rIns="0" bIns="0" rtlCol="0" anchor="ctr"/>
+          <a:bodyPr wrap="none" lIns="0" tIns="0" rIns="0" bIns="0" rtlCol="0" anchor="ctr"/>
           <a:lstStyle/>
           <a:p>
             <a:pPr indent="0" marL="0">
@@ -18237,9 +19586,9 @@
                 <a:solidFill>
                   <a:srgbClr val="00397B"/>
                 </a:solidFill>
-                <a:latin typeface="Consolas" pitchFamily="34" charset="0"/>
-                <a:ea typeface="Consolas" pitchFamily="34" charset="-122"/>
-                <a:cs typeface="Consolas" pitchFamily="34" charset="-120"/>
+                <a:latin typeface="Courier New" pitchFamily="49" charset="0"/>
+                <a:ea typeface="Courier New" pitchFamily="49" charset="-122"/>
+                <a:cs typeface="Courier New" pitchFamily="49" charset="-120"/>
               </a:rPr>
               <a:t>aluno_id</a:t>
             </a:r>
@@ -18265,7 +19614,7 @@
           <a:ln/>
         </p:spPr>
         <p:txBody>
-          <a:bodyPr wrap="square" lIns="0" tIns="0" rIns="0" bIns="0" rtlCol="0" anchor="ctr"/>
+          <a:bodyPr wrap="none" lIns="0" tIns="0" rIns="0" bIns="0" rtlCol="0" anchor="ctr"/>
           <a:lstStyle/>
           <a:p>
             <a:pPr indent="0" marL="0">
@@ -18276,9 +19625,9 @@
                 <a:solidFill>
                   <a:srgbClr val="00397B"/>
                 </a:solidFill>
-                <a:latin typeface="Consolas" pitchFamily="34" charset="0"/>
-                <a:ea typeface="Consolas" pitchFamily="34" charset="-122"/>
-                <a:cs typeface="Consolas" pitchFamily="34" charset="-120"/>
+                <a:latin typeface="Courier New" pitchFamily="49" charset="0"/>
+                <a:ea typeface="Courier New" pitchFamily="49" charset="-122"/>
+                <a:cs typeface="Courier New" pitchFamily="49" charset="-120"/>
               </a:rPr>
               <a:t>disciplina_id</a:t>
             </a:r>
@@ -18304,7 +19653,7 @@
           <a:ln/>
         </p:spPr>
         <p:txBody>
-          <a:bodyPr wrap="square" lIns="0" tIns="0" rIns="0" bIns="0" rtlCol="0" anchor="ctr"/>
+          <a:bodyPr wrap="none" lIns="0" tIns="0" rIns="0" bIns="0" rtlCol="0" anchor="ctr"/>
           <a:lstStyle/>
           <a:p>
             <a:pPr indent="0" marL="0">
@@ -18315,9 +19664,9 @@
                 <a:solidFill>
                   <a:srgbClr val="D06110"/>
                 </a:solidFill>
-                <a:latin typeface="Consolas" pitchFamily="34" charset="0"/>
-                <a:ea typeface="Consolas" pitchFamily="34" charset="-122"/>
-                <a:cs typeface="Consolas" pitchFamily="34" charset="-120"/>
+                <a:latin typeface="Courier New" pitchFamily="49" charset="0"/>
+                <a:ea typeface="Courier New" pitchFamily="49" charset="-122"/>
+                <a:cs typeface="Courier New" pitchFamily="49" charset="-120"/>
               </a:rPr>
               <a:t>nota1</a:t>
             </a:r>
@@ -18343,7 +19692,7 @@
           <a:ln/>
         </p:spPr>
         <p:txBody>
-          <a:bodyPr wrap="square" lIns="0" tIns="0" rIns="0" bIns="0" rtlCol="0" anchor="ctr"/>
+          <a:bodyPr wrap="none" lIns="0" tIns="0" rIns="0" bIns="0" rtlCol="0" anchor="ctr"/>
           <a:lstStyle/>
           <a:p>
             <a:pPr indent="0" marL="0">
@@ -18354,9 +19703,9 @@
                 <a:solidFill>
                   <a:srgbClr val="D06110"/>
                 </a:solidFill>
-                <a:latin typeface="Consolas" pitchFamily="34" charset="0"/>
-                <a:ea typeface="Consolas" pitchFamily="34" charset="-122"/>
-                <a:cs typeface="Consolas" pitchFamily="34" charset="-120"/>
+                <a:latin typeface="Courier New" pitchFamily="49" charset="0"/>
+                <a:ea typeface="Courier New" pitchFamily="49" charset="-122"/>
+                <a:cs typeface="Courier New" pitchFamily="49" charset="-120"/>
               </a:rPr>
               <a:t>nota2</a:t>
             </a:r>
@@ -18470,7 +19819,7 @@
           <a:ln/>
         </p:spPr>
         <p:txBody>
-          <a:bodyPr wrap="square" lIns="0" tIns="0" rIns="0" bIns="0" rtlCol="0" anchor="ctr"/>
+          <a:bodyPr wrap="none" lIns="0" tIns="0" rIns="0" bIns="0" rtlCol="0" anchor="ctr"/>
           <a:lstStyle/>
           <a:p>
             <a:pPr indent="0" marL="0">
@@ -18481,9 +19830,9 @@
                 <a:solidFill>
                   <a:srgbClr val="00397B"/>
                 </a:solidFill>
-                <a:latin typeface="Consolas" pitchFamily="34" charset="0"/>
-                <a:ea typeface="Consolas" pitchFamily="34" charset="-122"/>
-                <a:cs typeface="Consolas" pitchFamily="34" charset="-120"/>
+                <a:latin typeface="Courier New" pitchFamily="49" charset="0"/>
+                <a:ea typeface="Courier New" pitchFamily="49" charset="-122"/>
+                <a:cs typeface="Courier New" pitchFamily="49" charset="-120"/>
               </a:rPr>
               <a:t>id</a:t>
             </a:r>
@@ -18509,7 +19858,7 @@
           <a:ln/>
         </p:spPr>
         <p:txBody>
-          <a:bodyPr wrap="square" lIns="0" tIns="0" rIns="0" bIns="0" rtlCol="0" anchor="ctr"/>
+          <a:bodyPr wrap="none" lIns="0" tIns="0" rIns="0" bIns="0" rtlCol="0" anchor="ctr"/>
           <a:lstStyle/>
           <a:p>
             <a:pPr indent="0" marL="0">
@@ -18520,9 +19869,9 @@
                 <a:solidFill>
                   <a:srgbClr val="00397B"/>
                 </a:solidFill>
-                <a:latin typeface="Consolas" pitchFamily="34" charset="0"/>
-                <a:ea typeface="Consolas" pitchFamily="34" charset="-122"/>
-                <a:cs typeface="Consolas" pitchFamily="34" charset="-120"/>
+                <a:latin typeface="Courier New" pitchFamily="49" charset="0"/>
+                <a:ea typeface="Courier New" pitchFamily="49" charset="-122"/>
+                <a:cs typeface="Courier New" pitchFamily="49" charset="-120"/>
               </a:rPr>
               <a:t>codigo</a:t>
             </a:r>
@@ -18548,7 +19897,7 @@
           <a:ln/>
         </p:spPr>
         <p:txBody>
-          <a:bodyPr wrap="square" lIns="0" tIns="0" rIns="0" bIns="0" rtlCol="0" anchor="ctr"/>
+          <a:bodyPr wrap="none" lIns="0" tIns="0" rIns="0" bIns="0" rtlCol="0" anchor="ctr"/>
           <a:lstStyle/>
           <a:p>
             <a:pPr indent="0" marL="0">
@@ -18559,9 +19908,9 @@
                 <a:solidFill>
                   <a:srgbClr val="00397B"/>
                 </a:solidFill>
-                <a:latin typeface="Consolas" pitchFamily="34" charset="0"/>
-                <a:ea typeface="Consolas" pitchFamily="34" charset="-122"/>
-                <a:cs typeface="Consolas" pitchFamily="34" charset="-120"/>
+                <a:latin typeface="Courier New" pitchFamily="49" charset="0"/>
+                <a:ea typeface="Courier New" pitchFamily="49" charset="-122"/>
+                <a:cs typeface="Courier New" pitchFamily="49" charset="-120"/>
               </a:rPr>
               <a:t>nome</a:t>
             </a:r>
@@ -18587,7 +19936,7 @@
           <a:ln/>
         </p:spPr>
         <p:txBody>
-          <a:bodyPr wrap="square" lIns="0" tIns="0" rIns="0" bIns="0" rtlCol="0" anchor="ctr"/>
+          <a:bodyPr wrap="none" lIns="0" tIns="0" rIns="0" bIns="0" rtlCol="0" anchor="ctr"/>
           <a:lstStyle/>
           <a:p>
             <a:pPr indent="0" marL="0">
@@ -18598,9 +19947,9 @@
                 <a:solidFill>
                   <a:srgbClr val="00397B"/>
                 </a:solidFill>
-                <a:latin typeface="Consolas" pitchFamily="34" charset="0"/>
-                <a:ea typeface="Consolas" pitchFamily="34" charset="-122"/>
-                <a:cs typeface="Consolas" pitchFamily="34" charset="-120"/>
+                <a:latin typeface="Courier New" pitchFamily="49" charset="0"/>
+                <a:ea typeface="Courier New" pitchFamily="49" charset="-122"/>
+                <a:cs typeface="Courier New" pitchFamily="49" charset="-120"/>
               </a:rPr>
               <a:t>carga_horaria</a:t>
             </a:r>
@@ -18626,7 +19975,7 @@
           <a:ln/>
         </p:spPr>
         <p:txBody>
-          <a:bodyPr wrap="square" lIns="0" tIns="0" rIns="0" bIns="0" rtlCol="0" anchor="ctr"/>
+          <a:bodyPr wrap="none" lIns="0" tIns="0" rIns="0" bIns="0" rtlCol="0" anchor="ctr"/>
           <a:lstStyle/>
           <a:p>
             <a:pPr indent="0" marL="0">
@@ -18637,9 +19986,9 @@
                 <a:solidFill>
                   <a:srgbClr val="00397B"/>
                 </a:solidFill>
-                <a:latin typeface="Consolas" pitchFamily="34" charset="0"/>
-                <a:ea typeface="Consolas" pitchFamily="34" charset="-122"/>
-                <a:cs typeface="Consolas" pitchFamily="34" charset="-120"/>
+                <a:latin typeface="Courier New" pitchFamily="49" charset="0"/>
+                <a:ea typeface="Courier New" pitchFamily="49" charset="-122"/>
+                <a:cs typeface="Courier New" pitchFamily="49" charset="-120"/>
               </a:rPr>
               <a:t>periodo</a:t>
             </a:r>
@@ -18785,7 +20134,7 @@
           <a:ln/>
         </p:spPr>
         <p:txBody>
-          <a:bodyPr wrap="square" lIns="0" tIns="0" rIns="0" bIns="0" rtlCol="0" anchor="ctr"/>
+          <a:bodyPr wrap="none" lIns="0" tIns="0" rIns="0" bIns="0" rtlCol="0" anchor="ctr"/>
           <a:lstStyle/>
           <a:p>
             <a:pPr algn="ctr" indent="0" marL="0">
@@ -18796,9 +20145,9 @@
                 <a:solidFill>
                   <a:srgbClr val="00397B"/>
                 </a:solidFill>
-                <a:latin typeface="Consolas" pitchFamily="34" charset="0"/>
-                <a:ea typeface="Consolas" pitchFamily="34" charset="-122"/>
-                <a:cs typeface="Consolas" pitchFamily="34" charset="-120"/>
+                <a:latin typeface="Courier New" pitchFamily="49" charset="0"/>
+                <a:ea typeface="Courier New" pitchFamily="49" charset="-122"/>
+                <a:cs typeface="Courier New" pitchFamily="49" charset="-120"/>
               </a:rPr>
               <a:t>UNIQUE (aluno_id, disciplina_id)</a:t>
             </a:r>
@@ -19128,13 +20477,13 @@
                         <a:buNone/>
                       </a:pPr>
                       <a:r>
-                        <a:rPr lang="en-US" sz="1200" dirty="0">
+                        <a:rPr lang="en-US" sz="1100" dirty="0">
                           <a:solidFill>
                             <a:srgbClr val="00397B"/>
                           </a:solidFill>
-                          <a:latin typeface="Consolas" pitchFamily="34" charset="0"/>
-                          <a:ea typeface="Consolas" pitchFamily="34" charset="-122"/>
-                          <a:cs typeface="Consolas" pitchFamily="34" charset="-120"/>
+                          <a:latin typeface="Courier New" pitchFamily="49" charset="0"/>
+                          <a:ea typeface="Courier New" pitchFamily="49" charset="-122"/>
+                          <a:cs typeface="Courier New" pitchFamily="49" charset="-120"/>
                         </a:rPr>
                         <a:t>inscricao.aluno.nome</a:t>
                       </a:r>
@@ -19180,13 +20529,13 @@
                         <a:buNone/>
                       </a:pPr>
                       <a:r>
-                        <a:rPr lang="en-US" sz="1200" dirty="0">
+                        <a:rPr lang="en-US" sz="1100" dirty="0">
                           <a:solidFill>
                             <a:srgbClr val="00397B"/>
                           </a:solidFill>
-                          <a:latin typeface="Consolas" pitchFamily="34" charset="0"/>
-                          <a:ea typeface="Consolas" pitchFamily="34" charset="-122"/>
-                          <a:cs typeface="Consolas" pitchFamily="34" charset="-120"/>
+                          <a:latin typeface="Courier New" pitchFamily="49" charset="0"/>
+                          <a:ea typeface="Courier New" pitchFamily="49" charset="-122"/>
+                          <a:cs typeface="Courier New" pitchFamily="49" charset="-120"/>
                         </a:rPr>
                         <a:t>SELECT ... FROM aluno WHERE id = %s</a:t>
                       </a:r>
@@ -19234,13 +20583,13 @@
                         <a:buNone/>
                       </a:pPr>
                       <a:r>
-                        <a:rPr lang="en-US" sz="1200" dirty="0">
+                        <a:rPr lang="en-US" sz="1100" dirty="0">
                           <a:solidFill>
                             <a:srgbClr val="00397B"/>
                           </a:solidFill>
-                          <a:latin typeface="Consolas" pitchFamily="34" charset="0"/>
-                          <a:ea typeface="Consolas" pitchFamily="34" charset="-122"/>
-                          <a:cs typeface="Consolas" pitchFamily="34" charset="-120"/>
+                          <a:latin typeface="Courier New" pitchFamily="49" charset="0"/>
+                          <a:ea typeface="Courier New" pitchFamily="49" charset="-122"/>
+                          <a:cs typeface="Courier New" pitchFamily="49" charset="-120"/>
                         </a:rPr>
                         <a:t>aluno.inscricoes.all()</a:t>
                       </a:r>
@@ -19286,13 +20635,13 @@
                         <a:buNone/>
                       </a:pPr>
                       <a:r>
-                        <a:rPr lang="en-US" sz="1200" dirty="0">
+                        <a:rPr lang="en-US" sz="1100" dirty="0">
                           <a:solidFill>
                             <a:srgbClr val="00397B"/>
                           </a:solidFill>
-                          <a:latin typeface="Consolas" pitchFamily="34" charset="0"/>
-                          <a:ea typeface="Consolas" pitchFamily="34" charset="-122"/>
-                          <a:cs typeface="Consolas" pitchFamily="34" charset="-120"/>
+                          <a:latin typeface="Courier New" pitchFamily="49" charset="0"/>
+                          <a:ea typeface="Courier New" pitchFamily="49" charset="-122"/>
+                          <a:cs typeface="Courier New" pitchFamily="49" charset="-120"/>
                         </a:rPr>
                         <a:t>SELECT ... FROM inscricao WHERE aluno_id = %s</a:t>
                       </a:r>
@@ -19340,13 +20689,13 @@
                         <a:buNone/>
                       </a:pPr>
                       <a:r>
-                        <a:rPr lang="en-US" sz="1200" dirty="0">
+                        <a:rPr lang="en-US" sz="1100" dirty="0">
                           <a:solidFill>
                             <a:srgbClr val="00397B"/>
                           </a:solidFill>
-                          <a:latin typeface="Consolas" pitchFamily="34" charset="0"/>
-                          <a:ea typeface="Consolas" pitchFamily="34" charset="-122"/>
-                          <a:cs typeface="Consolas" pitchFamily="34" charset="-120"/>
+                          <a:latin typeface="Courier New" pitchFamily="49" charset="0"/>
+                          <a:ea typeface="Courier New" pitchFamily="49" charset="-122"/>
+                          <a:cs typeface="Courier New" pitchFamily="49" charset="-120"/>
                         </a:rPr>
                         <a:t>aluno.inscricoes.count()</a:t>
                       </a:r>
@@ -19392,13 +20741,13 @@
                         <a:buNone/>
                       </a:pPr>
                       <a:r>
-                        <a:rPr lang="en-US" sz="1200" dirty="0">
+                        <a:rPr lang="en-US" sz="1100" dirty="0">
                           <a:solidFill>
                             <a:srgbClr val="00397B"/>
                           </a:solidFill>
-                          <a:latin typeface="Consolas" pitchFamily="34" charset="0"/>
-                          <a:ea typeface="Consolas" pitchFamily="34" charset="-122"/>
-                          <a:cs typeface="Consolas" pitchFamily="34" charset="-120"/>
+                          <a:latin typeface="Courier New" pitchFamily="49" charset="0"/>
+                          <a:ea typeface="Courier New" pitchFamily="49" charset="-122"/>
+                          <a:cs typeface="Courier New" pitchFamily="49" charset="-120"/>
                         </a:rPr>
                         <a:t>SELECT COUNT(*) ... WHERE aluno_id = %s</a:t>
                       </a:r>
@@ -19446,13 +20795,13 @@
                         <a:buNone/>
                       </a:pPr>
                       <a:r>
-                        <a:rPr lang="en-US" sz="1200" dirty="0">
+                        <a:rPr lang="en-US" sz="1100" dirty="0">
                           <a:solidFill>
                             <a:srgbClr val="00397B"/>
                           </a:solidFill>
-                          <a:latin typeface="Consolas" pitchFamily="34" charset="0"/>
-                          <a:ea typeface="Consolas" pitchFamily="34" charset="-122"/>
-                          <a:cs typeface="Consolas" pitchFamily="34" charset="-120"/>
+                          <a:latin typeface="Courier New" pitchFamily="49" charset="0"/>
+                          <a:ea typeface="Courier New" pitchFamily="49" charset="-122"/>
+                          <a:cs typeface="Courier New" pitchFamily="49" charset="-120"/>
                         </a:rPr>
                         <a:t>Inscricao.objects.filter(</a:t>
                       </a:r>
@@ -19472,13 +20821,13 @@
                         <a:buNone/>
                       </a:pPr>
                       <a:r>
-                        <a:rPr lang="en-US" sz="1200" dirty="0">
+                        <a:rPr lang="en-US" sz="1100" dirty="0">
                           <a:solidFill>
                             <a:srgbClr val="00397B"/>
                           </a:solidFill>
-                          <a:latin typeface="Consolas" pitchFamily="34" charset="0"/>
-                          <a:ea typeface="Consolas" pitchFamily="34" charset="-122"/>
-                          <a:cs typeface="Consolas" pitchFamily="34" charset="-120"/>
+                          <a:latin typeface="Courier New" pitchFamily="49" charset="0"/>
+                          <a:ea typeface="Courier New" pitchFamily="49" charset="-122"/>
+                          <a:cs typeface="Courier New" pitchFamily="49" charset="-120"/>
                         </a:rPr>
                         <a:t>    disciplina__codigo="ARA0095")</a:t>
                       </a:r>
@@ -19524,13 +20873,13 @@
                         <a:buNone/>
                       </a:pPr>
                       <a:r>
-                        <a:rPr lang="en-US" sz="1200" dirty="0">
+                        <a:rPr lang="en-US" sz="1100" dirty="0">
                           <a:solidFill>
                             <a:srgbClr val="00397B"/>
                           </a:solidFill>
-                          <a:latin typeface="Consolas" pitchFamily="34" charset="0"/>
-                          <a:ea typeface="Consolas" pitchFamily="34" charset="-122"/>
-                          <a:cs typeface="Consolas" pitchFamily="34" charset="-120"/>
+                          <a:latin typeface="Courier New" pitchFamily="49" charset="0"/>
+                          <a:ea typeface="Courier New" pitchFamily="49" charset="-122"/>
+                          <a:cs typeface="Courier New" pitchFamily="49" charset="-120"/>
                         </a:rPr>
                         <a:t>... JOIN disciplina ON ... WHERE codigo = %s</a:t>
                       </a:r>
@@ -19578,13 +20927,13 @@
                         <a:buNone/>
                       </a:pPr>
                       <a:r>
-                        <a:rPr lang="en-US" sz="1200" dirty="0">
+                        <a:rPr lang="en-US" sz="1100" dirty="0">
                           <a:solidFill>
                             <a:srgbClr val="00397B"/>
                           </a:solidFill>
-                          <a:latin typeface="Consolas" pitchFamily="34" charset="0"/>
-                          <a:ea typeface="Consolas" pitchFamily="34" charset="-122"/>
-                          <a:cs typeface="Consolas" pitchFamily="34" charset="-120"/>
+                          <a:latin typeface="Courier New" pitchFamily="49" charset="0"/>
+                          <a:ea typeface="Courier New" pitchFamily="49" charset="-122"/>
+                          <a:cs typeface="Courier New" pitchFamily="49" charset="-120"/>
                         </a:rPr>
                         <a:t>Inscricao.objects.filter(nota1__lt=6)</a:t>
                       </a:r>
@@ -19630,13 +20979,13 @@
                         <a:buNone/>
                       </a:pPr>
                       <a:r>
-                        <a:rPr lang="en-US" sz="1200" dirty="0">
+                        <a:rPr lang="en-US" sz="1100" dirty="0">
                           <a:solidFill>
                             <a:srgbClr val="00397B"/>
                           </a:solidFill>
-                          <a:latin typeface="Consolas" pitchFamily="34" charset="0"/>
-                          <a:ea typeface="Consolas" pitchFamily="34" charset="-122"/>
-                          <a:cs typeface="Consolas" pitchFamily="34" charset="-120"/>
+                          <a:latin typeface="Courier New" pitchFamily="49" charset="0"/>
+                          <a:ea typeface="Courier New" pitchFamily="49" charset="-122"/>
+                          <a:cs typeface="Courier New" pitchFamily="49" charset="-120"/>
                         </a:rPr>
                         <a:t>... WHERE nota1 &lt; 6</a:t>
                       </a:r>
@@ -19703,38 +21052,38 @@
               <a:buNone/>
             </a:pPr>
             <a:r>
+              <a:rPr lang="en-US" sz="1350" i="1" dirty="0">
+                <a:solidFill>
+                  <a:srgbClr val="1185AA"/>
+                </a:solidFill>
+                <a:latin typeface="Courier New" pitchFamily="49" charset="0"/>
+                <a:ea typeface="Courier New" pitchFamily="49" charset="-122"/>
+                <a:cs typeface="Courier New" pitchFamily="49" charset="-120"/>
+              </a:rPr>
+              <a:t>related_name="inscricoes"</a:t>
+            </a:r>
+            <a:pPr indent="0" marL="0">
+              <a:buNone/>
+            </a:pPr>
+            <a:r>
               <a:rPr lang="en-US" sz="1500" i="1" dirty="0">
                 <a:solidFill>
                   <a:srgbClr val="1185AA"/>
                 </a:solidFill>
-                <a:latin typeface="Consolas" pitchFamily="34" charset="0"/>
-                <a:ea typeface="Consolas" pitchFamily="34" charset="-122"/>
-                <a:cs typeface="Consolas" pitchFamily="34" charset="-120"/>
-              </a:rPr>
-              <a:t>related_name="inscricoes"</a:t>
-            </a:r>
-            <a:pPr indent="0" marL="0">
-              <a:buNone/>
-            </a:pPr>
-            <a:r>
-              <a:rPr lang="en-US" sz="1500" i="1" dirty="0">
+              </a:rPr>
+              <a:t> cria o caminho de volta. O </a:t>
+            </a:r>
+            <a:pPr indent="0" marL="0">
+              <a:buNone/>
+            </a:pPr>
+            <a:r>
+              <a:rPr lang="en-US" sz="1350" i="1" dirty="0">
                 <a:solidFill>
                   <a:srgbClr val="1185AA"/>
                 </a:solidFill>
-              </a:rPr>
-              <a:t> cria o caminho de volta. O </a:t>
-            </a:r>
-            <a:pPr indent="0" marL="0">
-              <a:buNone/>
-            </a:pPr>
-            <a:r>
-              <a:rPr lang="en-US" sz="1500" i="1" dirty="0">
-                <a:solidFill>
-                  <a:srgbClr val="1185AA"/>
-                </a:solidFill>
-                <a:latin typeface="Consolas" pitchFamily="34" charset="0"/>
-                <a:ea typeface="Consolas" pitchFamily="34" charset="-122"/>
-                <a:cs typeface="Consolas" pitchFamily="34" charset="-120"/>
+                <a:latin typeface="Courier New" pitchFamily="49" charset="0"/>
+                <a:ea typeface="Courier New" pitchFamily="49" charset="-122"/>
+                <a:cs typeface="Courier New" pitchFamily="49" charset="-120"/>
               </a:rPr>
               <a:t>__</a:t>
             </a:r>
@@ -19920,13 +21269,13 @@
               <a:buNone/>
             </a:pPr>
             <a:r>
-              <a:rPr lang="en-US" sz="1300" dirty="0">
+              <a:rPr lang="en-US" sz="1150" dirty="0">
                 <a:solidFill>
                   <a:srgbClr val="00397B"/>
                 </a:solidFill>
-                <a:latin typeface="Consolas" pitchFamily="34" charset="0"/>
-                <a:ea typeface="Consolas" pitchFamily="34" charset="-122"/>
-                <a:cs typeface="Consolas" pitchFamily="34" charset="-120"/>
+                <a:latin typeface="Courier New" pitchFamily="49" charset="0"/>
+                <a:ea typeface="Courier New" pitchFamily="49" charset="-122"/>
+                <a:cs typeface="Courier New" pitchFamily="49" charset="-120"/>
               </a:rPr>
               <a:t>Inscricao.objects.all()</a:t>
             </a:r>
@@ -20044,13 +21393,13 @@
               <a:buNone/>
             </a:pPr>
             <a:r>
-              <a:rPr lang="en-US" sz="1300" dirty="0">
+              <a:rPr lang="en-US" sz="1150" dirty="0">
                 <a:solidFill>
                   <a:srgbClr val="00397B"/>
                 </a:solidFill>
-                <a:latin typeface="Consolas" pitchFamily="34" charset="0"/>
-                <a:ea typeface="Consolas" pitchFamily="34" charset="-122"/>
-                <a:cs typeface="Consolas" pitchFamily="34" charset="-120"/>
+                <a:latin typeface="Courier New" pitchFamily="49" charset="0"/>
+                <a:ea typeface="Courier New" pitchFamily="49" charset="-122"/>
+                <a:cs typeface="Courier New" pitchFamily="49" charset="-120"/>
               </a:rPr>
               <a:t>for</a:t>
             </a:r>
@@ -20168,13 +21517,13 @@
               <a:buNone/>
             </a:pPr>
             <a:r>
-              <a:rPr lang="en-US" sz="1300" dirty="0">
+              <a:rPr lang="en-US" sz="1150" dirty="0">
                 <a:solidFill>
                   <a:srgbClr val="00397B"/>
                 </a:solidFill>
-                <a:latin typeface="Consolas" pitchFamily="34" charset="0"/>
-                <a:ea typeface="Consolas" pitchFamily="34" charset="-122"/>
-                <a:cs typeface="Consolas" pitchFamily="34" charset="-120"/>
+                <a:latin typeface="Courier New" pitchFamily="49" charset="0"/>
+                <a:ea typeface="Courier New" pitchFamily="49" charset="-122"/>
+                <a:cs typeface="Courier New" pitchFamily="49" charset="-120"/>
               </a:rPr>
               <a:t>select_related</a:t>
             </a:r>
@@ -20376,7 +21725,7 @@
           <a:ln/>
         </p:spPr>
         <p:txBody>
-          <a:bodyPr wrap="square" lIns="0" tIns="0" rIns="0" bIns="0" rtlCol="0" anchor="ctr"/>
+          <a:bodyPr wrap="none" lIns="0" tIns="0" rIns="0" bIns="0" rtlCol="0" anchor="ctr"/>
           <a:lstStyle/>
           <a:p>
             <a:pPr indent="0" marL="0">
@@ -20387,9 +21736,9 @@
                 <a:solidFill>
                   <a:srgbClr val="8B949E"/>
                 </a:solidFill>
-                <a:latin typeface="Consolas" pitchFamily="34" charset="0"/>
-                <a:ea typeface="Consolas" pitchFamily="34" charset="-122"/>
-                <a:cs typeface="Consolas" pitchFamily="34" charset="-120"/>
+                <a:latin typeface="Courier New" pitchFamily="49" charset="0"/>
+                <a:ea typeface="Courier New" pitchFamily="49" charset="-122"/>
+                <a:cs typeface="Courier New" pitchFamily="49" charset="-120"/>
               </a:rPr>
               <a:t>python manage.py shell</a:t>
             </a:r>
@@ -20415,20 +21764,20 @@
           <a:ln/>
         </p:spPr>
         <p:txBody>
-          <a:bodyPr wrap="square" lIns="0" tIns="0" rIns="0" bIns="0" rtlCol="0" anchor="t"/>
-          <a:lstStyle/>
-          <a:p>
-            <a:pPr indent="0" marL="0">
-              <a:buNone/>
-            </a:pPr>
-            <a:r>
-              <a:rPr lang="en-US" sz="1150" dirty="0">
+          <a:bodyPr wrap="none" lIns="0" tIns="0" rIns="0" bIns="0" rtlCol="0" anchor="t"/>
+          <a:lstStyle/>
+          <a:p>
+            <a:pPr indent="0" marL="0">
+              <a:buNone/>
+            </a:pPr>
+            <a:r>
+              <a:rPr lang="en-US" sz="1100" dirty="0">
                 <a:solidFill>
                   <a:srgbClr val="E6EDF3"/>
                 </a:solidFill>
-                <a:latin typeface="Consolas" pitchFamily="34" charset="0"/>
-                <a:ea typeface="Consolas" pitchFamily="34" charset="-122"/>
-                <a:cs typeface="Consolas" pitchFamily="34" charset="-120"/>
+                <a:latin typeface="Courier New" pitchFamily="49" charset="0"/>
+                <a:ea typeface="Courier New" pitchFamily="49" charset="-122"/>
+                <a:cs typeface="Courier New" pitchFamily="49" charset="-120"/>
               </a:rPr>
               <a:t>&gt;&gt;&gt; </a:t>
             </a:r>
@@ -20436,13 +21785,13 @@
               <a:buNone/>
             </a:pPr>
             <a:r>
-              <a:rPr lang="en-US" sz="1150" dirty="0">
+              <a:rPr lang="en-US" sz="1100" dirty="0">
                 <a:solidFill>
                   <a:srgbClr val="7DCFFF"/>
                 </a:solidFill>
-                <a:latin typeface="Consolas" pitchFamily="34" charset="0"/>
-                <a:ea typeface="Consolas" pitchFamily="34" charset="-122"/>
-                <a:cs typeface="Consolas" pitchFamily="34" charset="-120"/>
+                <a:latin typeface="Courier New" pitchFamily="49" charset="0"/>
+                <a:ea typeface="Courier New" pitchFamily="49" charset="-122"/>
+                <a:cs typeface="Courier New" pitchFamily="49" charset="-120"/>
               </a:rPr>
               <a:t>from</a:t>
             </a:r>
@@ -20450,13 +21799,13 @@
               <a:buNone/>
             </a:pPr>
             <a:r>
-              <a:rPr lang="en-US" sz="1150" dirty="0">
+              <a:rPr lang="en-US" sz="1100" dirty="0">
                 <a:solidFill>
                   <a:srgbClr val="E6EDF3"/>
                 </a:solidFill>
-                <a:latin typeface="Consolas" pitchFamily="34" charset="0"/>
-                <a:ea typeface="Consolas" pitchFamily="34" charset="-122"/>
-                <a:cs typeface="Consolas" pitchFamily="34" charset="-120"/>
+                <a:latin typeface="Courier New" pitchFamily="49" charset="0"/>
+                <a:ea typeface="Courier New" pitchFamily="49" charset="-122"/>
+                <a:cs typeface="Courier New" pitchFamily="49" charset="-120"/>
               </a:rPr>
               <a:t> django.db </a:t>
             </a:r>
@@ -20464,13 +21813,13 @@
               <a:buNone/>
             </a:pPr>
             <a:r>
-              <a:rPr lang="en-US" sz="1150" dirty="0">
+              <a:rPr lang="en-US" sz="1100" dirty="0">
                 <a:solidFill>
                   <a:srgbClr val="7DCFFF"/>
                 </a:solidFill>
-                <a:latin typeface="Consolas" pitchFamily="34" charset="0"/>
-                <a:ea typeface="Consolas" pitchFamily="34" charset="-122"/>
-                <a:cs typeface="Consolas" pitchFamily="34" charset="-120"/>
+                <a:latin typeface="Courier New" pitchFamily="49" charset="0"/>
+                <a:ea typeface="Courier New" pitchFamily="49" charset="-122"/>
+                <a:cs typeface="Courier New" pitchFamily="49" charset="-120"/>
               </a:rPr>
               <a:t>import</a:t>
             </a:r>
@@ -20478,30 +21827,30 @@
               <a:buNone/>
             </a:pPr>
             <a:r>
-              <a:rPr lang="en-US" sz="1150" dirty="0">
+              <a:rPr lang="en-US" sz="1100" dirty="0">
                 <a:solidFill>
                   <a:srgbClr val="E6EDF3"/>
                 </a:solidFill>
-                <a:latin typeface="Consolas" pitchFamily="34" charset="0"/>
-                <a:ea typeface="Consolas" pitchFamily="34" charset="-122"/>
-                <a:cs typeface="Consolas" pitchFamily="34" charset="-120"/>
+                <a:latin typeface="Courier New" pitchFamily="49" charset="0"/>
+                <a:ea typeface="Courier New" pitchFamily="49" charset="-122"/>
+                <a:cs typeface="Courier New" pitchFamily="49" charset="-120"/>
               </a:rPr>
               <a:t> connection</a:t>
             </a:r>
-            <a:endParaRPr lang="en-US" sz="1150" dirty="0"/>
-          </a:p>
-          <a:p>
-            <a:pPr indent="0" marL="0">
-              <a:buNone/>
-            </a:pPr>
-            <a:r>
-              <a:rPr lang="en-US" sz="1150" dirty="0">
+            <a:endParaRPr lang="en-US" sz="1100" dirty="0"/>
+          </a:p>
+          <a:p>
+            <a:pPr indent="0" marL="0">
+              <a:buNone/>
+            </a:pPr>
+            <a:r>
+              <a:rPr lang="en-US" sz="1100" dirty="0">
                 <a:solidFill>
                   <a:srgbClr val="E6EDF3"/>
                 </a:solidFill>
-                <a:latin typeface="Consolas" pitchFamily="34" charset="0"/>
-                <a:ea typeface="Consolas" pitchFamily="34" charset="-122"/>
-                <a:cs typeface="Consolas" pitchFamily="34" charset="-120"/>
+                <a:latin typeface="Courier New" pitchFamily="49" charset="0"/>
+                <a:ea typeface="Courier New" pitchFamily="49" charset="-122"/>
+                <a:cs typeface="Courier New" pitchFamily="49" charset="-120"/>
               </a:rPr>
               <a:t>&gt;&gt;&gt; </a:t>
             </a:r>
@@ -20509,13 +21858,13 @@
               <a:buNone/>
             </a:pPr>
             <a:r>
-              <a:rPr lang="en-US" sz="1150" dirty="0">
+              <a:rPr lang="en-US" sz="1100" dirty="0">
                 <a:solidFill>
                   <a:srgbClr val="7DCFFF"/>
                 </a:solidFill>
-                <a:latin typeface="Consolas" pitchFamily="34" charset="0"/>
-                <a:ea typeface="Consolas" pitchFamily="34" charset="-122"/>
-                <a:cs typeface="Consolas" pitchFamily="34" charset="-120"/>
+                <a:latin typeface="Courier New" pitchFamily="49" charset="0"/>
+                <a:ea typeface="Courier New" pitchFamily="49" charset="-122"/>
+                <a:cs typeface="Courier New" pitchFamily="49" charset="-120"/>
               </a:rPr>
               <a:t>from</a:t>
             </a:r>
@@ -20523,13 +21872,13 @@
               <a:buNone/>
             </a:pPr>
             <a:r>
-              <a:rPr lang="en-US" sz="1150" dirty="0">
+              <a:rPr lang="en-US" sz="1100" dirty="0">
                 <a:solidFill>
                   <a:srgbClr val="E6EDF3"/>
                 </a:solidFill>
-                <a:latin typeface="Consolas" pitchFamily="34" charset="0"/>
-                <a:ea typeface="Consolas" pitchFamily="34" charset="-122"/>
-                <a:cs typeface="Consolas" pitchFamily="34" charset="-120"/>
+                <a:latin typeface="Courier New" pitchFamily="49" charset="0"/>
+                <a:ea typeface="Courier New" pitchFamily="49" charset="-122"/>
+                <a:cs typeface="Courier New" pitchFamily="49" charset="-120"/>
               </a:rPr>
               <a:t> django.test.utils </a:t>
             </a:r>
@@ -20537,13 +21886,13 @@
               <a:buNone/>
             </a:pPr>
             <a:r>
-              <a:rPr lang="en-US" sz="1150" dirty="0">
+              <a:rPr lang="en-US" sz="1100" dirty="0">
                 <a:solidFill>
                   <a:srgbClr val="7DCFFF"/>
                 </a:solidFill>
-                <a:latin typeface="Consolas" pitchFamily="34" charset="0"/>
-                <a:ea typeface="Consolas" pitchFamily="34" charset="-122"/>
-                <a:cs typeface="Consolas" pitchFamily="34" charset="-120"/>
+                <a:latin typeface="Courier New" pitchFamily="49" charset="0"/>
+                <a:ea typeface="Courier New" pitchFamily="49" charset="-122"/>
+                <a:cs typeface="Courier New" pitchFamily="49" charset="-120"/>
               </a:rPr>
               <a:t>import</a:t>
             </a:r>
@@ -20551,30 +21900,30 @@
               <a:buNone/>
             </a:pPr>
             <a:r>
-              <a:rPr lang="en-US" sz="1150" dirty="0">
+              <a:rPr lang="en-US" sz="1100" dirty="0">
                 <a:solidFill>
                   <a:srgbClr val="E6EDF3"/>
                 </a:solidFill>
-                <a:latin typeface="Consolas" pitchFamily="34" charset="0"/>
-                <a:ea typeface="Consolas" pitchFamily="34" charset="-122"/>
-                <a:cs typeface="Consolas" pitchFamily="34" charset="-120"/>
+                <a:latin typeface="Courier New" pitchFamily="49" charset="0"/>
+                <a:ea typeface="Courier New" pitchFamily="49" charset="-122"/>
+                <a:cs typeface="Courier New" pitchFamily="49" charset="-120"/>
               </a:rPr>
               <a:t> CaptureQueriesContext</a:t>
             </a:r>
-            <a:endParaRPr lang="en-US" sz="1150" dirty="0"/>
-          </a:p>
-          <a:p>
-            <a:pPr indent="0" marL="0">
-              <a:buNone/>
-            </a:pPr>
-            <a:r>
-              <a:rPr lang="en-US" sz="1150" dirty="0">
+            <a:endParaRPr lang="en-US" sz="1100" dirty="0"/>
+          </a:p>
+          <a:p>
+            <a:pPr indent="0" marL="0">
+              <a:buNone/>
+            </a:pPr>
+            <a:r>
+              <a:rPr lang="en-US" sz="1100" dirty="0">
                 <a:solidFill>
                   <a:srgbClr val="E6EDF3"/>
                 </a:solidFill>
-                <a:latin typeface="Consolas" pitchFamily="34" charset="0"/>
-                <a:ea typeface="Consolas" pitchFamily="34" charset="-122"/>
-                <a:cs typeface="Consolas" pitchFamily="34" charset="-120"/>
+                <a:latin typeface="Courier New" pitchFamily="49" charset="0"/>
+                <a:ea typeface="Courier New" pitchFamily="49" charset="-122"/>
+                <a:cs typeface="Courier New" pitchFamily="49" charset="-120"/>
               </a:rPr>
               <a:t>&gt;&gt;&gt; </a:t>
             </a:r>
@@ -20582,13 +21931,13 @@
               <a:buNone/>
             </a:pPr>
             <a:r>
-              <a:rPr lang="en-US" sz="1150" dirty="0">
+              <a:rPr lang="en-US" sz="1100" dirty="0">
                 <a:solidFill>
                   <a:srgbClr val="7DCFFF"/>
                 </a:solidFill>
-                <a:latin typeface="Consolas" pitchFamily="34" charset="0"/>
-                <a:ea typeface="Consolas" pitchFamily="34" charset="-122"/>
-                <a:cs typeface="Consolas" pitchFamily="34" charset="-120"/>
+                <a:latin typeface="Courier New" pitchFamily="49" charset="0"/>
+                <a:ea typeface="Courier New" pitchFamily="49" charset="-122"/>
+                <a:cs typeface="Courier New" pitchFamily="49" charset="-120"/>
               </a:rPr>
               <a:t>from</a:t>
             </a:r>
@@ -20596,13 +21945,13 @@
               <a:buNone/>
             </a:pPr>
             <a:r>
-              <a:rPr lang="en-US" sz="1150" dirty="0">
+              <a:rPr lang="en-US" sz="1100" dirty="0">
                 <a:solidFill>
                   <a:srgbClr val="E6EDF3"/>
                 </a:solidFill>
-                <a:latin typeface="Consolas" pitchFamily="34" charset="0"/>
-                <a:ea typeface="Consolas" pitchFamily="34" charset="-122"/>
-                <a:cs typeface="Consolas" pitchFamily="34" charset="-120"/>
+                <a:latin typeface="Courier New" pitchFamily="49" charset="0"/>
+                <a:ea typeface="Courier New" pitchFamily="49" charset="-122"/>
+                <a:cs typeface="Courier New" pitchFamily="49" charset="-120"/>
               </a:rPr>
               <a:t> academico.models </a:t>
             </a:r>
@@ -20610,13 +21959,13 @@
               <a:buNone/>
             </a:pPr>
             <a:r>
-              <a:rPr lang="en-US" sz="1150" dirty="0">
+              <a:rPr lang="en-US" sz="1100" dirty="0">
                 <a:solidFill>
                   <a:srgbClr val="7DCFFF"/>
                 </a:solidFill>
-                <a:latin typeface="Consolas" pitchFamily="34" charset="0"/>
-                <a:ea typeface="Consolas" pitchFamily="34" charset="-122"/>
-                <a:cs typeface="Consolas" pitchFamily="34" charset="-120"/>
+                <a:latin typeface="Courier New" pitchFamily="49" charset="0"/>
+                <a:ea typeface="Courier New" pitchFamily="49" charset="-122"/>
+                <a:cs typeface="Courier New" pitchFamily="49" charset="-120"/>
               </a:rPr>
               <a:t>import</a:t>
             </a:r>
@@ -20624,30 +21973,30 @@
               <a:buNone/>
             </a:pPr>
             <a:r>
-              <a:rPr lang="en-US" sz="1150" dirty="0">
+              <a:rPr lang="en-US" sz="1100" dirty="0">
                 <a:solidFill>
                   <a:srgbClr val="E6EDF3"/>
                 </a:solidFill>
-                <a:latin typeface="Consolas" pitchFamily="34" charset="0"/>
-                <a:ea typeface="Consolas" pitchFamily="34" charset="-122"/>
-                <a:cs typeface="Consolas" pitchFamily="34" charset="-120"/>
+                <a:latin typeface="Courier New" pitchFamily="49" charset="0"/>
+                <a:ea typeface="Courier New" pitchFamily="49" charset="-122"/>
+                <a:cs typeface="Courier New" pitchFamily="49" charset="-120"/>
               </a:rPr>
               <a:t> Inscricao</a:t>
             </a:r>
-            <a:endParaRPr lang="en-US" sz="1150" dirty="0"/>
-          </a:p>
-          <a:p>
-            <a:pPr indent="0" marL="0">
-              <a:buNone/>
-            </a:pPr>
-            <a:r>
-              <a:rPr lang="en-US" sz="1150" dirty="0">
+            <a:endParaRPr lang="en-US" sz="1100" dirty="0"/>
+          </a:p>
+          <a:p>
+            <a:pPr indent="0" marL="0">
+              <a:buNone/>
+            </a:pPr>
+            <a:r>
+              <a:rPr lang="en-US" sz="1100" dirty="0">
                 <a:solidFill>
                   <a:srgbClr val="E6EDF3"/>
                 </a:solidFill>
-                <a:latin typeface="Consolas" pitchFamily="34" charset="0"/>
-                <a:ea typeface="Consolas" pitchFamily="34" charset="-122"/>
-                <a:cs typeface="Consolas" pitchFamily="34" charset="-120"/>
+                <a:latin typeface="Courier New" pitchFamily="49" charset="0"/>
+                <a:ea typeface="Courier New" pitchFamily="49" charset="-122"/>
+                <a:cs typeface="Courier New" pitchFamily="49" charset="-120"/>
               </a:rPr>
               <a:t>&gt;&gt;&gt; </a:t>
             </a:r>
@@ -20655,13 +22004,13 @@
               <a:buNone/>
             </a:pPr>
             <a:r>
-              <a:rPr lang="en-US" sz="1150" dirty="0">
+              <a:rPr lang="en-US" sz="1100" dirty="0">
                 <a:solidFill>
                   <a:srgbClr val="7DCFFF"/>
                 </a:solidFill>
-                <a:latin typeface="Consolas" pitchFamily="34" charset="0"/>
-                <a:ea typeface="Consolas" pitchFamily="34" charset="-122"/>
-                <a:cs typeface="Consolas" pitchFamily="34" charset="-120"/>
+                <a:latin typeface="Courier New" pitchFamily="49" charset="0"/>
+                <a:ea typeface="Courier New" pitchFamily="49" charset="-122"/>
+                <a:cs typeface="Courier New" pitchFamily="49" charset="-120"/>
               </a:rPr>
               <a:t>with</a:t>
             </a:r>
@@ -20669,13 +22018,13 @@
               <a:buNone/>
             </a:pPr>
             <a:r>
-              <a:rPr lang="en-US" sz="1150" dirty="0">
+              <a:rPr lang="en-US" sz="1100" dirty="0">
                 <a:solidFill>
                   <a:srgbClr val="E6EDF3"/>
                 </a:solidFill>
-                <a:latin typeface="Consolas" pitchFamily="34" charset="0"/>
-                <a:ea typeface="Consolas" pitchFamily="34" charset="-122"/>
-                <a:cs typeface="Consolas" pitchFamily="34" charset="-120"/>
+                <a:latin typeface="Courier New" pitchFamily="49" charset="0"/>
+                <a:ea typeface="Courier New" pitchFamily="49" charset="-122"/>
+                <a:cs typeface="Courier New" pitchFamily="49" charset="-120"/>
               </a:rPr>
               <a:t> CaptureQueriesContext(connection) </a:t>
             </a:r>
@@ -20683,13 +22032,13 @@
               <a:buNone/>
             </a:pPr>
             <a:r>
-              <a:rPr lang="en-US" sz="1150" dirty="0">
+              <a:rPr lang="en-US" sz="1100" dirty="0">
                 <a:solidFill>
                   <a:srgbClr val="7DCFFF"/>
                 </a:solidFill>
-                <a:latin typeface="Consolas" pitchFamily="34" charset="0"/>
-                <a:ea typeface="Consolas" pitchFamily="34" charset="-122"/>
-                <a:cs typeface="Consolas" pitchFamily="34" charset="-120"/>
+                <a:latin typeface="Courier New" pitchFamily="49" charset="0"/>
+                <a:ea typeface="Courier New" pitchFamily="49" charset="-122"/>
+                <a:cs typeface="Courier New" pitchFamily="49" charset="-120"/>
               </a:rPr>
               <a:t>as</a:t>
             </a:r>
@@ -20697,30 +22046,30 @@
               <a:buNone/>
             </a:pPr>
             <a:r>
-              <a:rPr lang="en-US" sz="1150" dirty="0">
+              <a:rPr lang="en-US" sz="1100" dirty="0">
                 <a:solidFill>
                   <a:srgbClr val="E6EDF3"/>
                 </a:solidFill>
-                <a:latin typeface="Consolas" pitchFamily="34" charset="0"/>
-                <a:ea typeface="Consolas" pitchFamily="34" charset="-122"/>
-                <a:cs typeface="Consolas" pitchFamily="34" charset="-120"/>
+                <a:latin typeface="Courier New" pitchFamily="49" charset="0"/>
+                <a:ea typeface="Courier New" pitchFamily="49" charset="-122"/>
+                <a:cs typeface="Courier New" pitchFamily="49" charset="-120"/>
               </a:rPr>
               <a:t> q:</a:t>
             </a:r>
-            <a:endParaRPr lang="en-US" sz="1150" dirty="0"/>
-          </a:p>
-          <a:p>
-            <a:pPr indent="0" marL="0">
-              <a:buNone/>
-            </a:pPr>
-            <a:r>
-              <a:rPr lang="en-US" sz="1150" dirty="0">
+            <a:endParaRPr lang="en-US" sz="1100" dirty="0"/>
+          </a:p>
+          <a:p>
+            <a:pPr indent="0" marL="0">
+              <a:buNone/>
+            </a:pPr>
+            <a:r>
+              <a:rPr lang="en-US" sz="1100" dirty="0">
                 <a:solidFill>
                   <a:srgbClr val="E6EDF3"/>
                 </a:solidFill>
-                <a:latin typeface="Consolas" pitchFamily="34" charset="0"/>
-                <a:ea typeface="Consolas" pitchFamily="34" charset="-122"/>
-                <a:cs typeface="Consolas" pitchFamily="34" charset="-120"/>
+                <a:latin typeface="Courier New" pitchFamily="49" charset="0"/>
+                <a:ea typeface="Courier New" pitchFamily="49" charset="-122"/>
+                <a:cs typeface="Courier New" pitchFamily="49" charset="-120"/>
               </a:rPr>
               <a:t>...     </a:t>
             </a:r>
@@ -20728,13 +22077,13 @@
               <a:buNone/>
             </a:pPr>
             <a:r>
-              <a:rPr lang="en-US" sz="1150" dirty="0">
+              <a:rPr lang="en-US" sz="1100" dirty="0">
                 <a:solidFill>
                   <a:srgbClr val="7DCFFF"/>
                 </a:solidFill>
-                <a:latin typeface="Consolas" pitchFamily="34" charset="0"/>
-                <a:ea typeface="Consolas" pitchFamily="34" charset="-122"/>
-                <a:cs typeface="Consolas" pitchFamily="34" charset="-120"/>
+                <a:latin typeface="Courier New" pitchFamily="49" charset="0"/>
+                <a:ea typeface="Courier New" pitchFamily="49" charset="-122"/>
+                <a:cs typeface="Courier New" pitchFamily="49" charset="-120"/>
               </a:rPr>
               <a:t>for</a:t>
             </a:r>
@@ -20742,13 +22091,13 @@
               <a:buNone/>
             </a:pPr>
             <a:r>
-              <a:rPr lang="en-US" sz="1150" dirty="0">
+              <a:rPr lang="en-US" sz="1100" dirty="0">
                 <a:solidFill>
                   <a:srgbClr val="E6EDF3"/>
                 </a:solidFill>
-                <a:latin typeface="Consolas" pitchFamily="34" charset="0"/>
-                <a:ea typeface="Consolas" pitchFamily="34" charset="-122"/>
-                <a:cs typeface="Consolas" pitchFamily="34" charset="-120"/>
+                <a:latin typeface="Courier New" pitchFamily="49" charset="0"/>
+                <a:ea typeface="Courier New" pitchFamily="49" charset="-122"/>
+                <a:cs typeface="Courier New" pitchFamily="49" charset="-120"/>
               </a:rPr>
               <a:t> i </a:t>
             </a:r>
@@ -20756,13 +22105,13 @@
               <a:buNone/>
             </a:pPr>
             <a:r>
-              <a:rPr lang="en-US" sz="1150" dirty="0">
+              <a:rPr lang="en-US" sz="1100" dirty="0">
                 <a:solidFill>
                   <a:srgbClr val="7DCFFF"/>
                 </a:solidFill>
-                <a:latin typeface="Consolas" pitchFamily="34" charset="0"/>
-                <a:ea typeface="Consolas" pitchFamily="34" charset="-122"/>
-                <a:cs typeface="Consolas" pitchFamily="34" charset="-120"/>
+                <a:latin typeface="Courier New" pitchFamily="49" charset="0"/>
+                <a:ea typeface="Courier New" pitchFamily="49" charset="-122"/>
+                <a:cs typeface="Courier New" pitchFamily="49" charset="-120"/>
               </a:rPr>
               <a:t>in</a:t>
             </a:r>
@@ -20770,47 +22119,47 @@
               <a:buNone/>
             </a:pPr>
             <a:r>
-              <a:rPr lang="en-US" sz="1150" dirty="0">
+              <a:rPr lang="en-US" sz="1100" dirty="0">
                 <a:solidFill>
                   <a:srgbClr val="E6EDF3"/>
                 </a:solidFill>
-                <a:latin typeface="Consolas" pitchFamily="34" charset="0"/>
-                <a:ea typeface="Consolas" pitchFamily="34" charset="-122"/>
-                <a:cs typeface="Consolas" pitchFamily="34" charset="-120"/>
+                <a:latin typeface="Courier New" pitchFamily="49" charset="0"/>
+                <a:ea typeface="Courier New" pitchFamily="49" charset="-122"/>
+                <a:cs typeface="Courier New" pitchFamily="49" charset="-120"/>
               </a:rPr>
               <a:t> Inscricao.objects.all():</a:t>
             </a:r>
-            <a:endParaRPr lang="en-US" sz="1150" dirty="0"/>
-          </a:p>
-          <a:p>
-            <a:pPr indent="0" marL="0">
-              <a:buNone/>
-            </a:pPr>
-            <a:r>
-              <a:rPr lang="en-US" sz="1150" dirty="0">
+            <a:endParaRPr lang="en-US" sz="1100" dirty="0"/>
+          </a:p>
+          <a:p>
+            <a:pPr indent="0" marL="0">
+              <a:buNone/>
+            </a:pPr>
+            <a:r>
+              <a:rPr lang="en-US" sz="1100" dirty="0">
                 <a:solidFill>
                   <a:srgbClr val="E6EDF3"/>
                 </a:solidFill>
-                <a:latin typeface="Consolas" pitchFamily="34" charset="0"/>
-                <a:ea typeface="Consolas" pitchFamily="34" charset="-122"/>
-                <a:cs typeface="Consolas" pitchFamily="34" charset="-120"/>
+                <a:latin typeface="Courier New" pitchFamily="49" charset="0"/>
+                <a:ea typeface="Courier New" pitchFamily="49" charset="-122"/>
+                <a:cs typeface="Courier New" pitchFamily="49" charset="-120"/>
               </a:rPr>
               <a:t>...         _ = i.aluno.nome, i.disciplina.nome</a:t>
             </a:r>
-            <a:endParaRPr lang="en-US" sz="1150" dirty="0"/>
-          </a:p>
-          <a:p>
-            <a:pPr indent="0" marL="0">
-              <a:buNone/>
-            </a:pPr>
-            <a:r>
-              <a:rPr lang="en-US" sz="1150" dirty="0">
+            <a:endParaRPr lang="en-US" sz="1100" dirty="0"/>
+          </a:p>
+          <a:p>
+            <a:pPr indent="0" marL="0">
+              <a:buNone/>
+            </a:pPr>
+            <a:r>
+              <a:rPr lang="en-US" sz="1100" dirty="0">
                 <a:solidFill>
                   <a:srgbClr val="E6EDF3"/>
                 </a:solidFill>
-                <a:latin typeface="Consolas" pitchFamily="34" charset="0"/>
-                <a:ea typeface="Consolas" pitchFamily="34" charset="-122"/>
-                <a:cs typeface="Consolas" pitchFamily="34" charset="-120"/>
+                <a:latin typeface="Courier New" pitchFamily="49" charset="0"/>
+                <a:ea typeface="Courier New" pitchFamily="49" charset="-122"/>
+                <a:cs typeface="Courier New" pitchFamily="49" charset="-120"/>
               </a:rPr>
               <a:t>&gt;&gt;&gt; len(q)              </a:t>
             </a:r>
@@ -20818,47 +22167,47 @@
               <a:buNone/>
             </a:pPr>
             <a:r>
-              <a:rPr lang="en-US" sz="1150" i="1" dirty="0">
+              <a:rPr lang="en-US" sz="1100" i="1" dirty="0">
                 <a:solidFill>
                   <a:srgbClr val="8B949E"/>
                 </a:solidFill>
-                <a:latin typeface="Consolas" pitchFamily="34" charset="0"/>
-                <a:ea typeface="Consolas" pitchFamily="34" charset="-122"/>
-                <a:cs typeface="Consolas" pitchFamily="34" charset="-120"/>
+                <a:latin typeface="Courier New" pitchFamily="49" charset="0"/>
+                <a:ea typeface="Courier New" pitchFamily="49" charset="-122"/>
+                <a:cs typeface="Courier New" pitchFamily="49" charset="-120"/>
               </a:rPr>
               <a:t># 1 + 2N</a:t>
             </a:r>
-            <a:endParaRPr lang="en-US" sz="1150" dirty="0"/>
-          </a:p>
-          <a:p>
-            <a:pPr indent="0" marL="0">
-              <a:buNone/>
-            </a:pPr>
-            <a:r>
-              <a:rPr lang="en-US" sz="1150" dirty="0">
+            <a:endParaRPr lang="en-US" sz="1100" dirty="0"/>
+          </a:p>
+          <a:p>
+            <a:pPr indent="0" marL="0">
+              <a:buNone/>
+            </a:pPr>
+            <a:r>
+              <a:rPr lang="en-US" sz="1100" dirty="0">
                 <a:solidFill>
                   <a:srgbClr val="E6EDF3"/>
                 </a:solidFill>
-                <a:latin typeface="Consolas" pitchFamily="34" charset="0"/>
-                <a:ea typeface="Consolas" pitchFamily="34" charset="-122"/>
-                <a:cs typeface="Consolas" pitchFamily="34" charset="-120"/>
+                <a:latin typeface="Courier New" pitchFamily="49" charset="0"/>
+                <a:ea typeface="Courier New" pitchFamily="49" charset="-122"/>
+                <a:cs typeface="Courier New" pitchFamily="49" charset="-120"/>
               </a:rPr>
               <a:t>&gt;&gt;&gt; qs = Inscricao.objects.select_related(</a:t>
             </a:r>
-            <a:endParaRPr lang="en-US" sz="1150" dirty="0"/>
-          </a:p>
-          <a:p>
-            <a:pPr indent="0" marL="0">
-              <a:buNone/>
-            </a:pPr>
-            <a:r>
-              <a:rPr lang="en-US" sz="1150" dirty="0">
+            <a:endParaRPr lang="en-US" sz="1100" dirty="0"/>
+          </a:p>
+          <a:p>
+            <a:pPr indent="0" marL="0">
+              <a:buNone/>
+            </a:pPr>
+            <a:r>
+              <a:rPr lang="en-US" sz="1100" dirty="0">
                 <a:solidFill>
                   <a:srgbClr val="E6EDF3"/>
                 </a:solidFill>
-                <a:latin typeface="Consolas" pitchFamily="34" charset="0"/>
-                <a:ea typeface="Consolas" pitchFamily="34" charset="-122"/>
-                <a:cs typeface="Consolas" pitchFamily="34" charset="-120"/>
+                <a:latin typeface="Courier New" pitchFamily="49" charset="0"/>
+                <a:ea typeface="Courier New" pitchFamily="49" charset="-122"/>
+                <a:cs typeface="Courier New" pitchFamily="49" charset="-120"/>
               </a:rPr>
               <a:t>...     </a:t>
             </a:r>
@@ -20866,13 +22215,13 @@
               <a:buNone/>
             </a:pPr>
             <a:r>
-              <a:rPr lang="en-US" sz="1150" dirty="0">
+              <a:rPr lang="en-US" sz="1100" dirty="0">
                 <a:solidFill>
                   <a:srgbClr val="F0C674"/>
                 </a:solidFill>
-                <a:latin typeface="Consolas" pitchFamily="34" charset="0"/>
-                <a:ea typeface="Consolas" pitchFamily="34" charset="-122"/>
-                <a:cs typeface="Consolas" pitchFamily="34" charset="-120"/>
+                <a:latin typeface="Courier New" pitchFamily="49" charset="0"/>
+                <a:ea typeface="Courier New" pitchFamily="49" charset="-122"/>
+                <a:cs typeface="Courier New" pitchFamily="49" charset="-120"/>
               </a:rPr>
               <a:t>"aluno"</a:t>
             </a:r>
@@ -20880,13 +22229,13 @@
               <a:buNone/>
             </a:pPr>
             <a:r>
-              <a:rPr lang="en-US" sz="1150" dirty="0">
+              <a:rPr lang="en-US" sz="1100" dirty="0">
                 <a:solidFill>
                   <a:srgbClr val="E6EDF3"/>
                 </a:solidFill>
-                <a:latin typeface="Consolas" pitchFamily="34" charset="0"/>
-                <a:ea typeface="Consolas" pitchFamily="34" charset="-122"/>
-                <a:cs typeface="Consolas" pitchFamily="34" charset="-120"/>
+                <a:latin typeface="Courier New" pitchFamily="49" charset="0"/>
+                <a:ea typeface="Courier New" pitchFamily="49" charset="-122"/>
+                <a:cs typeface="Courier New" pitchFamily="49" charset="-120"/>
               </a:rPr>
               <a:t>, </a:t>
             </a:r>
@@ -20894,13 +22243,13 @@
               <a:buNone/>
             </a:pPr>
             <a:r>
-              <a:rPr lang="en-US" sz="1150" dirty="0">
+              <a:rPr lang="en-US" sz="1100" dirty="0">
                 <a:solidFill>
                   <a:srgbClr val="F0C674"/>
                 </a:solidFill>
-                <a:latin typeface="Consolas" pitchFamily="34" charset="0"/>
-                <a:ea typeface="Consolas" pitchFamily="34" charset="-122"/>
-                <a:cs typeface="Consolas" pitchFamily="34" charset="-120"/>
+                <a:latin typeface="Courier New" pitchFamily="49" charset="0"/>
+                <a:ea typeface="Courier New" pitchFamily="49" charset="-122"/>
+                <a:cs typeface="Courier New" pitchFamily="49" charset="-120"/>
               </a:rPr>
               <a:t>"disciplina"</a:t>
             </a:r>
@@ -20908,30 +22257,30 @@
               <a:buNone/>
             </a:pPr>
             <a:r>
-              <a:rPr lang="en-US" sz="1150" dirty="0">
+              <a:rPr lang="en-US" sz="1100" dirty="0">
                 <a:solidFill>
                   <a:srgbClr val="E6EDF3"/>
                 </a:solidFill>
-                <a:latin typeface="Consolas" pitchFamily="34" charset="0"/>
-                <a:ea typeface="Consolas" pitchFamily="34" charset="-122"/>
-                <a:cs typeface="Consolas" pitchFamily="34" charset="-120"/>
+                <a:latin typeface="Courier New" pitchFamily="49" charset="0"/>
+                <a:ea typeface="Courier New" pitchFamily="49" charset="-122"/>
+                <a:cs typeface="Courier New" pitchFamily="49" charset="-120"/>
               </a:rPr>
               <a:t>)</a:t>
             </a:r>
-            <a:endParaRPr lang="en-US" sz="1150" dirty="0"/>
-          </a:p>
-          <a:p>
-            <a:pPr indent="0" marL="0">
-              <a:buNone/>
-            </a:pPr>
-            <a:r>
-              <a:rPr lang="en-US" sz="1150" dirty="0">
+            <a:endParaRPr lang="en-US" sz="1100" dirty="0"/>
+          </a:p>
+          <a:p>
+            <a:pPr indent="0" marL="0">
+              <a:buNone/>
+            </a:pPr>
+            <a:r>
+              <a:rPr lang="en-US" sz="1100" dirty="0">
                 <a:solidFill>
                   <a:srgbClr val="E6EDF3"/>
                 </a:solidFill>
-                <a:latin typeface="Consolas" pitchFamily="34" charset="0"/>
-                <a:ea typeface="Consolas" pitchFamily="34" charset="-122"/>
-                <a:cs typeface="Consolas" pitchFamily="34" charset="-120"/>
+                <a:latin typeface="Courier New" pitchFamily="49" charset="0"/>
+                <a:ea typeface="Courier New" pitchFamily="49" charset="-122"/>
+                <a:cs typeface="Courier New" pitchFamily="49" charset="-120"/>
               </a:rPr>
               <a:t>&gt;&gt;&gt; </a:t>
             </a:r>
@@ -20939,13 +22288,13 @@
               <a:buNone/>
             </a:pPr>
             <a:r>
-              <a:rPr lang="en-US" sz="1150" dirty="0">
+              <a:rPr lang="en-US" sz="1100" dirty="0">
                 <a:solidFill>
                   <a:srgbClr val="7DCFFF"/>
                 </a:solidFill>
-                <a:latin typeface="Consolas" pitchFamily="34" charset="0"/>
-                <a:ea typeface="Consolas" pitchFamily="34" charset="-122"/>
-                <a:cs typeface="Consolas" pitchFamily="34" charset="-120"/>
+                <a:latin typeface="Courier New" pitchFamily="49" charset="0"/>
+                <a:ea typeface="Courier New" pitchFamily="49" charset="-122"/>
+                <a:cs typeface="Courier New" pitchFamily="49" charset="-120"/>
               </a:rPr>
               <a:t>with</a:t>
             </a:r>
@@ -20953,13 +22302,13 @@
               <a:buNone/>
             </a:pPr>
             <a:r>
-              <a:rPr lang="en-US" sz="1150" dirty="0">
+              <a:rPr lang="en-US" sz="1100" dirty="0">
                 <a:solidFill>
                   <a:srgbClr val="E6EDF3"/>
                 </a:solidFill>
-                <a:latin typeface="Consolas" pitchFamily="34" charset="0"/>
-                <a:ea typeface="Consolas" pitchFamily="34" charset="-122"/>
-                <a:cs typeface="Consolas" pitchFamily="34" charset="-120"/>
+                <a:latin typeface="Courier New" pitchFamily="49" charset="0"/>
+                <a:ea typeface="Courier New" pitchFamily="49" charset="-122"/>
+                <a:cs typeface="Courier New" pitchFamily="49" charset="-120"/>
               </a:rPr>
               <a:t> CaptureQueriesContext(connection) </a:t>
             </a:r>
@@ -20967,13 +22316,13 @@
               <a:buNone/>
             </a:pPr>
             <a:r>
-              <a:rPr lang="en-US" sz="1150" dirty="0">
+              <a:rPr lang="en-US" sz="1100" dirty="0">
                 <a:solidFill>
                   <a:srgbClr val="7DCFFF"/>
                 </a:solidFill>
-                <a:latin typeface="Consolas" pitchFamily="34" charset="0"/>
-                <a:ea typeface="Consolas" pitchFamily="34" charset="-122"/>
-                <a:cs typeface="Consolas" pitchFamily="34" charset="-120"/>
+                <a:latin typeface="Courier New" pitchFamily="49" charset="0"/>
+                <a:ea typeface="Courier New" pitchFamily="49" charset="-122"/>
+                <a:cs typeface="Courier New" pitchFamily="49" charset="-120"/>
               </a:rPr>
               <a:t>as</a:t>
             </a:r>
@@ -20981,30 +22330,30 @@
               <a:buNone/>
             </a:pPr>
             <a:r>
-              <a:rPr lang="en-US" sz="1150" dirty="0">
+              <a:rPr lang="en-US" sz="1100" dirty="0">
                 <a:solidFill>
                   <a:srgbClr val="E6EDF3"/>
                 </a:solidFill>
-                <a:latin typeface="Consolas" pitchFamily="34" charset="0"/>
-                <a:ea typeface="Consolas" pitchFamily="34" charset="-122"/>
-                <a:cs typeface="Consolas" pitchFamily="34" charset="-120"/>
+                <a:latin typeface="Courier New" pitchFamily="49" charset="0"/>
+                <a:ea typeface="Courier New" pitchFamily="49" charset="-122"/>
+                <a:cs typeface="Courier New" pitchFamily="49" charset="-120"/>
               </a:rPr>
               <a:t> q:</a:t>
             </a:r>
-            <a:endParaRPr lang="en-US" sz="1150" dirty="0"/>
-          </a:p>
-          <a:p>
-            <a:pPr indent="0" marL="0">
-              <a:buNone/>
-            </a:pPr>
-            <a:r>
-              <a:rPr lang="en-US" sz="1150" dirty="0">
+            <a:endParaRPr lang="en-US" sz="1100" dirty="0"/>
+          </a:p>
+          <a:p>
+            <a:pPr indent="0" marL="0">
+              <a:buNone/>
+            </a:pPr>
+            <a:r>
+              <a:rPr lang="en-US" sz="1100" dirty="0">
                 <a:solidFill>
                   <a:srgbClr val="E6EDF3"/>
                 </a:solidFill>
-                <a:latin typeface="Consolas" pitchFamily="34" charset="0"/>
-                <a:ea typeface="Consolas" pitchFamily="34" charset="-122"/>
-                <a:cs typeface="Consolas" pitchFamily="34" charset="-120"/>
+                <a:latin typeface="Courier New" pitchFamily="49" charset="0"/>
+                <a:ea typeface="Courier New" pitchFamily="49" charset="-122"/>
+                <a:cs typeface="Courier New" pitchFamily="49" charset="-120"/>
               </a:rPr>
               <a:t>...     </a:t>
             </a:r>
@@ -21012,13 +22361,13 @@
               <a:buNone/>
             </a:pPr>
             <a:r>
-              <a:rPr lang="en-US" sz="1150" dirty="0">
+              <a:rPr lang="en-US" sz="1100" dirty="0">
                 <a:solidFill>
                   <a:srgbClr val="7DCFFF"/>
                 </a:solidFill>
-                <a:latin typeface="Consolas" pitchFamily="34" charset="0"/>
-                <a:ea typeface="Consolas" pitchFamily="34" charset="-122"/>
-                <a:cs typeface="Consolas" pitchFamily="34" charset="-120"/>
+                <a:latin typeface="Courier New" pitchFamily="49" charset="0"/>
+                <a:ea typeface="Courier New" pitchFamily="49" charset="-122"/>
+                <a:cs typeface="Courier New" pitchFamily="49" charset="-120"/>
               </a:rPr>
               <a:t>for</a:t>
             </a:r>
@@ -21026,13 +22375,13 @@
               <a:buNone/>
             </a:pPr>
             <a:r>
-              <a:rPr lang="en-US" sz="1150" dirty="0">
+              <a:rPr lang="en-US" sz="1100" dirty="0">
                 <a:solidFill>
                   <a:srgbClr val="E6EDF3"/>
                 </a:solidFill>
-                <a:latin typeface="Consolas" pitchFamily="34" charset="0"/>
-                <a:ea typeface="Consolas" pitchFamily="34" charset="-122"/>
-                <a:cs typeface="Consolas" pitchFamily="34" charset="-120"/>
+                <a:latin typeface="Courier New" pitchFamily="49" charset="0"/>
+                <a:ea typeface="Courier New" pitchFamily="49" charset="-122"/>
+                <a:cs typeface="Courier New" pitchFamily="49" charset="-120"/>
               </a:rPr>
               <a:t> i </a:t>
             </a:r>
@@ -21040,13 +22389,13 @@
               <a:buNone/>
             </a:pPr>
             <a:r>
-              <a:rPr lang="en-US" sz="1150" dirty="0">
+              <a:rPr lang="en-US" sz="1100" dirty="0">
                 <a:solidFill>
                   <a:srgbClr val="7DCFFF"/>
                 </a:solidFill>
-                <a:latin typeface="Consolas" pitchFamily="34" charset="0"/>
-                <a:ea typeface="Consolas" pitchFamily="34" charset="-122"/>
-                <a:cs typeface="Consolas" pitchFamily="34" charset="-120"/>
+                <a:latin typeface="Courier New" pitchFamily="49" charset="0"/>
+                <a:ea typeface="Courier New" pitchFamily="49" charset="-122"/>
+                <a:cs typeface="Courier New" pitchFamily="49" charset="-120"/>
               </a:rPr>
               <a:t>in</a:t>
             </a:r>
@@ -21054,47 +22403,47 @@
               <a:buNone/>
             </a:pPr>
             <a:r>
-              <a:rPr lang="en-US" sz="1150" dirty="0">
+              <a:rPr lang="en-US" sz="1100" dirty="0">
                 <a:solidFill>
                   <a:srgbClr val="E6EDF3"/>
                 </a:solidFill>
-                <a:latin typeface="Consolas" pitchFamily="34" charset="0"/>
-                <a:ea typeface="Consolas" pitchFamily="34" charset="-122"/>
-                <a:cs typeface="Consolas" pitchFamily="34" charset="-120"/>
+                <a:latin typeface="Courier New" pitchFamily="49" charset="0"/>
+                <a:ea typeface="Courier New" pitchFamily="49" charset="-122"/>
+                <a:cs typeface="Courier New" pitchFamily="49" charset="-120"/>
               </a:rPr>
               <a:t> qs:</a:t>
             </a:r>
-            <a:endParaRPr lang="en-US" sz="1150" dirty="0"/>
-          </a:p>
-          <a:p>
-            <a:pPr indent="0" marL="0">
-              <a:buNone/>
-            </a:pPr>
-            <a:r>
-              <a:rPr lang="en-US" sz="1150" dirty="0">
+            <a:endParaRPr lang="en-US" sz="1100" dirty="0"/>
+          </a:p>
+          <a:p>
+            <a:pPr indent="0" marL="0">
+              <a:buNone/>
+            </a:pPr>
+            <a:r>
+              <a:rPr lang="en-US" sz="1100" dirty="0">
                 <a:solidFill>
                   <a:srgbClr val="E6EDF3"/>
                 </a:solidFill>
-                <a:latin typeface="Consolas" pitchFamily="34" charset="0"/>
-                <a:ea typeface="Consolas" pitchFamily="34" charset="-122"/>
-                <a:cs typeface="Consolas" pitchFamily="34" charset="-120"/>
+                <a:latin typeface="Courier New" pitchFamily="49" charset="0"/>
+                <a:ea typeface="Courier New" pitchFamily="49" charset="-122"/>
+                <a:cs typeface="Courier New" pitchFamily="49" charset="-120"/>
               </a:rPr>
               <a:t>...         _ = i.aluno.nome, i.disciplina.nome</a:t>
             </a:r>
-            <a:endParaRPr lang="en-US" sz="1150" dirty="0"/>
-          </a:p>
-          <a:p>
-            <a:pPr indent="0" marL="0">
-              <a:buNone/>
-            </a:pPr>
-            <a:r>
-              <a:rPr lang="en-US" sz="1150" dirty="0">
+            <a:endParaRPr lang="en-US" sz="1100" dirty="0"/>
+          </a:p>
+          <a:p>
+            <a:pPr indent="0" marL="0">
+              <a:buNone/>
+            </a:pPr>
+            <a:r>
+              <a:rPr lang="en-US" sz="1100" dirty="0">
                 <a:solidFill>
                   <a:srgbClr val="E6EDF3"/>
                 </a:solidFill>
-                <a:latin typeface="Consolas" pitchFamily="34" charset="0"/>
-                <a:ea typeface="Consolas" pitchFamily="34" charset="-122"/>
-                <a:cs typeface="Consolas" pitchFamily="34" charset="-120"/>
+                <a:latin typeface="Courier New" pitchFamily="49" charset="0"/>
+                <a:ea typeface="Courier New" pitchFamily="49" charset="-122"/>
+                <a:cs typeface="Courier New" pitchFamily="49" charset="-120"/>
               </a:rPr>
               <a:t>&gt;&gt;&gt; len(q)              </a:t>
             </a:r>
@@ -21102,30 +22451,30 @@
               <a:buNone/>
             </a:pPr>
             <a:r>
-              <a:rPr lang="en-US" sz="1150" i="1" dirty="0">
+              <a:rPr lang="en-US" sz="1100" i="1" dirty="0">
                 <a:solidFill>
                   <a:srgbClr val="8B949E"/>
                 </a:solidFill>
-                <a:latin typeface="Consolas" pitchFamily="34" charset="0"/>
-                <a:ea typeface="Consolas" pitchFamily="34" charset="-122"/>
-                <a:cs typeface="Consolas" pitchFamily="34" charset="-120"/>
+                <a:latin typeface="Courier New" pitchFamily="49" charset="0"/>
+                <a:ea typeface="Courier New" pitchFamily="49" charset="-122"/>
+                <a:cs typeface="Courier New" pitchFamily="49" charset="-120"/>
               </a:rPr>
               <a:t># 1</a:t>
             </a:r>
-            <a:endParaRPr lang="en-US" sz="1150" dirty="0"/>
-          </a:p>
-          <a:p>
-            <a:pPr indent="0" marL="0">
-              <a:buNone/>
-            </a:pPr>
-            <a:r>
-              <a:rPr lang="en-US" sz="1150" dirty="0">
+            <a:endParaRPr lang="en-US" sz="1100" dirty="0"/>
+          </a:p>
+          <a:p>
+            <a:pPr indent="0" marL="0">
+              <a:buNone/>
+            </a:pPr>
+            <a:r>
+              <a:rPr lang="en-US" sz="1100" dirty="0">
                 <a:solidFill>
                   <a:srgbClr val="E6EDF3"/>
                 </a:solidFill>
-                <a:latin typeface="Consolas" pitchFamily="34" charset="0"/>
-                <a:ea typeface="Consolas" pitchFamily="34" charset="-122"/>
-                <a:cs typeface="Consolas" pitchFamily="34" charset="-120"/>
+                <a:latin typeface="Courier New" pitchFamily="49" charset="0"/>
+                <a:ea typeface="Courier New" pitchFamily="49" charset="-122"/>
+                <a:cs typeface="Courier New" pitchFamily="49" charset="-120"/>
               </a:rPr>
               <a:t>&gt;&gt;&gt; print(qs.query)     </a:t>
             </a:r>
@@ -21133,17 +22482,17 @@
               <a:buNone/>
             </a:pPr>
             <a:r>
-              <a:rPr lang="en-US" sz="1150" i="1" dirty="0">
+              <a:rPr lang="en-US" sz="1100" i="1" dirty="0">
                 <a:solidFill>
                   <a:srgbClr val="8B949E"/>
                 </a:solidFill>
-                <a:latin typeface="Consolas" pitchFamily="34" charset="0"/>
-                <a:ea typeface="Consolas" pitchFamily="34" charset="-122"/>
-                <a:cs typeface="Consolas" pitchFamily="34" charset="-120"/>
+                <a:latin typeface="Courier New" pitchFamily="49" charset="0"/>
+                <a:ea typeface="Courier New" pitchFamily="49" charset="-122"/>
+                <a:cs typeface="Courier New" pitchFamily="49" charset="-120"/>
               </a:rPr>
               <a:t># o JOIN gerado</a:t>
             </a:r>
-            <a:endParaRPr lang="en-US" sz="1150" dirty="0"/>
+            <a:endParaRPr lang="en-US" sz="1100" dirty="0"/>
           </a:p>
         </p:txBody>
       </p:sp>
@@ -21452,13 +22801,13 @@
               <a:buNone/>
             </a:pPr>
             <a:r>
-              <a:rPr lang="en-US" sz="1300" dirty="0">
+              <a:rPr lang="en-US" sz="1150" dirty="0">
                 <a:solidFill>
                   <a:srgbClr val="00397B"/>
                 </a:solidFill>
-                <a:latin typeface="Consolas" pitchFamily="34" charset="0"/>
-                <a:ea typeface="Consolas" pitchFamily="34" charset="-122"/>
-                <a:cs typeface="Consolas" pitchFamily="34" charset="-120"/>
+                <a:latin typeface="Courier New" pitchFamily="49" charset="0"/>
+                <a:ea typeface="Courier New" pitchFamily="49" charset="-122"/>
+                <a:cs typeface="Courier New" pitchFamily="49" charset="-120"/>
               </a:rPr>
               <a:t>.all()</a:t>
             </a:r>
@@ -21483,13 +22832,13 @@
               <a:buNone/>
             </a:pPr>
             <a:r>
-              <a:rPr lang="en-US" sz="1300" dirty="0">
+              <a:rPr lang="en-US" sz="1150" dirty="0">
                 <a:solidFill>
                   <a:srgbClr val="00397B"/>
                 </a:solidFill>
-                <a:latin typeface="Consolas" pitchFamily="34" charset="0"/>
-                <a:ea typeface="Consolas" pitchFamily="34" charset="-122"/>
-                <a:cs typeface="Consolas" pitchFamily="34" charset="-120"/>
+                <a:latin typeface="Courier New" pitchFamily="49" charset="0"/>
+                <a:ea typeface="Courier New" pitchFamily="49" charset="-122"/>
+                <a:cs typeface="Courier New" pitchFamily="49" charset="-120"/>
               </a:rPr>
               <a:t>.select_related(...)</a:t>
             </a:r>
@@ -21619,7 +22968,7 @@
           <a:ln/>
         </p:spPr>
         <p:txBody>
-          <a:bodyPr wrap="square" lIns="0" tIns="0" rIns="0" bIns="0" rtlCol="0" anchor="ctr"/>
+          <a:bodyPr wrap="none" lIns="0" tIns="0" rIns="0" bIns="0" rtlCol="0" anchor="ctr"/>
           <a:lstStyle/>
           <a:p>
             <a:pPr indent="0" marL="0">
@@ -21630,9 +22979,9 @@
                 <a:solidFill>
                   <a:srgbClr val="00397B"/>
                 </a:solidFill>
-                <a:latin typeface="Consolas" pitchFamily="34" charset="0"/>
-                <a:ea typeface="Consolas" pitchFamily="34" charset="-122"/>
-                <a:cs typeface="Consolas" pitchFamily="34" charset="-120"/>
+                <a:latin typeface="Courier New" pitchFamily="49" charset="0"/>
+                <a:ea typeface="Courier New" pitchFamily="49" charset="-122"/>
+                <a:cs typeface="Courier New" pitchFamily="49" charset="-120"/>
               </a:rPr>
               <a:t>select_related</a:t>
             </a:r>
@@ -21976,7 +23325,7 @@
           <a:ln/>
         </p:spPr>
         <p:txBody>
-          <a:bodyPr wrap="square" lIns="0" tIns="0" rIns="0" bIns="0" rtlCol="0" anchor="t"/>
+          <a:bodyPr wrap="none" lIns="0" tIns="0" rIns="0" bIns="0" rtlCol="0" anchor="t"/>
           <a:lstStyle/>
           <a:p>
             <a:pPr indent="0" marL="0">
@@ -21987,9 +23336,9 @@
                 <a:solidFill>
                   <a:srgbClr val="E6EDF3"/>
                 </a:solidFill>
-                <a:latin typeface="Consolas" pitchFamily="34" charset="0"/>
-                <a:ea typeface="Consolas" pitchFamily="34" charset="-122"/>
-                <a:cs typeface="Consolas" pitchFamily="34" charset="-120"/>
+                <a:latin typeface="Courier New" pitchFamily="49" charset="0"/>
+                <a:ea typeface="Courier New" pitchFamily="49" charset="-122"/>
+                <a:cs typeface="Courier New" pitchFamily="49" charset="-120"/>
               </a:rPr>
               <a:t>Inscricao.objects.select_related(</a:t>
             </a:r>
@@ -22004,9 +23353,9 @@
                 <a:solidFill>
                   <a:srgbClr val="E6EDF3"/>
                 </a:solidFill>
-                <a:latin typeface="Consolas" pitchFamily="34" charset="0"/>
-                <a:ea typeface="Consolas" pitchFamily="34" charset="-122"/>
-                <a:cs typeface="Consolas" pitchFamily="34" charset="-120"/>
+                <a:latin typeface="Courier New" pitchFamily="49" charset="0"/>
+                <a:ea typeface="Courier New" pitchFamily="49" charset="-122"/>
+                <a:cs typeface="Courier New" pitchFamily="49" charset="-120"/>
               </a:rPr>
               <a:t>    </a:t>
             </a:r>
@@ -22018,9 +23367,9 @@
                 <a:solidFill>
                   <a:srgbClr val="F0C674"/>
                 </a:solidFill>
-                <a:latin typeface="Consolas" pitchFamily="34" charset="0"/>
-                <a:ea typeface="Consolas" pitchFamily="34" charset="-122"/>
-                <a:cs typeface="Consolas" pitchFamily="34" charset="-120"/>
+                <a:latin typeface="Courier New" pitchFamily="49" charset="0"/>
+                <a:ea typeface="Courier New" pitchFamily="49" charset="-122"/>
+                <a:cs typeface="Courier New" pitchFamily="49" charset="-120"/>
               </a:rPr>
               <a:t>"aluno"</a:t>
             </a:r>
@@ -22032,9 +23381,9 @@
                 <a:solidFill>
                   <a:srgbClr val="E6EDF3"/>
                 </a:solidFill>
-                <a:latin typeface="Consolas" pitchFamily="34" charset="0"/>
-                <a:ea typeface="Consolas" pitchFamily="34" charset="-122"/>
-                <a:cs typeface="Consolas" pitchFamily="34" charset="-120"/>
+                <a:latin typeface="Courier New" pitchFamily="49" charset="0"/>
+                <a:ea typeface="Courier New" pitchFamily="49" charset="-122"/>
+                <a:cs typeface="Courier New" pitchFamily="49" charset="-120"/>
               </a:rPr>
               <a:t>, </a:t>
             </a:r>
@@ -22046,9 +23395,9 @@
                 <a:solidFill>
                   <a:srgbClr val="F0C674"/>
                 </a:solidFill>
-                <a:latin typeface="Consolas" pitchFamily="34" charset="0"/>
-                <a:ea typeface="Consolas" pitchFamily="34" charset="-122"/>
-                <a:cs typeface="Consolas" pitchFamily="34" charset="-120"/>
+                <a:latin typeface="Courier New" pitchFamily="49" charset="0"/>
+                <a:ea typeface="Courier New" pitchFamily="49" charset="-122"/>
+                <a:cs typeface="Courier New" pitchFamily="49" charset="-120"/>
               </a:rPr>
               <a:t>"disciplina"</a:t>
             </a:r>
@@ -22060,9 +23409,9 @@
                 <a:solidFill>
                   <a:srgbClr val="E6EDF3"/>
                 </a:solidFill>
-                <a:latin typeface="Consolas" pitchFamily="34" charset="0"/>
-                <a:ea typeface="Consolas" pitchFamily="34" charset="-122"/>
-                <a:cs typeface="Consolas" pitchFamily="34" charset="-120"/>
+                <a:latin typeface="Courier New" pitchFamily="49" charset="0"/>
+                <a:ea typeface="Courier New" pitchFamily="49" charset="-122"/>
+                <a:cs typeface="Courier New" pitchFamily="49" charset="-120"/>
               </a:rPr>
               <a:t>)</a:t>
             </a:r>
@@ -22115,7 +23464,7 @@
           <a:ln/>
         </p:spPr>
         <p:txBody>
-          <a:bodyPr wrap="square" lIns="0" tIns="0" rIns="0" bIns="0" rtlCol="0" anchor="ctr"/>
+          <a:bodyPr wrap="none" lIns="0" tIns="0" rIns="0" bIns="0" rtlCol="0" anchor="ctr"/>
           <a:lstStyle/>
           <a:p>
             <a:pPr indent="0" marL="0">
@@ -22126,9 +23475,9 @@
                 <a:solidFill>
                   <a:srgbClr val="00397B"/>
                 </a:solidFill>
-                <a:latin typeface="Consolas" pitchFamily="34" charset="0"/>
-                <a:ea typeface="Consolas" pitchFamily="34" charset="-122"/>
-                <a:cs typeface="Consolas" pitchFamily="34" charset="-120"/>
+                <a:latin typeface="Courier New" pitchFamily="49" charset="0"/>
+                <a:ea typeface="Courier New" pitchFamily="49" charset="-122"/>
+                <a:cs typeface="Courier New" pitchFamily="49" charset="-120"/>
               </a:rPr>
               <a:t>prefetch_related</a:t>
             </a:r>
@@ -22472,7 +23821,7 @@
           <a:ln/>
         </p:spPr>
         <p:txBody>
-          <a:bodyPr wrap="square" lIns="0" tIns="0" rIns="0" bIns="0" rtlCol="0" anchor="t"/>
+          <a:bodyPr wrap="none" lIns="0" tIns="0" rIns="0" bIns="0" rtlCol="0" anchor="t"/>
           <a:lstStyle/>
           <a:p>
             <a:pPr indent="0" marL="0">
@@ -22483,9 +23832,9 @@
                 <a:solidFill>
                   <a:srgbClr val="E6EDF3"/>
                 </a:solidFill>
-                <a:latin typeface="Consolas" pitchFamily="34" charset="0"/>
-                <a:ea typeface="Consolas" pitchFamily="34" charset="-122"/>
-                <a:cs typeface="Consolas" pitchFamily="34" charset="-120"/>
+                <a:latin typeface="Courier New" pitchFamily="49" charset="0"/>
+                <a:ea typeface="Courier New" pitchFamily="49" charset="-122"/>
+                <a:cs typeface="Courier New" pitchFamily="49" charset="-120"/>
               </a:rPr>
               <a:t>Aluno.objects.prefetch_related(</a:t>
             </a:r>
@@ -22500,9 +23849,9 @@
                 <a:solidFill>
                   <a:srgbClr val="E6EDF3"/>
                 </a:solidFill>
-                <a:latin typeface="Consolas" pitchFamily="34" charset="0"/>
-                <a:ea typeface="Consolas" pitchFamily="34" charset="-122"/>
-                <a:cs typeface="Consolas" pitchFamily="34" charset="-120"/>
+                <a:latin typeface="Courier New" pitchFamily="49" charset="0"/>
+                <a:ea typeface="Courier New" pitchFamily="49" charset="-122"/>
+                <a:cs typeface="Courier New" pitchFamily="49" charset="-120"/>
               </a:rPr>
               <a:t>    </a:t>
             </a:r>
@@ -22514,9 +23863,9 @@
                 <a:solidFill>
                   <a:srgbClr val="F0C674"/>
                 </a:solidFill>
-                <a:latin typeface="Consolas" pitchFamily="34" charset="0"/>
-                <a:ea typeface="Consolas" pitchFamily="34" charset="-122"/>
-                <a:cs typeface="Consolas" pitchFamily="34" charset="-120"/>
+                <a:latin typeface="Courier New" pitchFamily="49" charset="0"/>
+                <a:ea typeface="Courier New" pitchFamily="49" charset="-122"/>
+                <a:cs typeface="Courier New" pitchFamily="49" charset="-120"/>
               </a:rPr>
               <a:t>"inscricoes"</a:t>
             </a:r>
@@ -22528,9 +23877,9 @@
                 <a:solidFill>
                   <a:srgbClr val="E6EDF3"/>
                 </a:solidFill>
-                <a:latin typeface="Consolas" pitchFamily="34" charset="0"/>
-                <a:ea typeface="Consolas" pitchFamily="34" charset="-122"/>
-                <a:cs typeface="Consolas" pitchFamily="34" charset="-120"/>
+                <a:latin typeface="Courier New" pitchFamily="49" charset="0"/>
+                <a:ea typeface="Courier New" pitchFamily="49" charset="-122"/>
+                <a:cs typeface="Courier New" pitchFamily="49" charset="-120"/>
               </a:rPr>
               <a:t>)</a:t>
             </a:r>
@@ -22574,13 +23923,13 @@
               <a:buNone/>
             </a:pPr>
             <a:r>
-              <a:rPr lang="en-US" sz="1500" i="1" dirty="0">
+              <a:rPr lang="en-US" sz="1350" i="1" dirty="0">
                 <a:solidFill>
                   <a:srgbClr val="1185AA"/>
                 </a:solidFill>
-                <a:latin typeface="Consolas" pitchFamily="34" charset="0"/>
-                <a:ea typeface="Consolas" pitchFamily="34" charset="-122"/>
-                <a:cs typeface="Consolas" pitchFamily="34" charset="-120"/>
+                <a:latin typeface="Courier New" pitchFamily="49" charset="0"/>
+                <a:ea typeface="Courier New" pitchFamily="49" charset="-122"/>
+                <a:cs typeface="Courier New" pitchFamily="49" charset="-120"/>
               </a:rPr>
               <a:t>select_related</a:t>
             </a:r>
